--- a/courses/research-in-finance/lectures/lecture-05-brown-bag-seminar/slides.pptx
+++ b/courses/research-in-finance/lectures/lecture-05-brown-bag-seminar/slides.pptx
@@ -4,16 +4,7 @@
   <p:sldMasterIdLst>
     <p:sldMasterId id="2147483648" r:id="rId1"/>
   </p:sldMasterIdLst>
-  <p:sldIdLst>
-    <p:sldId id="256" r:id="rId2"/>
-    <p:sldId id="257" r:id="rId3"/>
-    <p:sldId id="258" r:id="rId4"/>
-    <p:sldId id="259" r:id="rId5"/>
-    <p:sldId id="260" r:id="rId6"/>
-    <p:sldId id="261" r:id="rId7"/>
-    <p:sldId id="262" r:id="rId8"/>
-  </p:sldIdLst>
-  <p:sldSz cx="9144000" cy="5143500" type="screen16x9"/>
+  <p:sldSz cx="12191695" cy="6858000" type="screen4x3"/>
   <p:notesSz cx="6858000" cy="9144000"/>
   <p:defaultTextStyle>
     <a:defPPr>
@@ -110,22 +101,6 @@
       </a:defRPr>
     </a:lvl9pPr>
   </p:defaultTextStyle>
-  <p:extLst>
-    <p:ext uri="{EFAFB233-063F-42B5-8137-9DF3F51BA10A}">
-      <p15:sldGuideLst xmlns:p15="http://schemas.microsoft.com/office/powerpoint/2012/main">
-        <p15:guide id="1" orient="horz" pos="1620" userDrawn="1">
-          <p15:clr>
-            <a:srgbClr val="A4A3A4"/>
-          </p15:clr>
-        </p15:guide>
-        <p15:guide id="2" pos="2880" userDrawn="1">
-          <p15:clr>
-            <a:srgbClr val="A4A3A4"/>
-          </p15:clr>
-        </p15:guide>
-      </p15:sldGuideLst>
-    </p:ext>
-  </p:extLst>
 </p:presentation>
 </file>
 
@@ -158,8 +133,8 @@
         </p:nvSpPr>
         <p:spPr>
           <a:xfrm>
-            <a:off x="685800" y="1597819"/>
-            <a:ext cx="7772400" cy="1102519"/>
+            <a:off x="685800" y="2130425"/>
+            <a:ext cx="7772400" cy="1470025"/>
           </a:xfrm>
         </p:spPr>
         <p:txBody>
@@ -167,9 +142,14 @@
           <a:lstStyle/>
           <a:p>
             <a:r>
-              <a:rPr lang="en-US"/>
+              <a:rPr lang="en-US" smtClean="0">
+                <a:solidFill>
+                  <a:srgbClr val="111111"/>
+                </a:solidFill>
+              </a:rPr>
               <a:t>Click to edit Master title style</a:t>
             </a:r>
+            <a:endParaRPr lang="en-US"/>
           </a:p>
         </p:txBody>
       </p:sp>
@@ -185,8 +165,8 @@
         </p:nvSpPr>
         <p:spPr>
           <a:xfrm>
-            <a:off x="1371600" y="2914650"/>
-            <a:ext cx="6400800" cy="1314450"/>
+            <a:off x="1371600" y="3886200"/>
+            <a:ext cx="6400800" cy="1752600"/>
           </a:xfrm>
         </p:spPr>
         <p:txBody>
@@ -196,98 +176,85 @@
               <a:buNone/>
               <a:defRPr>
                 <a:solidFill>
-                  <a:schemeClr val="tx1">
-                    <a:tint val="75000"/>
-                  </a:schemeClr>
+                  <a:srgbClr val="111111"/>
                 </a:solidFill>
               </a:defRPr>
             </a:lvl1pPr>
-            <a:lvl2pPr marL="342900" indent="0" algn="ctr">
+            <a:lvl2pPr marL="457200" indent="0" algn="ctr">
               <a:buNone/>
               <a:defRPr>
                 <a:solidFill>
-                  <a:schemeClr val="tx1">
-                    <a:tint val="75000"/>
-                  </a:schemeClr>
+                  <a:srgbClr val="111111"/>
                 </a:solidFill>
               </a:defRPr>
             </a:lvl2pPr>
-            <a:lvl3pPr marL="685800" indent="0" algn="ctr">
+            <a:lvl3pPr marL="914400" indent="0" algn="ctr">
               <a:buNone/>
               <a:defRPr>
                 <a:solidFill>
-                  <a:schemeClr val="tx1">
-                    <a:tint val="75000"/>
-                  </a:schemeClr>
+                  <a:srgbClr val="111111"/>
                 </a:solidFill>
               </a:defRPr>
             </a:lvl3pPr>
-            <a:lvl4pPr marL="1028700" indent="0" algn="ctr">
+            <a:lvl4pPr marL="1371600" indent="0" algn="ctr">
               <a:buNone/>
               <a:defRPr>
                 <a:solidFill>
-                  <a:schemeClr val="tx1">
-                    <a:tint val="75000"/>
-                  </a:schemeClr>
+                  <a:srgbClr val="111111"/>
                 </a:solidFill>
               </a:defRPr>
             </a:lvl4pPr>
-            <a:lvl5pPr marL="1371600" indent="0" algn="ctr">
+            <a:lvl5pPr marL="1828800" indent="0" algn="ctr">
               <a:buNone/>
               <a:defRPr>
                 <a:solidFill>
-                  <a:schemeClr val="tx1">
-                    <a:tint val="75000"/>
-                  </a:schemeClr>
+                  <a:srgbClr val="111111"/>
                 </a:solidFill>
               </a:defRPr>
             </a:lvl5pPr>
-            <a:lvl6pPr marL="1714500" indent="0" algn="ctr">
+            <a:lvl6pPr marL="2286000" indent="0" algn="ctr">
               <a:buNone/>
               <a:defRPr>
                 <a:solidFill>
-                  <a:schemeClr val="tx1">
-                    <a:tint val="75000"/>
-                  </a:schemeClr>
+                  <a:srgbClr val="111111"/>
                 </a:solidFill>
               </a:defRPr>
             </a:lvl6pPr>
-            <a:lvl7pPr marL="2057400" indent="0" algn="ctr">
+            <a:lvl7pPr marL="2743200" indent="0" algn="ctr">
               <a:buNone/>
               <a:defRPr>
                 <a:solidFill>
-                  <a:schemeClr val="tx1">
-                    <a:tint val="75000"/>
-                  </a:schemeClr>
+                  <a:srgbClr val="111111"/>
                 </a:solidFill>
               </a:defRPr>
             </a:lvl7pPr>
-            <a:lvl8pPr marL="2400300" indent="0" algn="ctr">
+            <a:lvl8pPr marL="3200400" indent="0" algn="ctr">
               <a:buNone/>
               <a:defRPr>
                 <a:solidFill>
-                  <a:schemeClr val="tx1">
-                    <a:tint val="75000"/>
-                  </a:schemeClr>
+                  <a:srgbClr val="111111"/>
                 </a:solidFill>
               </a:defRPr>
             </a:lvl8pPr>
-            <a:lvl9pPr marL="2743200" indent="0" algn="ctr">
+            <a:lvl9pPr marL="3657600" indent="0" algn="ctr">
               <a:buNone/>
               <a:defRPr>
                 <a:solidFill>
-                  <a:schemeClr val="tx1">
-                    <a:tint val="75000"/>
-                  </a:schemeClr>
+                  <a:srgbClr val="111111"/>
                 </a:solidFill>
               </a:defRPr>
             </a:lvl9pPr>
           </a:lstStyle>
           <a:p>
             <a:r>
-              <a:rPr lang="en-US"/>
+              <a:rPr lang="en-US" smtClean="0">
+                <a:solidFill>
+                  <a:srgbClr val="111111"/>
+                </a:solidFill>
+              </a:rPr>
               <a:t>Click to edit Master subtitle style</a:t>
             </a:r>
+            <a:endParaRPr lang="en-US"/>
           </a:p>
         </p:txBody>
       </p:sp>
@@ -306,9 +273,13 @@
           <a:bodyPr/>
           <a:lstStyle/>
           <a:p>
-            <a:fld id="{241EB5C9-1307-BA42-ABA2-0BC069CD8E7F}" type="datetimeFigureOut">
-              <a:rPr lang="en-US" smtClean="0"/>
-              <a:t>1/2/22</a:t>
+            <a:fld id="{5BCAD085-E8A6-8845-BD4E-CB4CCA059FC4}" type="datetimeFigureOut">
+              <a:rPr lang="en-US" smtClean="0">
+                <a:solidFill>
+                  <a:srgbClr val="111111"/>
+                </a:solidFill>
+              </a:rPr>
+              <a:t>1/27/13</a:t>
             </a:fld>
             <a:endParaRPr lang="en-US"/>
           </a:p>
@@ -348,8 +319,12 @@
           <a:bodyPr/>
           <a:lstStyle/>
           <a:p>
-            <a:fld id="{C5EF2332-01BF-834F-8236-50238282D533}" type="slidenum">
-              <a:rPr lang="en-US" smtClean="0"/>
+            <a:fld id="{C1FF6DA9-008F-8B48-92A6-B652298478BF}" type="slidenum">
+              <a:rPr lang="en-US" smtClean="0">
+                <a:solidFill>
+                  <a:srgbClr val="111111"/>
+                </a:solidFill>
+              </a:rPr>
               <a:t>‹#›</a:t>
             </a:fld>
             <a:endParaRPr lang="en-US"/>
@@ -359,7 +334,7 @@
     </p:spTree>
     <p:extLst>
       <p:ext uri="{BB962C8B-B14F-4D97-AF65-F5344CB8AC3E}">
-        <p14:creationId xmlns:p14="http://schemas.microsoft.com/office/powerpoint/2010/main" val="1444357513"/>
+        <p14:creationId xmlns:p14="http://schemas.microsoft.com/office/powerpoint/2010/main" val="3168075583"/>
       </p:ext>
     </p:extLst>
   </p:cSld>
@@ -402,9 +377,14 @@
           <a:lstStyle/>
           <a:p>
             <a:r>
-              <a:rPr lang="en-US"/>
+              <a:rPr lang="en-US" smtClean="0">
+                <a:solidFill>
+                  <a:srgbClr val="111111"/>
+                </a:solidFill>
+              </a:rPr>
               <a:t>Click to edit Master title style</a:t>
             </a:r>
+            <a:endParaRPr lang="en-US"/>
           </a:p>
         </p:txBody>
       </p:sp>
@@ -425,37 +405,58 @@
           <a:p>
             <a:pPr lvl="0"/>
             <a:r>
-              <a:rPr lang="en-US"/>
+              <a:rPr lang="en-US" smtClean="0">
+                <a:solidFill>
+                  <a:srgbClr val="111111"/>
+                </a:solidFill>
+              </a:rPr>
               <a:t>Click to edit Master text styles</a:t>
             </a:r>
           </a:p>
           <a:p>
             <a:pPr lvl="1"/>
             <a:r>
-              <a:rPr lang="en-US"/>
+              <a:rPr lang="en-US" smtClean="0">
+                <a:solidFill>
+                  <a:srgbClr val="111111"/>
+                </a:solidFill>
+              </a:rPr>
               <a:t>Second level</a:t>
             </a:r>
           </a:p>
           <a:p>
             <a:pPr lvl="2"/>
             <a:r>
-              <a:rPr lang="en-US"/>
+              <a:rPr lang="en-US" smtClean="0">
+                <a:solidFill>
+                  <a:srgbClr val="111111"/>
+                </a:solidFill>
+              </a:rPr>
               <a:t>Third level</a:t>
             </a:r>
           </a:p>
           <a:p>
             <a:pPr lvl="3"/>
             <a:r>
-              <a:rPr lang="en-US"/>
+              <a:rPr lang="en-US" smtClean="0">
+                <a:solidFill>
+                  <a:srgbClr val="111111"/>
+                </a:solidFill>
+              </a:rPr>
               <a:t>Fourth level</a:t>
             </a:r>
           </a:p>
           <a:p>
             <a:pPr lvl="4"/>
             <a:r>
-              <a:rPr lang="en-US"/>
+              <a:rPr lang="en-US" smtClean="0">
+                <a:solidFill>
+                  <a:srgbClr val="111111"/>
+                </a:solidFill>
+              </a:rPr>
               <a:t>Fifth level</a:t>
             </a:r>
+            <a:endParaRPr lang="en-US"/>
           </a:p>
         </p:txBody>
       </p:sp>
@@ -474,9 +475,13 @@
           <a:bodyPr/>
           <a:lstStyle/>
           <a:p>
-            <a:fld id="{241EB5C9-1307-BA42-ABA2-0BC069CD8E7F}" type="datetimeFigureOut">
-              <a:rPr lang="en-US" smtClean="0"/>
-              <a:t>1/2/22</a:t>
+            <a:fld id="{5BCAD085-E8A6-8845-BD4E-CB4CCA059FC4}" type="datetimeFigureOut">
+              <a:rPr lang="en-US" smtClean="0">
+                <a:solidFill>
+                  <a:srgbClr val="111111"/>
+                </a:solidFill>
+              </a:rPr>
+              <a:t>1/27/13</a:t>
             </a:fld>
             <a:endParaRPr lang="en-US"/>
           </a:p>
@@ -516,8 +521,12 @@
           <a:bodyPr/>
           <a:lstStyle/>
           <a:p>
-            <a:fld id="{C5EF2332-01BF-834F-8236-50238282D533}" type="slidenum">
-              <a:rPr lang="en-US" smtClean="0"/>
+            <a:fld id="{C1FF6DA9-008F-8B48-92A6-B652298478BF}" type="slidenum">
+              <a:rPr lang="en-US" smtClean="0">
+                <a:solidFill>
+                  <a:srgbClr val="111111"/>
+                </a:solidFill>
+              </a:rPr>
               <a:t>‹#›</a:t>
             </a:fld>
             <a:endParaRPr lang="en-US"/>
@@ -527,7 +536,7 @@
     </p:spTree>
     <p:extLst>
       <p:ext uri="{BB962C8B-B14F-4D97-AF65-F5344CB8AC3E}">
-        <p14:creationId xmlns:p14="http://schemas.microsoft.com/office/powerpoint/2010/main" val="313914798"/>
+        <p14:creationId xmlns:p14="http://schemas.microsoft.com/office/powerpoint/2010/main" val="2910927964"/>
       </p:ext>
     </p:extLst>
   </p:cSld>
@@ -566,8 +575,8 @@
         </p:nvSpPr>
         <p:spPr>
           <a:xfrm>
-            <a:off x="6629400" y="205979"/>
-            <a:ext cx="2057400" cy="4388644"/>
+            <a:off x="6629400" y="274638"/>
+            <a:ext cx="2057400" cy="5851525"/>
           </a:xfrm>
         </p:spPr>
         <p:txBody>
@@ -575,9 +584,14 @@
           <a:lstStyle/>
           <a:p>
             <a:r>
-              <a:rPr lang="en-US"/>
+              <a:rPr lang="en-US" smtClean="0">
+                <a:solidFill>
+                  <a:srgbClr val="111111"/>
+                </a:solidFill>
+              </a:rPr>
               <a:t>Click to edit Master title style</a:t>
             </a:r>
+            <a:endParaRPr lang="en-US"/>
           </a:p>
         </p:txBody>
       </p:sp>
@@ -593,8 +607,8 @@
         </p:nvSpPr>
         <p:spPr>
           <a:xfrm>
-            <a:off x="457200" y="205979"/>
-            <a:ext cx="6019800" cy="4388644"/>
+            <a:off x="457200" y="274638"/>
+            <a:ext cx="6019800" cy="5851525"/>
           </a:xfrm>
         </p:spPr>
         <p:txBody>
@@ -603,37 +617,58 @@
           <a:p>
             <a:pPr lvl="0"/>
             <a:r>
-              <a:rPr lang="en-US"/>
+              <a:rPr lang="en-US" smtClean="0">
+                <a:solidFill>
+                  <a:srgbClr val="111111"/>
+                </a:solidFill>
+              </a:rPr>
               <a:t>Click to edit Master text styles</a:t>
             </a:r>
           </a:p>
           <a:p>
             <a:pPr lvl="1"/>
             <a:r>
-              <a:rPr lang="en-US"/>
+              <a:rPr lang="en-US" smtClean="0">
+                <a:solidFill>
+                  <a:srgbClr val="111111"/>
+                </a:solidFill>
+              </a:rPr>
               <a:t>Second level</a:t>
             </a:r>
           </a:p>
           <a:p>
             <a:pPr lvl="2"/>
             <a:r>
-              <a:rPr lang="en-US"/>
+              <a:rPr lang="en-US" smtClean="0">
+                <a:solidFill>
+                  <a:srgbClr val="111111"/>
+                </a:solidFill>
+              </a:rPr>
               <a:t>Third level</a:t>
             </a:r>
           </a:p>
           <a:p>
             <a:pPr lvl="3"/>
             <a:r>
-              <a:rPr lang="en-US"/>
+              <a:rPr lang="en-US" smtClean="0">
+                <a:solidFill>
+                  <a:srgbClr val="111111"/>
+                </a:solidFill>
+              </a:rPr>
               <a:t>Fourth level</a:t>
             </a:r>
           </a:p>
           <a:p>
             <a:pPr lvl="4"/>
             <a:r>
-              <a:rPr lang="en-US"/>
+              <a:rPr lang="en-US" smtClean="0">
+                <a:solidFill>
+                  <a:srgbClr val="111111"/>
+                </a:solidFill>
+              </a:rPr>
               <a:t>Fifth level</a:t>
             </a:r>
+            <a:endParaRPr lang="en-US"/>
           </a:p>
         </p:txBody>
       </p:sp>
@@ -652,9 +687,13 @@
           <a:bodyPr/>
           <a:lstStyle/>
           <a:p>
-            <a:fld id="{241EB5C9-1307-BA42-ABA2-0BC069CD8E7F}" type="datetimeFigureOut">
-              <a:rPr lang="en-US" smtClean="0"/>
-              <a:t>1/2/22</a:t>
+            <a:fld id="{5BCAD085-E8A6-8845-BD4E-CB4CCA059FC4}" type="datetimeFigureOut">
+              <a:rPr lang="en-US" smtClean="0">
+                <a:solidFill>
+                  <a:srgbClr val="111111"/>
+                </a:solidFill>
+              </a:rPr>
+              <a:t>1/27/13</a:t>
             </a:fld>
             <a:endParaRPr lang="en-US"/>
           </a:p>
@@ -694,8 +733,12 @@
           <a:bodyPr/>
           <a:lstStyle/>
           <a:p>
-            <a:fld id="{C5EF2332-01BF-834F-8236-50238282D533}" type="slidenum">
-              <a:rPr lang="en-US" smtClean="0"/>
+            <a:fld id="{C1FF6DA9-008F-8B48-92A6-B652298478BF}" type="slidenum">
+              <a:rPr lang="en-US" smtClean="0">
+                <a:solidFill>
+                  <a:srgbClr val="111111"/>
+                </a:solidFill>
+              </a:rPr>
               <a:t>‹#›</a:t>
             </a:fld>
             <a:endParaRPr lang="en-US"/>
@@ -705,7 +748,7 @@
     </p:spTree>
     <p:extLst>
       <p:ext uri="{BB962C8B-B14F-4D97-AF65-F5344CB8AC3E}">
-        <p14:creationId xmlns:p14="http://schemas.microsoft.com/office/powerpoint/2010/main" val="2581529045"/>
+        <p14:creationId xmlns:p14="http://schemas.microsoft.com/office/powerpoint/2010/main" val="3612223792"/>
       </p:ext>
     </p:extLst>
   </p:cSld>
@@ -748,9 +791,14 @@
           <a:lstStyle/>
           <a:p>
             <a:r>
-              <a:rPr lang="en-US"/>
+              <a:rPr lang="en-US" smtClean="0">
+                <a:solidFill>
+                  <a:srgbClr val="111111"/>
+                </a:solidFill>
+              </a:rPr>
               <a:t>Click to edit Master title style</a:t>
             </a:r>
+            <a:endParaRPr lang="en-US"/>
           </a:p>
         </p:txBody>
       </p:sp>
@@ -771,37 +819,58 @@
           <a:p>
             <a:pPr lvl="0"/>
             <a:r>
-              <a:rPr lang="en-US"/>
+              <a:rPr lang="en-US" smtClean="0">
+                <a:solidFill>
+                  <a:srgbClr val="111111"/>
+                </a:solidFill>
+              </a:rPr>
               <a:t>Click to edit Master text styles</a:t>
             </a:r>
           </a:p>
           <a:p>
             <a:pPr lvl="1"/>
             <a:r>
-              <a:rPr lang="en-US"/>
+              <a:rPr lang="en-US" smtClean="0">
+                <a:solidFill>
+                  <a:srgbClr val="111111"/>
+                </a:solidFill>
+              </a:rPr>
               <a:t>Second level</a:t>
             </a:r>
           </a:p>
           <a:p>
             <a:pPr lvl="2"/>
             <a:r>
-              <a:rPr lang="en-US"/>
+              <a:rPr lang="en-US" smtClean="0">
+                <a:solidFill>
+                  <a:srgbClr val="111111"/>
+                </a:solidFill>
+              </a:rPr>
               <a:t>Third level</a:t>
             </a:r>
           </a:p>
           <a:p>
             <a:pPr lvl="3"/>
             <a:r>
-              <a:rPr lang="en-US"/>
+              <a:rPr lang="en-US" smtClean="0">
+                <a:solidFill>
+                  <a:srgbClr val="111111"/>
+                </a:solidFill>
+              </a:rPr>
               <a:t>Fourth level</a:t>
             </a:r>
           </a:p>
           <a:p>
             <a:pPr lvl="4"/>
             <a:r>
-              <a:rPr lang="en-US"/>
+              <a:rPr lang="en-US" smtClean="0">
+                <a:solidFill>
+                  <a:srgbClr val="111111"/>
+                </a:solidFill>
+              </a:rPr>
               <a:t>Fifth level</a:t>
             </a:r>
+            <a:endParaRPr lang="en-US"/>
           </a:p>
         </p:txBody>
       </p:sp>
@@ -820,9 +889,13 @@
           <a:bodyPr/>
           <a:lstStyle/>
           <a:p>
-            <a:fld id="{241EB5C9-1307-BA42-ABA2-0BC069CD8E7F}" type="datetimeFigureOut">
-              <a:rPr lang="en-US" smtClean="0"/>
-              <a:t>1/2/22</a:t>
+            <a:fld id="{5BCAD085-E8A6-8845-BD4E-CB4CCA059FC4}" type="datetimeFigureOut">
+              <a:rPr lang="en-US" smtClean="0">
+                <a:solidFill>
+                  <a:srgbClr val="111111"/>
+                </a:solidFill>
+              </a:rPr>
+              <a:t>1/27/13</a:t>
             </a:fld>
             <a:endParaRPr lang="en-US"/>
           </a:p>
@@ -862,8 +935,12 @@
           <a:bodyPr/>
           <a:lstStyle/>
           <a:p>
-            <a:fld id="{C5EF2332-01BF-834F-8236-50238282D533}" type="slidenum">
-              <a:rPr lang="en-US" smtClean="0"/>
+            <a:fld id="{C1FF6DA9-008F-8B48-92A6-B652298478BF}" type="slidenum">
+              <a:rPr lang="en-US" smtClean="0">
+                <a:solidFill>
+                  <a:srgbClr val="111111"/>
+                </a:solidFill>
+              </a:rPr>
               <a:t>‹#›</a:t>
             </a:fld>
             <a:endParaRPr lang="en-US"/>
@@ -873,7 +950,7 @@
     </p:spTree>
     <p:extLst>
       <p:ext uri="{BB962C8B-B14F-4D97-AF65-F5344CB8AC3E}">
-        <p14:creationId xmlns:p14="http://schemas.microsoft.com/office/powerpoint/2010/main" val="338346009"/>
+        <p14:creationId xmlns:p14="http://schemas.microsoft.com/office/powerpoint/2010/main" val="2614314258"/>
       </p:ext>
     </p:extLst>
   </p:cSld>
@@ -912,22 +989,31 @@
         </p:nvSpPr>
         <p:spPr>
           <a:xfrm>
-            <a:off x="722313" y="3305176"/>
-            <a:ext cx="7772400" cy="1021556"/>
+            <a:off x="722313" y="4406900"/>
+            <a:ext cx="7772400" cy="1362075"/>
           </a:xfrm>
         </p:spPr>
         <p:txBody>
           <a:bodyPr anchor="t"/>
           <a:lstStyle>
             <a:lvl1pPr algn="l">
-              <a:defRPr sz="3000" b="1" cap="all"/>
+              <a:defRPr sz="4000" b="1" cap="all">
+                <a:solidFill>
+                  <a:srgbClr val="111111"/>
+                </a:solidFill>
+              </a:defRPr>
             </a:lvl1pPr>
           </a:lstStyle>
           <a:p>
             <a:r>
-              <a:rPr lang="en-US"/>
+              <a:rPr lang="en-US" smtClean="0">
+                <a:solidFill>
+                  <a:srgbClr val="111111"/>
+                </a:solidFill>
+              </a:rPr>
               <a:t>Click to edit Master title style</a:t>
             </a:r>
+            <a:endParaRPr lang="en-US"/>
           </a:p>
         </p:txBody>
       </p:sp>
@@ -943,8 +1029,8 @@
         </p:nvSpPr>
         <p:spPr>
           <a:xfrm>
-            <a:off x="722313" y="2180035"/>
-            <a:ext cx="7772400" cy="1125140"/>
+            <a:off x="722313" y="2906713"/>
+            <a:ext cx="7772400" cy="1500187"/>
           </a:xfrm>
         </p:spPr>
         <p:txBody>
@@ -952,91 +1038,73 @@
           <a:lstStyle>
             <a:lvl1pPr marL="0" indent="0">
               <a:buNone/>
-              <a:defRPr sz="1500">
-                <a:solidFill>
-                  <a:schemeClr val="tx1">
-                    <a:tint val="75000"/>
-                  </a:schemeClr>
+              <a:defRPr sz="2000">
+                <a:solidFill>
+                  <a:srgbClr val="111111"/>
                 </a:solidFill>
               </a:defRPr>
             </a:lvl1pPr>
-            <a:lvl2pPr marL="342900" indent="0">
-              <a:buNone/>
-              <a:defRPr sz="1350">
-                <a:solidFill>
-                  <a:schemeClr val="tx1">
-                    <a:tint val="75000"/>
-                  </a:schemeClr>
+            <a:lvl2pPr marL="457200" indent="0">
+              <a:buNone/>
+              <a:defRPr sz="1800">
+                <a:solidFill>
+                  <a:srgbClr val="111111"/>
                 </a:solidFill>
               </a:defRPr>
             </a:lvl2pPr>
-            <a:lvl3pPr marL="685800" indent="0">
-              <a:buNone/>
-              <a:defRPr sz="1200">
-                <a:solidFill>
-                  <a:schemeClr val="tx1">
-                    <a:tint val="75000"/>
-                  </a:schemeClr>
+            <a:lvl3pPr marL="914400" indent="0">
+              <a:buNone/>
+              <a:defRPr sz="1600">
+                <a:solidFill>
+                  <a:srgbClr val="111111"/>
                 </a:solidFill>
               </a:defRPr>
             </a:lvl3pPr>
-            <a:lvl4pPr marL="1028700" indent="0">
-              <a:buNone/>
-              <a:defRPr sz="1050">
-                <a:solidFill>
-                  <a:schemeClr val="tx1">
-                    <a:tint val="75000"/>
-                  </a:schemeClr>
+            <a:lvl4pPr marL="1371600" indent="0">
+              <a:buNone/>
+              <a:defRPr sz="1400">
+                <a:solidFill>
+                  <a:srgbClr val="111111"/>
                 </a:solidFill>
               </a:defRPr>
             </a:lvl4pPr>
-            <a:lvl5pPr marL="1371600" indent="0">
-              <a:buNone/>
-              <a:defRPr sz="1050">
-                <a:solidFill>
-                  <a:schemeClr val="tx1">
-                    <a:tint val="75000"/>
-                  </a:schemeClr>
+            <a:lvl5pPr marL="1828800" indent="0">
+              <a:buNone/>
+              <a:defRPr sz="1400">
+                <a:solidFill>
+                  <a:srgbClr val="111111"/>
                 </a:solidFill>
               </a:defRPr>
             </a:lvl5pPr>
-            <a:lvl6pPr marL="1714500" indent="0">
-              <a:buNone/>
-              <a:defRPr sz="1050">
-                <a:solidFill>
-                  <a:schemeClr val="tx1">
-                    <a:tint val="75000"/>
-                  </a:schemeClr>
+            <a:lvl6pPr marL="2286000" indent="0">
+              <a:buNone/>
+              <a:defRPr sz="1400">
+                <a:solidFill>
+                  <a:srgbClr val="111111"/>
                 </a:solidFill>
               </a:defRPr>
             </a:lvl6pPr>
-            <a:lvl7pPr marL="2057400" indent="0">
-              <a:buNone/>
-              <a:defRPr sz="1050">
-                <a:solidFill>
-                  <a:schemeClr val="tx1">
-                    <a:tint val="75000"/>
-                  </a:schemeClr>
+            <a:lvl7pPr marL="2743200" indent="0">
+              <a:buNone/>
+              <a:defRPr sz="1400">
+                <a:solidFill>
+                  <a:srgbClr val="111111"/>
                 </a:solidFill>
               </a:defRPr>
             </a:lvl7pPr>
-            <a:lvl8pPr marL="2400300" indent="0">
-              <a:buNone/>
-              <a:defRPr sz="1050">
-                <a:solidFill>
-                  <a:schemeClr val="tx1">
-                    <a:tint val="75000"/>
-                  </a:schemeClr>
+            <a:lvl8pPr marL="3200400" indent="0">
+              <a:buNone/>
+              <a:defRPr sz="1400">
+                <a:solidFill>
+                  <a:srgbClr val="111111"/>
                 </a:solidFill>
               </a:defRPr>
             </a:lvl8pPr>
-            <a:lvl9pPr marL="2743200" indent="0">
-              <a:buNone/>
-              <a:defRPr sz="1050">
-                <a:solidFill>
-                  <a:schemeClr val="tx1">
-                    <a:tint val="75000"/>
-                  </a:schemeClr>
+            <a:lvl9pPr marL="3657600" indent="0">
+              <a:buNone/>
+              <a:defRPr sz="1400">
+                <a:solidFill>
+                  <a:srgbClr val="111111"/>
                 </a:solidFill>
               </a:defRPr>
             </a:lvl9pPr>
@@ -1044,7 +1112,11 @@
           <a:p>
             <a:pPr lvl="0"/>
             <a:r>
-              <a:rPr lang="en-US"/>
+              <a:rPr lang="en-US" smtClean="0">
+                <a:solidFill>
+                  <a:srgbClr val="111111"/>
+                </a:solidFill>
+              </a:rPr>
               <a:t>Click to edit Master text styles</a:t>
             </a:r>
           </a:p>
@@ -1065,9 +1137,13 @@
           <a:bodyPr/>
           <a:lstStyle/>
           <a:p>
-            <a:fld id="{241EB5C9-1307-BA42-ABA2-0BC069CD8E7F}" type="datetimeFigureOut">
-              <a:rPr lang="en-US" smtClean="0"/>
-              <a:t>1/2/22</a:t>
+            <a:fld id="{5BCAD085-E8A6-8845-BD4E-CB4CCA059FC4}" type="datetimeFigureOut">
+              <a:rPr lang="en-US" smtClean="0">
+                <a:solidFill>
+                  <a:srgbClr val="111111"/>
+                </a:solidFill>
+              </a:rPr>
+              <a:t>1/27/13</a:t>
             </a:fld>
             <a:endParaRPr lang="en-US"/>
           </a:p>
@@ -1107,8 +1183,12 @@
           <a:bodyPr/>
           <a:lstStyle/>
           <a:p>
-            <a:fld id="{C5EF2332-01BF-834F-8236-50238282D533}" type="slidenum">
-              <a:rPr lang="en-US" smtClean="0"/>
+            <a:fld id="{C1FF6DA9-008F-8B48-92A6-B652298478BF}" type="slidenum">
+              <a:rPr lang="en-US" smtClean="0">
+                <a:solidFill>
+                  <a:srgbClr val="111111"/>
+                </a:solidFill>
+              </a:rPr>
               <a:t>‹#›</a:t>
             </a:fld>
             <a:endParaRPr lang="en-US"/>
@@ -1118,7 +1198,7 @@
     </p:spTree>
     <p:extLst>
       <p:ext uri="{BB962C8B-B14F-4D97-AF65-F5344CB8AC3E}">
-        <p14:creationId xmlns:p14="http://schemas.microsoft.com/office/powerpoint/2010/main" val="1073069076"/>
+        <p14:creationId xmlns:p14="http://schemas.microsoft.com/office/powerpoint/2010/main" val="960648375"/>
       </p:ext>
     </p:extLst>
   </p:cSld>
@@ -1161,9 +1241,14 @@
           <a:lstStyle/>
           <a:p>
             <a:r>
-              <a:rPr lang="en-US"/>
+              <a:rPr lang="en-US" smtClean="0">
+                <a:solidFill>
+                  <a:srgbClr val="111111"/>
+                </a:solidFill>
+              </a:rPr>
               <a:t>Click to edit Master title style</a:t>
             </a:r>
+            <a:endParaRPr lang="en-US"/>
           </a:p>
         </p:txBody>
       </p:sp>
@@ -1179,75 +1264,132 @@
         </p:nvSpPr>
         <p:spPr>
           <a:xfrm>
-            <a:off x="457200" y="1200151"/>
-            <a:ext cx="4038600" cy="3394472"/>
+            <a:off x="457200" y="1600200"/>
+            <a:ext cx="4038600" cy="4525963"/>
           </a:xfrm>
         </p:spPr>
         <p:txBody>
           <a:bodyPr/>
           <a:lstStyle>
             <a:lvl1pPr>
-              <a:defRPr sz="2100"/>
+              <a:defRPr sz="2800">
+                <a:solidFill>
+                  <a:srgbClr val="111111"/>
+                </a:solidFill>
+              </a:defRPr>
             </a:lvl1pPr>
             <a:lvl2pPr>
-              <a:defRPr sz="1800"/>
+              <a:defRPr sz="2400">
+                <a:solidFill>
+                  <a:srgbClr val="111111"/>
+                </a:solidFill>
+              </a:defRPr>
             </a:lvl2pPr>
             <a:lvl3pPr>
-              <a:defRPr sz="1500"/>
+              <a:defRPr sz="2000">
+                <a:solidFill>
+                  <a:srgbClr val="111111"/>
+                </a:solidFill>
+              </a:defRPr>
             </a:lvl3pPr>
             <a:lvl4pPr>
-              <a:defRPr sz="1350"/>
+              <a:defRPr sz="1800">
+                <a:solidFill>
+                  <a:srgbClr val="111111"/>
+                </a:solidFill>
+              </a:defRPr>
             </a:lvl4pPr>
             <a:lvl5pPr>
-              <a:defRPr sz="1350"/>
+              <a:defRPr sz="1800">
+                <a:solidFill>
+                  <a:srgbClr val="111111"/>
+                </a:solidFill>
+              </a:defRPr>
             </a:lvl5pPr>
             <a:lvl6pPr>
-              <a:defRPr sz="1350"/>
+              <a:defRPr sz="1800">
+                <a:solidFill>
+                  <a:srgbClr val="111111"/>
+                </a:solidFill>
+              </a:defRPr>
             </a:lvl6pPr>
             <a:lvl7pPr>
-              <a:defRPr sz="1350"/>
+              <a:defRPr sz="1800">
+                <a:solidFill>
+                  <a:srgbClr val="111111"/>
+                </a:solidFill>
+              </a:defRPr>
             </a:lvl7pPr>
             <a:lvl8pPr>
-              <a:defRPr sz="1350"/>
+              <a:defRPr sz="1800">
+                <a:solidFill>
+                  <a:srgbClr val="111111"/>
+                </a:solidFill>
+              </a:defRPr>
             </a:lvl8pPr>
             <a:lvl9pPr>
-              <a:defRPr sz="1350"/>
+              <a:defRPr sz="1800">
+                <a:solidFill>
+                  <a:srgbClr val="111111"/>
+                </a:solidFill>
+              </a:defRPr>
             </a:lvl9pPr>
           </a:lstStyle>
           <a:p>
             <a:pPr lvl="0"/>
             <a:r>
-              <a:rPr lang="en-US"/>
+              <a:rPr lang="en-US" smtClean="0">
+                <a:solidFill>
+                  <a:srgbClr val="111111"/>
+                </a:solidFill>
+              </a:rPr>
               <a:t>Click to edit Master text styles</a:t>
             </a:r>
           </a:p>
           <a:p>
             <a:pPr lvl="1"/>
             <a:r>
-              <a:rPr lang="en-US"/>
+              <a:rPr lang="en-US" smtClean="0">
+                <a:solidFill>
+                  <a:srgbClr val="111111"/>
+                </a:solidFill>
+              </a:rPr>
               <a:t>Second level</a:t>
             </a:r>
           </a:p>
           <a:p>
             <a:pPr lvl="2"/>
             <a:r>
-              <a:rPr lang="en-US"/>
+              <a:rPr lang="en-US" smtClean="0">
+                <a:solidFill>
+                  <a:srgbClr val="111111"/>
+                </a:solidFill>
+              </a:rPr>
               <a:t>Third level</a:t>
             </a:r>
           </a:p>
           <a:p>
             <a:pPr lvl="3"/>
             <a:r>
-              <a:rPr lang="en-US"/>
+              <a:rPr lang="en-US" smtClean="0">
+                <a:solidFill>
+                  <a:srgbClr val="111111"/>
+                </a:solidFill>
+              </a:rPr>
               <a:t>Fourth level</a:t>
             </a:r>
           </a:p>
           <a:p>
             <a:pPr lvl="4"/>
             <a:r>
-              <a:rPr lang="en-US"/>
+              <a:rPr lang="en-US" smtClean="0">
+                <a:solidFill>
+                  <a:srgbClr val="111111"/>
+                </a:solidFill>
+              </a:rPr>
               <a:t>Fifth level</a:t>
             </a:r>
+            <a:endParaRPr lang="en-US"/>
           </a:p>
         </p:txBody>
       </p:sp>
@@ -1263,75 +1405,132 @@
         </p:nvSpPr>
         <p:spPr>
           <a:xfrm>
-            <a:off x="4648200" y="1200151"/>
-            <a:ext cx="4038600" cy="3394472"/>
+            <a:off x="4648200" y="1600200"/>
+            <a:ext cx="4038600" cy="4525963"/>
           </a:xfrm>
         </p:spPr>
         <p:txBody>
           <a:bodyPr/>
           <a:lstStyle>
             <a:lvl1pPr>
-              <a:defRPr sz="2100"/>
+              <a:defRPr sz="2800">
+                <a:solidFill>
+                  <a:srgbClr val="111111"/>
+                </a:solidFill>
+              </a:defRPr>
             </a:lvl1pPr>
             <a:lvl2pPr>
-              <a:defRPr sz="1800"/>
+              <a:defRPr sz="2400">
+                <a:solidFill>
+                  <a:srgbClr val="111111"/>
+                </a:solidFill>
+              </a:defRPr>
             </a:lvl2pPr>
             <a:lvl3pPr>
-              <a:defRPr sz="1500"/>
+              <a:defRPr sz="2000">
+                <a:solidFill>
+                  <a:srgbClr val="111111"/>
+                </a:solidFill>
+              </a:defRPr>
             </a:lvl3pPr>
             <a:lvl4pPr>
-              <a:defRPr sz="1350"/>
+              <a:defRPr sz="1800">
+                <a:solidFill>
+                  <a:srgbClr val="111111"/>
+                </a:solidFill>
+              </a:defRPr>
             </a:lvl4pPr>
             <a:lvl5pPr>
-              <a:defRPr sz="1350"/>
+              <a:defRPr sz="1800">
+                <a:solidFill>
+                  <a:srgbClr val="111111"/>
+                </a:solidFill>
+              </a:defRPr>
             </a:lvl5pPr>
             <a:lvl6pPr>
-              <a:defRPr sz="1350"/>
+              <a:defRPr sz="1800">
+                <a:solidFill>
+                  <a:srgbClr val="111111"/>
+                </a:solidFill>
+              </a:defRPr>
             </a:lvl6pPr>
             <a:lvl7pPr>
-              <a:defRPr sz="1350"/>
+              <a:defRPr sz="1800">
+                <a:solidFill>
+                  <a:srgbClr val="111111"/>
+                </a:solidFill>
+              </a:defRPr>
             </a:lvl7pPr>
             <a:lvl8pPr>
-              <a:defRPr sz="1350"/>
+              <a:defRPr sz="1800">
+                <a:solidFill>
+                  <a:srgbClr val="111111"/>
+                </a:solidFill>
+              </a:defRPr>
             </a:lvl8pPr>
             <a:lvl9pPr>
-              <a:defRPr sz="1350"/>
+              <a:defRPr sz="1800">
+                <a:solidFill>
+                  <a:srgbClr val="111111"/>
+                </a:solidFill>
+              </a:defRPr>
             </a:lvl9pPr>
           </a:lstStyle>
           <a:p>
             <a:pPr lvl="0"/>
             <a:r>
-              <a:rPr lang="en-US"/>
+              <a:rPr lang="en-US" smtClean="0">
+                <a:solidFill>
+                  <a:srgbClr val="111111"/>
+                </a:solidFill>
+              </a:rPr>
               <a:t>Click to edit Master text styles</a:t>
             </a:r>
           </a:p>
           <a:p>
             <a:pPr lvl="1"/>
             <a:r>
-              <a:rPr lang="en-US"/>
+              <a:rPr lang="en-US" smtClean="0">
+                <a:solidFill>
+                  <a:srgbClr val="111111"/>
+                </a:solidFill>
+              </a:rPr>
               <a:t>Second level</a:t>
             </a:r>
           </a:p>
           <a:p>
             <a:pPr lvl="2"/>
             <a:r>
-              <a:rPr lang="en-US"/>
+              <a:rPr lang="en-US" smtClean="0">
+                <a:solidFill>
+                  <a:srgbClr val="111111"/>
+                </a:solidFill>
+              </a:rPr>
               <a:t>Third level</a:t>
             </a:r>
           </a:p>
           <a:p>
             <a:pPr lvl="3"/>
             <a:r>
-              <a:rPr lang="en-US"/>
+              <a:rPr lang="en-US" smtClean="0">
+                <a:solidFill>
+                  <a:srgbClr val="111111"/>
+                </a:solidFill>
+              </a:rPr>
               <a:t>Fourth level</a:t>
             </a:r>
           </a:p>
           <a:p>
             <a:pPr lvl="4"/>
             <a:r>
-              <a:rPr lang="en-US"/>
+              <a:rPr lang="en-US" smtClean="0">
+                <a:solidFill>
+                  <a:srgbClr val="111111"/>
+                </a:solidFill>
+              </a:rPr>
               <a:t>Fifth level</a:t>
             </a:r>
+            <a:endParaRPr lang="en-US"/>
           </a:p>
         </p:txBody>
       </p:sp>
@@ -1350,9 +1549,13 @@
           <a:bodyPr/>
           <a:lstStyle/>
           <a:p>
-            <a:fld id="{241EB5C9-1307-BA42-ABA2-0BC069CD8E7F}" type="datetimeFigureOut">
-              <a:rPr lang="en-US" smtClean="0"/>
-              <a:t>1/2/22</a:t>
+            <a:fld id="{5BCAD085-E8A6-8845-BD4E-CB4CCA059FC4}" type="datetimeFigureOut">
+              <a:rPr lang="en-US" smtClean="0">
+                <a:solidFill>
+                  <a:srgbClr val="111111"/>
+                </a:solidFill>
+              </a:rPr>
+              <a:t>1/27/13</a:t>
             </a:fld>
             <a:endParaRPr lang="en-US"/>
           </a:p>
@@ -1392,8 +1595,12 @@
           <a:bodyPr/>
           <a:lstStyle/>
           <a:p>
-            <a:fld id="{C5EF2332-01BF-834F-8236-50238282D533}" type="slidenum">
-              <a:rPr lang="en-US" smtClean="0"/>
+            <a:fld id="{C1FF6DA9-008F-8B48-92A6-B652298478BF}" type="slidenum">
+              <a:rPr lang="en-US" smtClean="0">
+                <a:solidFill>
+                  <a:srgbClr val="111111"/>
+                </a:solidFill>
+              </a:rPr>
               <a:t>‹#›</a:t>
             </a:fld>
             <a:endParaRPr lang="en-US"/>
@@ -1403,7 +1610,7 @@
     </p:spTree>
     <p:extLst>
       <p:ext uri="{BB962C8B-B14F-4D97-AF65-F5344CB8AC3E}">
-        <p14:creationId xmlns:p14="http://schemas.microsoft.com/office/powerpoint/2010/main" val="2619886245"/>
+        <p14:creationId xmlns:p14="http://schemas.microsoft.com/office/powerpoint/2010/main" val="2782244947"/>
       </p:ext>
     </p:extLst>
   </p:cSld>
@@ -1445,14 +1652,23 @@
           <a:bodyPr/>
           <a:lstStyle>
             <a:lvl1pPr>
-              <a:defRPr/>
+              <a:defRPr>
+                <a:solidFill>
+                  <a:srgbClr val="111111"/>
+                </a:solidFill>
+              </a:defRPr>
             </a:lvl1pPr>
           </a:lstStyle>
           <a:p>
             <a:r>
-              <a:rPr lang="en-US"/>
+              <a:rPr lang="en-US" smtClean="0">
+                <a:solidFill>
+                  <a:srgbClr val="111111"/>
+                </a:solidFill>
+              </a:rPr>
               <a:t>Click to edit Master title style</a:t>
             </a:r>
+            <a:endParaRPr lang="en-US"/>
           </a:p>
         </p:txBody>
       </p:sp>
@@ -1468,8 +1684,8 @@
         </p:nvSpPr>
         <p:spPr>
           <a:xfrm>
-            <a:off x="457200" y="1151335"/>
-            <a:ext cx="4040188" cy="479822"/>
+            <a:off x="457200" y="1535113"/>
+            <a:ext cx="4040188" cy="639762"/>
           </a:xfrm>
         </p:spPr>
         <p:txBody>
@@ -1477,45 +1693,85 @@
           <a:lstStyle>
             <a:lvl1pPr marL="0" indent="0">
               <a:buNone/>
-              <a:defRPr sz="1800" b="1"/>
+              <a:defRPr sz="2400" b="1">
+                <a:solidFill>
+                  <a:srgbClr val="111111"/>
+                </a:solidFill>
+              </a:defRPr>
             </a:lvl1pPr>
-            <a:lvl2pPr marL="342900" indent="0">
-              <a:buNone/>
-              <a:defRPr sz="1500" b="1"/>
+            <a:lvl2pPr marL="457200" indent="0">
+              <a:buNone/>
+              <a:defRPr sz="2000" b="1">
+                <a:solidFill>
+                  <a:srgbClr val="111111"/>
+                </a:solidFill>
+              </a:defRPr>
             </a:lvl2pPr>
-            <a:lvl3pPr marL="685800" indent="0">
-              <a:buNone/>
-              <a:defRPr sz="1350" b="1"/>
+            <a:lvl3pPr marL="914400" indent="0">
+              <a:buNone/>
+              <a:defRPr sz="1800" b="1">
+                <a:solidFill>
+                  <a:srgbClr val="111111"/>
+                </a:solidFill>
+              </a:defRPr>
             </a:lvl3pPr>
-            <a:lvl4pPr marL="1028700" indent="0">
-              <a:buNone/>
-              <a:defRPr sz="1200" b="1"/>
+            <a:lvl4pPr marL="1371600" indent="0">
+              <a:buNone/>
+              <a:defRPr sz="1600" b="1">
+                <a:solidFill>
+                  <a:srgbClr val="111111"/>
+                </a:solidFill>
+              </a:defRPr>
             </a:lvl4pPr>
-            <a:lvl5pPr marL="1371600" indent="0">
-              <a:buNone/>
-              <a:defRPr sz="1200" b="1"/>
+            <a:lvl5pPr marL="1828800" indent="0">
+              <a:buNone/>
+              <a:defRPr sz="1600" b="1">
+                <a:solidFill>
+                  <a:srgbClr val="111111"/>
+                </a:solidFill>
+              </a:defRPr>
             </a:lvl5pPr>
-            <a:lvl6pPr marL="1714500" indent="0">
-              <a:buNone/>
-              <a:defRPr sz="1200" b="1"/>
+            <a:lvl6pPr marL="2286000" indent="0">
+              <a:buNone/>
+              <a:defRPr sz="1600" b="1">
+                <a:solidFill>
+                  <a:srgbClr val="111111"/>
+                </a:solidFill>
+              </a:defRPr>
             </a:lvl6pPr>
-            <a:lvl7pPr marL="2057400" indent="0">
-              <a:buNone/>
-              <a:defRPr sz="1200" b="1"/>
+            <a:lvl7pPr marL="2743200" indent="0">
+              <a:buNone/>
+              <a:defRPr sz="1600" b="1">
+                <a:solidFill>
+                  <a:srgbClr val="111111"/>
+                </a:solidFill>
+              </a:defRPr>
             </a:lvl7pPr>
-            <a:lvl8pPr marL="2400300" indent="0">
-              <a:buNone/>
-              <a:defRPr sz="1200" b="1"/>
+            <a:lvl8pPr marL="3200400" indent="0">
+              <a:buNone/>
+              <a:defRPr sz="1600" b="1">
+                <a:solidFill>
+                  <a:srgbClr val="111111"/>
+                </a:solidFill>
+              </a:defRPr>
             </a:lvl8pPr>
-            <a:lvl9pPr marL="2743200" indent="0">
-              <a:buNone/>
-              <a:defRPr sz="1200" b="1"/>
+            <a:lvl9pPr marL="3657600" indent="0">
+              <a:buNone/>
+              <a:defRPr sz="1600" b="1">
+                <a:solidFill>
+                  <a:srgbClr val="111111"/>
+                </a:solidFill>
+              </a:defRPr>
             </a:lvl9pPr>
           </a:lstStyle>
           <a:p>
             <a:pPr lvl="0"/>
             <a:r>
-              <a:rPr lang="en-US"/>
+              <a:rPr lang="en-US" smtClean="0">
+                <a:solidFill>
+                  <a:srgbClr val="111111"/>
+                </a:solidFill>
+              </a:rPr>
               <a:t>Click to edit Master text styles</a:t>
             </a:r>
           </a:p>
@@ -1533,75 +1789,132 @@
         </p:nvSpPr>
         <p:spPr>
           <a:xfrm>
-            <a:off x="457200" y="1631156"/>
-            <a:ext cx="4040188" cy="2963466"/>
+            <a:off x="457200" y="2174875"/>
+            <a:ext cx="4040188" cy="3951288"/>
           </a:xfrm>
         </p:spPr>
         <p:txBody>
           <a:bodyPr/>
           <a:lstStyle>
             <a:lvl1pPr>
-              <a:defRPr sz="1800"/>
+              <a:defRPr sz="2400">
+                <a:solidFill>
+                  <a:srgbClr val="111111"/>
+                </a:solidFill>
+              </a:defRPr>
             </a:lvl1pPr>
             <a:lvl2pPr>
-              <a:defRPr sz="1500"/>
+              <a:defRPr sz="2000">
+                <a:solidFill>
+                  <a:srgbClr val="111111"/>
+                </a:solidFill>
+              </a:defRPr>
             </a:lvl2pPr>
             <a:lvl3pPr>
-              <a:defRPr sz="1350"/>
+              <a:defRPr sz="1800">
+                <a:solidFill>
+                  <a:srgbClr val="111111"/>
+                </a:solidFill>
+              </a:defRPr>
             </a:lvl3pPr>
             <a:lvl4pPr>
-              <a:defRPr sz="1200"/>
+              <a:defRPr sz="1600">
+                <a:solidFill>
+                  <a:srgbClr val="111111"/>
+                </a:solidFill>
+              </a:defRPr>
             </a:lvl4pPr>
             <a:lvl5pPr>
-              <a:defRPr sz="1200"/>
+              <a:defRPr sz="1600">
+                <a:solidFill>
+                  <a:srgbClr val="111111"/>
+                </a:solidFill>
+              </a:defRPr>
             </a:lvl5pPr>
             <a:lvl6pPr>
-              <a:defRPr sz="1200"/>
+              <a:defRPr sz="1600">
+                <a:solidFill>
+                  <a:srgbClr val="111111"/>
+                </a:solidFill>
+              </a:defRPr>
             </a:lvl6pPr>
             <a:lvl7pPr>
-              <a:defRPr sz="1200"/>
+              <a:defRPr sz="1600">
+                <a:solidFill>
+                  <a:srgbClr val="111111"/>
+                </a:solidFill>
+              </a:defRPr>
             </a:lvl7pPr>
             <a:lvl8pPr>
-              <a:defRPr sz="1200"/>
+              <a:defRPr sz="1600">
+                <a:solidFill>
+                  <a:srgbClr val="111111"/>
+                </a:solidFill>
+              </a:defRPr>
             </a:lvl8pPr>
             <a:lvl9pPr>
-              <a:defRPr sz="1200"/>
+              <a:defRPr sz="1600">
+                <a:solidFill>
+                  <a:srgbClr val="111111"/>
+                </a:solidFill>
+              </a:defRPr>
             </a:lvl9pPr>
           </a:lstStyle>
           <a:p>
             <a:pPr lvl="0"/>
             <a:r>
-              <a:rPr lang="en-US"/>
+              <a:rPr lang="en-US" smtClean="0">
+                <a:solidFill>
+                  <a:srgbClr val="111111"/>
+                </a:solidFill>
+              </a:rPr>
               <a:t>Click to edit Master text styles</a:t>
             </a:r>
           </a:p>
           <a:p>
             <a:pPr lvl="1"/>
             <a:r>
-              <a:rPr lang="en-US"/>
+              <a:rPr lang="en-US" smtClean="0">
+                <a:solidFill>
+                  <a:srgbClr val="111111"/>
+                </a:solidFill>
+              </a:rPr>
               <a:t>Second level</a:t>
             </a:r>
           </a:p>
           <a:p>
             <a:pPr lvl="2"/>
             <a:r>
-              <a:rPr lang="en-US"/>
+              <a:rPr lang="en-US" smtClean="0">
+                <a:solidFill>
+                  <a:srgbClr val="111111"/>
+                </a:solidFill>
+              </a:rPr>
               <a:t>Third level</a:t>
             </a:r>
           </a:p>
           <a:p>
             <a:pPr lvl="3"/>
             <a:r>
-              <a:rPr lang="en-US"/>
+              <a:rPr lang="en-US" smtClean="0">
+                <a:solidFill>
+                  <a:srgbClr val="111111"/>
+                </a:solidFill>
+              </a:rPr>
               <a:t>Fourth level</a:t>
             </a:r>
           </a:p>
           <a:p>
             <a:pPr lvl="4"/>
             <a:r>
-              <a:rPr lang="en-US"/>
+              <a:rPr lang="en-US" smtClean="0">
+                <a:solidFill>
+                  <a:srgbClr val="111111"/>
+                </a:solidFill>
+              </a:rPr>
               <a:t>Fifth level</a:t>
             </a:r>
+            <a:endParaRPr lang="en-US"/>
           </a:p>
         </p:txBody>
       </p:sp>
@@ -1617,8 +1930,8 @@
         </p:nvSpPr>
         <p:spPr>
           <a:xfrm>
-            <a:off x="4645026" y="1151335"/>
-            <a:ext cx="4041775" cy="479822"/>
+            <a:off x="4645025" y="1535113"/>
+            <a:ext cx="4041775" cy="639762"/>
           </a:xfrm>
         </p:spPr>
         <p:txBody>
@@ -1626,45 +1939,85 @@
           <a:lstStyle>
             <a:lvl1pPr marL="0" indent="0">
               <a:buNone/>
-              <a:defRPr sz="1800" b="1"/>
+              <a:defRPr sz="2400" b="1">
+                <a:solidFill>
+                  <a:srgbClr val="111111"/>
+                </a:solidFill>
+              </a:defRPr>
             </a:lvl1pPr>
-            <a:lvl2pPr marL="342900" indent="0">
-              <a:buNone/>
-              <a:defRPr sz="1500" b="1"/>
+            <a:lvl2pPr marL="457200" indent="0">
+              <a:buNone/>
+              <a:defRPr sz="2000" b="1">
+                <a:solidFill>
+                  <a:srgbClr val="111111"/>
+                </a:solidFill>
+              </a:defRPr>
             </a:lvl2pPr>
-            <a:lvl3pPr marL="685800" indent="0">
-              <a:buNone/>
-              <a:defRPr sz="1350" b="1"/>
+            <a:lvl3pPr marL="914400" indent="0">
+              <a:buNone/>
+              <a:defRPr sz="1800" b="1">
+                <a:solidFill>
+                  <a:srgbClr val="111111"/>
+                </a:solidFill>
+              </a:defRPr>
             </a:lvl3pPr>
-            <a:lvl4pPr marL="1028700" indent="0">
-              <a:buNone/>
-              <a:defRPr sz="1200" b="1"/>
+            <a:lvl4pPr marL="1371600" indent="0">
+              <a:buNone/>
+              <a:defRPr sz="1600" b="1">
+                <a:solidFill>
+                  <a:srgbClr val="111111"/>
+                </a:solidFill>
+              </a:defRPr>
             </a:lvl4pPr>
-            <a:lvl5pPr marL="1371600" indent="0">
-              <a:buNone/>
-              <a:defRPr sz="1200" b="1"/>
+            <a:lvl5pPr marL="1828800" indent="0">
+              <a:buNone/>
+              <a:defRPr sz="1600" b="1">
+                <a:solidFill>
+                  <a:srgbClr val="111111"/>
+                </a:solidFill>
+              </a:defRPr>
             </a:lvl5pPr>
-            <a:lvl6pPr marL="1714500" indent="0">
-              <a:buNone/>
-              <a:defRPr sz="1200" b="1"/>
+            <a:lvl6pPr marL="2286000" indent="0">
+              <a:buNone/>
+              <a:defRPr sz="1600" b="1">
+                <a:solidFill>
+                  <a:srgbClr val="111111"/>
+                </a:solidFill>
+              </a:defRPr>
             </a:lvl6pPr>
-            <a:lvl7pPr marL="2057400" indent="0">
-              <a:buNone/>
-              <a:defRPr sz="1200" b="1"/>
+            <a:lvl7pPr marL="2743200" indent="0">
+              <a:buNone/>
+              <a:defRPr sz="1600" b="1">
+                <a:solidFill>
+                  <a:srgbClr val="111111"/>
+                </a:solidFill>
+              </a:defRPr>
             </a:lvl7pPr>
-            <a:lvl8pPr marL="2400300" indent="0">
-              <a:buNone/>
-              <a:defRPr sz="1200" b="1"/>
+            <a:lvl8pPr marL="3200400" indent="0">
+              <a:buNone/>
+              <a:defRPr sz="1600" b="1">
+                <a:solidFill>
+                  <a:srgbClr val="111111"/>
+                </a:solidFill>
+              </a:defRPr>
             </a:lvl8pPr>
-            <a:lvl9pPr marL="2743200" indent="0">
-              <a:buNone/>
-              <a:defRPr sz="1200" b="1"/>
+            <a:lvl9pPr marL="3657600" indent="0">
+              <a:buNone/>
+              <a:defRPr sz="1600" b="1">
+                <a:solidFill>
+                  <a:srgbClr val="111111"/>
+                </a:solidFill>
+              </a:defRPr>
             </a:lvl9pPr>
           </a:lstStyle>
           <a:p>
             <a:pPr lvl="0"/>
             <a:r>
-              <a:rPr lang="en-US"/>
+              <a:rPr lang="en-US" smtClean="0">
+                <a:solidFill>
+                  <a:srgbClr val="111111"/>
+                </a:solidFill>
+              </a:rPr>
               <a:t>Click to edit Master text styles</a:t>
             </a:r>
           </a:p>
@@ -1682,75 +2035,132 @@
         </p:nvSpPr>
         <p:spPr>
           <a:xfrm>
-            <a:off x="4645026" y="1631156"/>
-            <a:ext cx="4041775" cy="2963466"/>
+            <a:off x="4645025" y="2174875"/>
+            <a:ext cx="4041775" cy="3951288"/>
           </a:xfrm>
         </p:spPr>
         <p:txBody>
           <a:bodyPr/>
           <a:lstStyle>
             <a:lvl1pPr>
-              <a:defRPr sz="1800"/>
+              <a:defRPr sz="2400">
+                <a:solidFill>
+                  <a:srgbClr val="111111"/>
+                </a:solidFill>
+              </a:defRPr>
             </a:lvl1pPr>
             <a:lvl2pPr>
-              <a:defRPr sz="1500"/>
+              <a:defRPr sz="2000">
+                <a:solidFill>
+                  <a:srgbClr val="111111"/>
+                </a:solidFill>
+              </a:defRPr>
             </a:lvl2pPr>
             <a:lvl3pPr>
-              <a:defRPr sz="1350"/>
+              <a:defRPr sz="1800">
+                <a:solidFill>
+                  <a:srgbClr val="111111"/>
+                </a:solidFill>
+              </a:defRPr>
             </a:lvl3pPr>
             <a:lvl4pPr>
-              <a:defRPr sz="1200"/>
+              <a:defRPr sz="1600">
+                <a:solidFill>
+                  <a:srgbClr val="111111"/>
+                </a:solidFill>
+              </a:defRPr>
             </a:lvl4pPr>
             <a:lvl5pPr>
-              <a:defRPr sz="1200"/>
+              <a:defRPr sz="1600">
+                <a:solidFill>
+                  <a:srgbClr val="111111"/>
+                </a:solidFill>
+              </a:defRPr>
             </a:lvl5pPr>
             <a:lvl6pPr>
-              <a:defRPr sz="1200"/>
+              <a:defRPr sz="1600">
+                <a:solidFill>
+                  <a:srgbClr val="111111"/>
+                </a:solidFill>
+              </a:defRPr>
             </a:lvl6pPr>
             <a:lvl7pPr>
-              <a:defRPr sz="1200"/>
+              <a:defRPr sz="1600">
+                <a:solidFill>
+                  <a:srgbClr val="111111"/>
+                </a:solidFill>
+              </a:defRPr>
             </a:lvl7pPr>
             <a:lvl8pPr>
-              <a:defRPr sz="1200"/>
+              <a:defRPr sz="1600">
+                <a:solidFill>
+                  <a:srgbClr val="111111"/>
+                </a:solidFill>
+              </a:defRPr>
             </a:lvl8pPr>
             <a:lvl9pPr>
-              <a:defRPr sz="1200"/>
+              <a:defRPr sz="1600">
+                <a:solidFill>
+                  <a:srgbClr val="111111"/>
+                </a:solidFill>
+              </a:defRPr>
             </a:lvl9pPr>
           </a:lstStyle>
           <a:p>
             <a:pPr lvl="0"/>
             <a:r>
-              <a:rPr lang="en-US"/>
+              <a:rPr lang="en-US" smtClean="0">
+                <a:solidFill>
+                  <a:srgbClr val="111111"/>
+                </a:solidFill>
+              </a:rPr>
               <a:t>Click to edit Master text styles</a:t>
             </a:r>
           </a:p>
           <a:p>
             <a:pPr lvl="1"/>
             <a:r>
-              <a:rPr lang="en-US"/>
+              <a:rPr lang="en-US" smtClean="0">
+                <a:solidFill>
+                  <a:srgbClr val="111111"/>
+                </a:solidFill>
+              </a:rPr>
               <a:t>Second level</a:t>
             </a:r>
           </a:p>
           <a:p>
             <a:pPr lvl="2"/>
             <a:r>
-              <a:rPr lang="en-US"/>
+              <a:rPr lang="en-US" smtClean="0">
+                <a:solidFill>
+                  <a:srgbClr val="111111"/>
+                </a:solidFill>
+              </a:rPr>
               <a:t>Third level</a:t>
             </a:r>
           </a:p>
           <a:p>
             <a:pPr lvl="3"/>
             <a:r>
-              <a:rPr lang="en-US"/>
+              <a:rPr lang="en-US" smtClean="0">
+                <a:solidFill>
+                  <a:srgbClr val="111111"/>
+                </a:solidFill>
+              </a:rPr>
               <a:t>Fourth level</a:t>
             </a:r>
           </a:p>
           <a:p>
             <a:pPr lvl="4"/>
             <a:r>
-              <a:rPr lang="en-US"/>
+              <a:rPr lang="en-US" smtClean="0">
+                <a:solidFill>
+                  <a:srgbClr val="111111"/>
+                </a:solidFill>
+              </a:rPr>
               <a:t>Fifth level</a:t>
             </a:r>
+            <a:endParaRPr lang="en-US"/>
           </a:p>
         </p:txBody>
       </p:sp>
@@ -1769,9 +2179,13 @@
           <a:bodyPr/>
           <a:lstStyle/>
           <a:p>
-            <a:fld id="{241EB5C9-1307-BA42-ABA2-0BC069CD8E7F}" type="datetimeFigureOut">
-              <a:rPr lang="en-US" smtClean="0"/>
-              <a:t>1/2/22</a:t>
+            <a:fld id="{5BCAD085-E8A6-8845-BD4E-CB4CCA059FC4}" type="datetimeFigureOut">
+              <a:rPr lang="en-US" smtClean="0">
+                <a:solidFill>
+                  <a:srgbClr val="111111"/>
+                </a:solidFill>
+              </a:rPr>
+              <a:t>1/27/13</a:t>
             </a:fld>
             <a:endParaRPr lang="en-US"/>
           </a:p>
@@ -1811,8 +2225,12 @@
           <a:bodyPr/>
           <a:lstStyle/>
           <a:p>
-            <a:fld id="{C5EF2332-01BF-834F-8236-50238282D533}" type="slidenum">
-              <a:rPr lang="en-US" smtClean="0"/>
+            <a:fld id="{C1FF6DA9-008F-8B48-92A6-B652298478BF}" type="slidenum">
+              <a:rPr lang="en-US" smtClean="0">
+                <a:solidFill>
+                  <a:srgbClr val="111111"/>
+                </a:solidFill>
+              </a:rPr>
               <a:t>‹#›</a:t>
             </a:fld>
             <a:endParaRPr lang="en-US"/>
@@ -1822,7 +2240,7 @@
     </p:spTree>
     <p:extLst>
       <p:ext uri="{BB962C8B-B14F-4D97-AF65-F5344CB8AC3E}">
-        <p14:creationId xmlns:p14="http://schemas.microsoft.com/office/powerpoint/2010/main" val="2535793967"/>
+        <p14:creationId xmlns:p14="http://schemas.microsoft.com/office/powerpoint/2010/main" val="990158736"/>
       </p:ext>
     </p:extLst>
   </p:cSld>
@@ -1865,9 +2283,14 @@
           <a:lstStyle/>
           <a:p>
             <a:r>
-              <a:rPr lang="en-US"/>
+              <a:rPr lang="en-US" smtClean="0">
+                <a:solidFill>
+                  <a:srgbClr val="111111"/>
+                </a:solidFill>
+              </a:rPr>
               <a:t>Click to edit Master title style</a:t>
             </a:r>
+            <a:endParaRPr lang="en-US"/>
           </a:p>
         </p:txBody>
       </p:sp>
@@ -1886,9 +2309,13 @@
           <a:bodyPr/>
           <a:lstStyle/>
           <a:p>
-            <a:fld id="{241EB5C9-1307-BA42-ABA2-0BC069CD8E7F}" type="datetimeFigureOut">
-              <a:rPr lang="en-US" smtClean="0"/>
-              <a:t>1/2/22</a:t>
+            <a:fld id="{5BCAD085-E8A6-8845-BD4E-CB4CCA059FC4}" type="datetimeFigureOut">
+              <a:rPr lang="en-US" smtClean="0">
+                <a:solidFill>
+                  <a:srgbClr val="111111"/>
+                </a:solidFill>
+              </a:rPr>
+              <a:t>1/27/13</a:t>
             </a:fld>
             <a:endParaRPr lang="en-US"/>
           </a:p>
@@ -1928,8 +2355,12 @@
           <a:bodyPr/>
           <a:lstStyle/>
           <a:p>
-            <a:fld id="{C5EF2332-01BF-834F-8236-50238282D533}" type="slidenum">
-              <a:rPr lang="en-US" smtClean="0"/>
+            <a:fld id="{C1FF6DA9-008F-8B48-92A6-B652298478BF}" type="slidenum">
+              <a:rPr lang="en-US" smtClean="0">
+                <a:solidFill>
+                  <a:srgbClr val="111111"/>
+                </a:solidFill>
+              </a:rPr>
               <a:t>‹#›</a:t>
             </a:fld>
             <a:endParaRPr lang="en-US"/>
@@ -1939,7 +2370,7 @@
     </p:spTree>
     <p:extLst>
       <p:ext uri="{BB962C8B-B14F-4D97-AF65-F5344CB8AC3E}">
-        <p14:creationId xmlns:p14="http://schemas.microsoft.com/office/powerpoint/2010/main" val="3472721253"/>
+        <p14:creationId xmlns:p14="http://schemas.microsoft.com/office/powerpoint/2010/main" val="727027711"/>
       </p:ext>
     </p:extLst>
   </p:cSld>
@@ -1981,9 +2412,13 @@
           <a:bodyPr/>
           <a:lstStyle/>
           <a:p>
-            <a:fld id="{241EB5C9-1307-BA42-ABA2-0BC069CD8E7F}" type="datetimeFigureOut">
-              <a:rPr lang="en-US" smtClean="0"/>
-              <a:t>1/2/22</a:t>
+            <a:fld id="{5BCAD085-E8A6-8845-BD4E-CB4CCA059FC4}" type="datetimeFigureOut">
+              <a:rPr lang="en-US" smtClean="0">
+                <a:solidFill>
+                  <a:srgbClr val="111111"/>
+                </a:solidFill>
+              </a:rPr>
+              <a:t>1/27/13</a:t>
             </a:fld>
             <a:endParaRPr lang="en-US"/>
           </a:p>
@@ -2023,8 +2458,12 @@
           <a:bodyPr/>
           <a:lstStyle/>
           <a:p>
-            <a:fld id="{C5EF2332-01BF-834F-8236-50238282D533}" type="slidenum">
-              <a:rPr lang="en-US" smtClean="0"/>
+            <a:fld id="{C1FF6DA9-008F-8B48-92A6-B652298478BF}" type="slidenum">
+              <a:rPr lang="en-US" smtClean="0">
+                <a:solidFill>
+                  <a:srgbClr val="111111"/>
+                </a:solidFill>
+              </a:rPr>
               <a:t>‹#›</a:t>
             </a:fld>
             <a:endParaRPr lang="en-US"/>
@@ -2034,7 +2473,7 @@
     </p:spTree>
     <p:extLst>
       <p:ext uri="{BB962C8B-B14F-4D97-AF65-F5344CB8AC3E}">
-        <p14:creationId xmlns:p14="http://schemas.microsoft.com/office/powerpoint/2010/main" val="2130901097"/>
+        <p14:creationId xmlns:p14="http://schemas.microsoft.com/office/powerpoint/2010/main" val="1212999818"/>
       </p:ext>
     </p:extLst>
   </p:cSld>
@@ -2073,22 +2512,31 @@
         </p:nvSpPr>
         <p:spPr>
           <a:xfrm>
-            <a:off x="457201" y="204787"/>
-            <a:ext cx="3008313" cy="871538"/>
+            <a:off x="457200" y="273050"/>
+            <a:ext cx="3008313" cy="1162050"/>
           </a:xfrm>
         </p:spPr>
         <p:txBody>
           <a:bodyPr anchor="b"/>
           <a:lstStyle>
             <a:lvl1pPr algn="l">
-              <a:defRPr sz="1500" b="1"/>
+              <a:defRPr sz="2000" b="1">
+                <a:solidFill>
+                  <a:srgbClr val="111111"/>
+                </a:solidFill>
+              </a:defRPr>
             </a:lvl1pPr>
           </a:lstStyle>
           <a:p>
             <a:r>
-              <a:rPr lang="en-US"/>
+              <a:rPr lang="en-US" smtClean="0">
+                <a:solidFill>
+                  <a:srgbClr val="111111"/>
+                </a:solidFill>
+              </a:rPr>
               <a:t>Click to edit Master title style</a:t>
             </a:r>
+            <a:endParaRPr lang="en-US"/>
           </a:p>
         </p:txBody>
       </p:sp>
@@ -2104,75 +2552,132 @@
         </p:nvSpPr>
         <p:spPr>
           <a:xfrm>
-            <a:off x="3575050" y="204788"/>
-            <a:ext cx="5111750" cy="4389835"/>
+            <a:off x="3575050" y="273050"/>
+            <a:ext cx="5111750" cy="5853113"/>
           </a:xfrm>
         </p:spPr>
         <p:txBody>
           <a:bodyPr/>
           <a:lstStyle>
             <a:lvl1pPr>
-              <a:defRPr sz="2400"/>
+              <a:defRPr sz="3200">
+                <a:solidFill>
+                  <a:srgbClr val="111111"/>
+                </a:solidFill>
+              </a:defRPr>
             </a:lvl1pPr>
             <a:lvl2pPr>
-              <a:defRPr sz="2100"/>
+              <a:defRPr sz="2800">
+                <a:solidFill>
+                  <a:srgbClr val="111111"/>
+                </a:solidFill>
+              </a:defRPr>
             </a:lvl2pPr>
             <a:lvl3pPr>
-              <a:defRPr sz="1800"/>
+              <a:defRPr sz="2400">
+                <a:solidFill>
+                  <a:srgbClr val="111111"/>
+                </a:solidFill>
+              </a:defRPr>
             </a:lvl3pPr>
             <a:lvl4pPr>
-              <a:defRPr sz="1500"/>
+              <a:defRPr sz="2000">
+                <a:solidFill>
+                  <a:srgbClr val="111111"/>
+                </a:solidFill>
+              </a:defRPr>
             </a:lvl4pPr>
             <a:lvl5pPr>
-              <a:defRPr sz="1500"/>
+              <a:defRPr sz="2000">
+                <a:solidFill>
+                  <a:srgbClr val="111111"/>
+                </a:solidFill>
+              </a:defRPr>
             </a:lvl5pPr>
             <a:lvl6pPr>
-              <a:defRPr sz="1500"/>
+              <a:defRPr sz="2000">
+                <a:solidFill>
+                  <a:srgbClr val="111111"/>
+                </a:solidFill>
+              </a:defRPr>
             </a:lvl6pPr>
             <a:lvl7pPr>
-              <a:defRPr sz="1500"/>
+              <a:defRPr sz="2000">
+                <a:solidFill>
+                  <a:srgbClr val="111111"/>
+                </a:solidFill>
+              </a:defRPr>
             </a:lvl7pPr>
             <a:lvl8pPr>
-              <a:defRPr sz="1500"/>
+              <a:defRPr sz="2000">
+                <a:solidFill>
+                  <a:srgbClr val="111111"/>
+                </a:solidFill>
+              </a:defRPr>
             </a:lvl8pPr>
             <a:lvl9pPr>
-              <a:defRPr sz="1500"/>
+              <a:defRPr sz="2000">
+                <a:solidFill>
+                  <a:srgbClr val="111111"/>
+                </a:solidFill>
+              </a:defRPr>
             </a:lvl9pPr>
           </a:lstStyle>
           <a:p>
             <a:pPr lvl="0"/>
             <a:r>
-              <a:rPr lang="en-US"/>
+              <a:rPr lang="en-US" smtClean="0">
+                <a:solidFill>
+                  <a:srgbClr val="111111"/>
+                </a:solidFill>
+              </a:rPr>
               <a:t>Click to edit Master text styles</a:t>
             </a:r>
           </a:p>
           <a:p>
             <a:pPr lvl="1"/>
             <a:r>
-              <a:rPr lang="en-US"/>
+              <a:rPr lang="en-US" smtClean="0">
+                <a:solidFill>
+                  <a:srgbClr val="111111"/>
+                </a:solidFill>
+              </a:rPr>
               <a:t>Second level</a:t>
             </a:r>
           </a:p>
           <a:p>
             <a:pPr lvl="2"/>
             <a:r>
-              <a:rPr lang="en-US"/>
+              <a:rPr lang="en-US" smtClean="0">
+                <a:solidFill>
+                  <a:srgbClr val="111111"/>
+                </a:solidFill>
+              </a:rPr>
               <a:t>Third level</a:t>
             </a:r>
           </a:p>
           <a:p>
             <a:pPr lvl="3"/>
             <a:r>
-              <a:rPr lang="en-US"/>
+              <a:rPr lang="en-US" smtClean="0">
+                <a:solidFill>
+                  <a:srgbClr val="111111"/>
+                </a:solidFill>
+              </a:rPr>
               <a:t>Fourth level</a:t>
             </a:r>
           </a:p>
           <a:p>
             <a:pPr lvl="4"/>
             <a:r>
-              <a:rPr lang="en-US"/>
+              <a:rPr lang="en-US" smtClean="0">
+                <a:solidFill>
+                  <a:srgbClr val="111111"/>
+                </a:solidFill>
+              </a:rPr>
               <a:t>Fifth level</a:t>
             </a:r>
+            <a:endParaRPr lang="en-US"/>
           </a:p>
         </p:txBody>
       </p:sp>
@@ -2188,8 +2693,8 @@
         </p:nvSpPr>
         <p:spPr>
           <a:xfrm>
-            <a:off x="457201" y="1076326"/>
-            <a:ext cx="3008313" cy="3518297"/>
+            <a:off x="457200" y="1435100"/>
+            <a:ext cx="3008313" cy="4691063"/>
           </a:xfrm>
         </p:spPr>
         <p:txBody>
@@ -2197,45 +2702,85 @@
           <a:lstStyle>
             <a:lvl1pPr marL="0" indent="0">
               <a:buNone/>
-              <a:defRPr sz="1050"/>
+              <a:defRPr sz="1400">
+                <a:solidFill>
+                  <a:srgbClr val="111111"/>
+                </a:solidFill>
+              </a:defRPr>
             </a:lvl1pPr>
-            <a:lvl2pPr marL="342900" indent="0">
-              <a:buNone/>
-              <a:defRPr sz="900"/>
+            <a:lvl2pPr marL="457200" indent="0">
+              <a:buNone/>
+              <a:defRPr sz="1200">
+                <a:solidFill>
+                  <a:srgbClr val="111111"/>
+                </a:solidFill>
+              </a:defRPr>
             </a:lvl2pPr>
-            <a:lvl3pPr marL="685800" indent="0">
-              <a:buNone/>
-              <a:defRPr sz="750"/>
+            <a:lvl3pPr marL="914400" indent="0">
+              <a:buNone/>
+              <a:defRPr sz="1000">
+                <a:solidFill>
+                  <a:srgbClr val="111111"/>
+                </a:solidFill>
+              </a:defRPr>
             </a:lvl3pPr>
-            <a:lvl4pPr marL="1028700" indent="0">
-              <a:buNone/>
-              <a:defRPr sz="675"/>
+            <a:lvl4pPr marL="1371600" indent="0">
+              <a:buNone/>
+              <a:defRPr sz="900">
+                <a:solidFill>
+                  <a:srgbClr val="111111"/>
+                </a:solidFill>
+              </a:defRPr>
             </a:lvl4pPr>
-            <a:lvl5pPr marL="1371600" indent="0">
-              <a:buNone/>
-              <a:defRPr sz="675"/>
+            <a:lvl5pPr marL="1828800" indent="0">
+              <a:buNone/>
+              <a:defRPr sz="900">
+                <a:solidFill>
+                  <a:srgbClr val="111111"/>
+                </a:solidFill>
+              </a:defRPr>
             </a:lvl5pPr>
-            <a:lvl6pPr marL="1714500" indent="0">
-              <a:buNone/>
-              <a:defRPr sz="675"/>
+            <a:lvl6pPr marL="2286000" indent="0">
+              <a:buNone/>
+              <a:defRPr sz="900">
+                <a:solidFill>
+                  <a:srgbClr val="111111"/>
+                </a:solidFill>
+              </a:defRPr>
             </a:lvl6pPr>
-            <a:lvl7pPr marL="2057400" indent="0">
-              <a:buNone/>
-              <a:defRPr sz="675"/>
+            <a:lvl7pPr marL="2743200" indent="0">
+              <a:buNone/>
+              <a:defRPr sz="900">
+                <a:solidFill>
+                  <a:srgbClr val="111111"/>
+                </a:solidFill>
+              </a:defRPr>
             </a:lvl7pPr>
-            <a:lvl8pPr marL="2400300" indent="0">
-              <a:buNone/>
-              <a:defRPr sz="675"/>
+            <a:lvl8pPr marL="3200400" indent="0">
+              <a:buNone/>
+              <a:defRPr sz="900">
+                <a:solidFill>
+                  <a:srgbClr val="111111"/>
+                </a:solidFill>
+              </a:defRPr>
             </a:lvl8pPr>
-            <a:lvl9pPr marL="2743200" indent="0">
-              <a:buNone/>
-              <a:defRPr sz="675"/>
+            <a:lvl9pPr marL="3657600" indent="0">
+              <a:buNone/>
+              <a:defRPr sz="900">
+                <a:solidFill>
+                  <a:srgbClr val="111111"/>
+                </a:solidFill>
+              </a:defRPr>
             </a:lvl9pPr>
           </a:lstStyle>
           <a:p>
             <a:pPr lvl="0"/>
             <a:r>
-              <a:rPr lang="en-US"/>
+              <a:rPr lang="en-US" smtClean="0">
+                <a:solidFill>
+                  <a:srgbClr val="111111"/>
+                </a:solidFill>
+              </a:rPr>
               <a:t>Click to edit Master text styles</a:t>
             </a:r>
           </a:p>
@@ -2256,9 +2801,13 @@
           <a:bodyPr/>
           <a:lstStyle/>
           <a:p>
-            <a:fld id="{241EB5C9-1307-BA42-ABA2-0BC069CD8E7F}" type="datetimeFigureOut">
-              <a:rPr lang="en-US" smtClean="0"/>
-              <a:t>1/2/22</a:t>
+            <a:fld id="{5BCAD085-E8A6-8845-BD4E-CB4CCA059FC4}" type="datetimeFigureOut">
+              <a:rPr lang="en-US" smtClean="0">
+                <a:solidFill>
+                  <a:srgbClr val="111111"/>
+                </a:solidFill>
+              </a:rPr>
+              <a:t>1/27/13</a:t>
             </a:fld>
             <a:endParaRPr lang="en-US"/>
           </a:p>
@@ -2298,8 +2847,12 @@
           <a:bodyPr/>
           <a:lstStyle/>
           <a:p>
-            <a:fld id="{C5EF2332-01BF-834F-8236-50238282D533}" type="slidenum">
-              <a:rPr lang="en-US" smtClean="0"/>
+            <a:fld id="{C1FF6DA9-008F-8B48-92A6-B652298478BF}" type="slidenum">
+              <a:rPr lang="en-US" smtClean="0">
+                <a:solidFill>
+                  <a:srgbClr val="111111"/>
+                </a:solidFill>
+              </a:rPr>
               <a:t>‹#›</a:t>
             </a:fld>
             <a:endParaRPr lang="en-US"/>
@@ -2309,7 +2862,7 @@
     </p:spTree>
     <p:extLst>
       <p:ext uri="{BB962C8B-B14F-4D97-AF65-F5344CB8AC3E}">
-        <p14:creationId xmlns:p14="http://schemas.microsoft.com/office/powerpoint/2010/main" val="3540895647"/>
+        <p14:creationId xmlns:p14="http://schemas.microsoft.com/office/powerpoint/2010/main" val="1840726560"/>
       </p:ext>
     </p:extLst>
   </p:cSld>
@@ -2348,22 +2901,31 @@
         </p:nvSpPr>
         <p:spPr>
           <a:xfrm>
-            <a:off x="1792288" y="3600450"/>
-            <a:ext cx="5486400" cy="425054"/>
+            <a:off x="1792288" y="4800600"/>
+            <a:ext cx="5486400" cy="566738"/>
           </a:xfrm>
         </p:spPr>
         <p:txBody>
           <a:bodyPr anchor="b"/>
           <a:lstStyle>
             <a:lvl1pPr algn="l">
-              <a:defRPr sz="1500" b="1"/>
+              <a:defRPr sz="2000" b="1">
+                <a:solidFill>
+                  <a:srgbClr val="111111"/>
+                </a:solidFill>
+              </a:defRPr>
             </a:lvl1pPr>
           </a:lstStyle>
           <a:p>
             <a:r>
-              <a:rPr lang="en-US"/>
+              <a:rPr lang="en-US" smtClean="0">
+                <a:solidFill>
+                  <a:srgbClr val="111111"/>
+                </a:solidFill>
+              </a:rPr>
               <a:t>Click to edit Master title style</a:t>
             </a:r>
+            <a:endParaRPr lang="en-US"/>
           </a:p>
         </p:txBody>
       </p:sp>
@@ -2379,8 +2941,8 @@
         </p:nvSpPr>
         <p:spPr>
           <a:xfrm>
-            <a:off x="1792288" y="459581"/>
-            <a:ext cx="5486400" cy="3086100"/>
+            <a:off x="1792288" y="612775"/>
+            <a:ext cx="5486400" cy="4114800"/>
           </a:xfrm>
         </p:spPr>
         <p:txBody>
@@ -2388,39 +2950,75 @@
           <a:lstStyle>
             <a:lvl1pPr marL="0" indent="0">
               <a:buNone/>
-              <a:defRPr sz="2400"/>
+              <a:defRPr sz="3200">
+                <a:solidFill>
+                  <a:srgbClr val="111111"/>
+                </a:solidFill>
+              </a:defRPr>
             </a:lvl1pPr>
-            <a:lvl2pPr marL="342900" indent="0">
-              <a:buNone/>
-              <a:defRPr sz="2100"/>
+            <a:lvl2pPr marL="457200" indent="0">
+              <a:buNone/>
+              <a:defRPr sz="2800">
+                <a:solidFill>
+                  <a:srgbClr val="111111"/>
+                </a:solidFill>
+              </a:defRPr>
             </a:lvl2pPr>
-            <a:lvl3pPr marL="685800" indent="0">
-              <a:buNone/>
-              <a:defRPr sz="1800"/>
+            <a:lvl3pPr marL="914400" indent="0">
+              <a:buNone/>
+              <a:defRPr sz="2400">
+                <a:solidFill>
+                  <a:srgbClr val="111111"/>
+                </a:solidFill>
+              </a:defRPr>
             </a:lvl3pPr>
-            <a:lvl4pPr marL="1028700" indent="0">
-              <a:buNone/>
-              <a:defRPr sz="1500"/>
+            <a:lvl4pPr marL="1371600" indent="0">
+              <a:buNone/>
+              <a:defRPr sz="2000">
+                <a:solidFill>
+                  <a:srgbClr val="111111"/>
+                </a:solidFill>
+              </a:defRPr>
             </a:lvl4pPr>
-            <a:lvl5pPr marL="1371600" indent="0">
-              <a:buNone/>
-              <a:defRPr sz="1500"/>
+            <a:lvl5pPr marL="1828800" indent="0">
+              <a:buNone/>
+              <a:defRPr sz="2000">
+                <a:solidFill>
+                  <a:srgbClr val="111111"/>
+                </a:solidFill>
+              </a:defRPr>
             </a:lvl5pPr>
-            <a:lvl6pPr marL="1714500" indent="0">
-              <a:buNone/>
-              <a:defRPr sz="1500"/>
+            <a:lvl6pPr marL="2286000" indent="0">
+              <a:buNone/>
+              <a:defRPr sz="2000">
+                <a:solidFill>
+                  <a:srgbClr val="111111"/>
+                </a:solidFill>
+              </a:defRPr>
             </a:lvl6pPr>
-            <a:lvl7pPr marL="2057400" indent="0">
-              <a:buNone/>
-              <a:defRPr sz="1500"/>
+            <a:lvl7pPr marL="2743200" indent="0">
+              <a:buNone/>
+              <a:defRPr sz="2000">
+                <a:solidFill>
+                  <a:srgbClr val="111111"/>
+                </a:solidFill>
+              </a:defRPr>
             </a:lvl7pPr>
-            <a:lvl8pPr marL="2400300" indent="0">
-              <a:buNone/>
-              <a:defRPr sz="1500"/>
+            <a:lvl8pPr marL="3200400" indent="0">
+              <a:buNone/>
+              <a:defRPr sz="2000">
+                <a:solidFill>
+                  <a:srgbClr val="111111"/>
+                </a:solidFill>
+              </a:defRPr>
             </a:lvl8pPr>
-            <a:lvl9pPr marL="2743200" indent="0">
-              <a:buNone/>
-              <a:defRPr sz="1500"/>
+            <a:lvl9pPr marL="3657600" indent="0">
+              <a:buNone/>
+              <a:defRPr sz="2000">
+                <a:solidFill>
+                  <a:srgbClr val="111111"/>
+                </a:solidFill>
+              </a:defRPr>
             </a:lvl9pPr>
           </a:lstStyle>
           <a:p>
@@ -2440,8 +3038,8 @@
         </p:nvSpPr>
         <p:spPr>
           <a:xfrm>
-            <a:off x="1792288" y="4025503"/>
-            <a:ext cx="5486400" cy="603647"/>
+            <a:off x="1792288" y="5367338"/>
+            <a:ext cx="5486400" cy="804862"/>
           </a:xfrm>
         </p:spPr>
         <p:txBody>
@@ -2449,45 +3047,85 @@
           <a:lstStyle>
             <a:lvl1pPr marL="0" indent="0">
               <a:buNone/>
-              <a:defRPr sz="1050"/>
+              <a:defRPr sz="1400">
+                <a:solidFill>
+                  <a:srgbClr val="111111"/>
+                </a:solidFill>
+              </a:defRPr>
             </a:lvl1pPr>
-            <a:lvl2pPr marL="342900" indent="0">
-              <a:buNone/>
-              <a:defRPr sz="900"/>
+            <a:lvl2pPr marL="457200" indent="0">
+              <a:buNone/>
+              <a:defRPr sz="1200">
+                <a:solidFill>
+                  <a:srgbClr val="111111"/>
+                </a:solidFill>
+              </a:defRPr>
             </a:lvl2pPr>
-            <a:lvl3pPr marL="685800" indent="0">
-              <a:buNone/>
-              <a:defRPr sz="750"/>
+            <a:lvl3pPr marL="914400" indent="0">
+              <a:buNone/>
+              <a:defRPr sz="1000">
+                <a:solidFill>
+                  <a:srgbClr val="111111"/>
+                </a:solidFill>
+              </a:defRPr>
             </a:lvl3pPr>
-            <a:lvl4pPr marL="1028700" indent="0">
-              <a:buNone/>
-              <a:defRPr sz="675"/>
+            <a:lvl4pPr marL="1371600" indent="0">
+              <a:buNone/>
+              <a:defRPr sz="900">
+                <a:solidFill>
+                  <a:srgbClr val="111111"/>
+                </a:solidFill>
+              </a:defRPr>
             </a:lvl4pPr>
-            <a:lvl5pPr marL="1371600" indent="0">
-              <a:buNone/>
-              <a:defRPr sz="675"/>
+            <a:lvl5pPr marL="1828800" indent="0">
+              <a:buNone/>
+              <a:defRPr sz="900">
+                <a:solidFill>
+                  <a:srgbClr val="111111"/>
+                </a:solidFill>
+              </a:defRPr>
             </a:lvl5pPr>
-            <a:lvl6pPr marL="1714500" indent="0">
-              <a:buNone/>
-              <a:defRPr sz="675"/>
+            <a:lvl6pPr marL="2286000" indent="0">
+              <a:buNone/>
+              <a:defRPr sz="900">
+                <a:solidFill>
+                  <a:srgbClr val="111111"/>
+                </a:solidFill>
+              </a:defRPr>
             </a:lvl6pPr>
-            <a:lvl7pPr marL="2057400" indent="0">
-              <a:buNone/>
-              <a:defRPr sz="675"/>
+            <a:lvl7pPr marL="2743200" indent="0">
+              <a:buNone/>
+              <a:defRPr sz="900">
+                <a:solidFill>
+                  <a:srgbClr val="111111"/>
+                </a:solidFill>
+              </a:defRPr>
             </a:lvl7pPr>
-            <a:lvl8pPr marL="2400300" indent="0">
-              <a:buNone/>
-              <a:defRPr sz="675"/>
+            <a:lvl8pPr marL="3200400" indent="0">
+              <a:buNone/>
+              <a:defRPr sz="900">
+                <a:solidFill>
+                  <a:srgbClr val="111111"/>
+                </a:solidFill>
+              </a:defRPr>
             </a:lvl8pPr>
-            <a:lvl9pPr marL="2743200" indent="0">
-              <a:buNone/>
-              <a:defRPr sz="675"/>
+            <a:lvl9pPr marL="3657600" indent="0">
+              <a:buNone/>
+              <a:defRPr sz="900">
+                <a:solidFill>
+                  <a:srgbClr val="111111"/>
+                </a:solidFill>
+              </a:defRPr>
             </a:lvl9pPr>
           </a:lstStyle>
           <a:p>
             <a:pPr lvl="0"/>
             <a:r>
-              <a:rPr lang="en-US"/>
+              <a:rPr lang="en-US" smtClean="0">
+                <a:solidFill>
+                  <a:srgbClr val="111111"/>
+                </a:solidFill>
+              </a:rPr>
               <a:t>Click to edit Master text styles</a:t>
             </a:r>
           </a:p>
@@ -2508,9 +3146,13 @@
           <a:bodyPr/>
           <a:lstStyle/>
           <a:p>
-            <a:fld id="{241EB5C9-1307-BA42-ABA2-0BC069CD8E7F}" type="datetimeFigureOut">
-              <a:rPr lang="en-US" smtClean="0"/>
-              <a:t>1/2/22</a:t>
+            <a:fld id="{5BCAD085-E8A6-8845-BD4E-CB4CCA059FC4}" type="datetimeFigureOut">
+              <a:rPr lang="en-US" smtClean="0">
+                <a:solidFill>
+                  <a:srgbClr val="111111"/>
+                </a:solidFill>
+              </a:rPr>
+              <a:t>1/27/13</a:t>
             </a:fld>
             <a:endParaRPr lang="en-US"/>
           </a:p>
@@ -2550,8 +3192,12 @@
           <a:bodyPr/>
           <a:lstStyle/>
           <a:p>
-            <a:fld id="{C5EF2332-01BF-834F-8236-50238282D533}" type="slidenum">
-              <a:rPr lang="en-US" smtClean="0"/>
+            <a:fld id="{C1FF6DA9-008F-8B48-92A6-B652298478BF}" type="slidenum">
+              <a:rPr lang="en-US" smtClean="0">
+                <a:solidFill>
+                  <a:srgbClr val="111111"/>
+                </a:solidFill>
+              </a:rPr>
               <a:t>‹#›</a:t>
             </a:fld>
             <a:endParaRPr lang="en-US"/>
@@ -2561,7 +3207,7 @@
     </p:spTree>
     <p:extLst>
       <p:ext uri="{BB962C8B-B14F-4D97-AF65-F5344CB8AC3E}">
-        <p14:creationId xmlns:p14="http://schemas.microsoft.com/office/powerpoint/2010/main" val="3566899855"/>
+        <p14:creationId xmlns:p14="http://schemas.microsoft.com/office/powerpoint/2010/main" val="3889236939"/>
       </p:ext>
     </p:extLst>
   </p:cSld>
@@ -2575,9 +3221,12 @@
 <p:sldMaster xmlns:a="http://schemas.openxmlformats.org/drawingml/2006/main" xmlns:p="http://schemas.openxmlformats.org/presentationml/2006/main" xmlns:r="http://schemas.openxmlformats.org/officeDocument/2006/relationships">
   <p:cSld>
     <p:bg>
-      <p:bgRef idx="1001">
-        <a:schemeClr val="bg1"/>
-      </p:bgRef>
+      <p:bgPr>
+        <a:solidFill>
+          <a:srgbClr val="FFFFFF"/>
+        </a:solidFill>
+        <a:effectLst/>
+      </p:bgPr>
     </p:bg>
     <p:spTree>
       <p:nvGrpSpPr>
@@ -2605,8 +3254,8 @@
         </p:nvSpPr>
         <p:spPr>
           <a:xfrm>
-            <a:off x="457200" y="205979"/>
-            <a:ext cx="8229600" cy="857250"/>
+            <a:off x="457200" y="274638"/>
+            <a:ext cx="8229600" cy="1143000"/>
           </a:xfrm>
           <a:prstGeom prst="rect">
             <a:avLst/>
@@ -2619,9 +3268,14 @@
           <a:lstStyle/>
           <a:p>
             <a:r>
-              <a:rPr lang="en-US"/>
+              <a:rPr lang="en-US" smtClean="0">
+                <a:solidFill>
+                  <a:srgbClr val="111111"/>
+                </a:solidFill>
+              </a:rPr>
               <a:t>Click to edit Master title style</a:t>
             </a:r>
+            <a:endParaRPr lang="en-US"/>
           </a:p>
         </p:txBody>
       </p:sp>
@@ -2637,8 +3291,8 @@
         </p:nvSpPr>
         <p:spPr>
           <a:xfrm>
-            <a:off x="457200" y="1200151"/>
-            <a:ext cx="8229600" cy="3394472"/>
+            <a:off x="457200" y="1600200"/>
+            <a:ext cx="8229600" cy="4525963"/>
           </a:xfrm>
           <a:prstGeom prst="rect">
             <a:avLst/>
@@ -2652,37 +3306,58 @@
           <a:p>
             <a:pPr lvl="0"/>
             <a:r>
-              <a:rPr lang="en-US"/>
+              <a:rPr lang="en-US" smtClean="0">
+                <a:solidFill>
+                  <a:srgbClr val="111111"/>
+                </a:solidFill>
+              </a:rPr>
               <a:t>Click to edit Master text styles</a:t>
             </a:r>
           </a:p>
           <a:p>
             <a:pPr lvl="1"/>
             <a:r>
-              <a:rPr lang="en-US"/>
+              <a:rPr lang="en-US" smtClean="0">
+                <a:solidFill>
+                  <a:srgbClr val="111111"/>
+                </a:solidFill>
+              </a:rPr>
               <a:t>Second level</a:t>
             </a:r>
           </a:p>
           <a:p>
             <a:pPr lvl="2"/>
             <a:r>
-              <a:rPr lang="en-US"/>
+              <a:rPr lang="en-US" smtClean="0">
+                <a:solidFill>
+                  <a:srgbClr val="111111"/>
+                </a:solidFill>
+              </a:rPr>
               <a:t>Third level</a:t>
             </a:r>
           </a:p>
           <a:p>
             <a:pPr lvl="3"/>
             <a:r>
-              <a:rPr lang="en-US"/>
+              <a:rPr lang="en-US" smtClean="0">
+                <a:solidFill>
+                  <a:srgbClr val="111111"/>
+                </a:solidFill>
+              </a:rPr>
               <a:t>Fourth level</a:t>
             </a:r>
           </a:p>
           <a:p>
             <a:pPr lvl="4"/>
             <a:r>
-              <a:rPr lang="en-US"/>
+              <a:rPr lang="en-US" smtClean="0">
+                <a:solidFill>
+                  <a:srgbClr val="111111"/>
+                </a:solidFill>
+              </a:rPr>
               <a:t>Fifth level</a:t>
             </a:r>
+            <a:endParaRPr lang="en-US"/>
           </a:p>
         </p:txBody>
       </p:sp>
@@ -2698,8 +3373,8 @@
         </p:nvSpPr>
         <p:spPr>
           <a:xfrm>
-            <a:off x="457200" y="4767263"/>
-            <a:ext cx="2133600" cy="273844"/>
+            <a:off x="457200" y="6356350"/>
+            <a:ext cx="2133600" cy="365125"/>
           </a:xfrm>
           <a:prstGeom prst="rect">
             <a:avLst/>
@@ -2709,19 +3384,21 @@
           <a:bodyPr anchor="ctr" bIns="45720" lIns="91440" rIns="91440" rtlCol="0" tIns="45720" vert="horz"/>
           <a:lstStyle>
             <a:lvl1pPr algn="l">
-              <a:defRPr sz="900">
-                <a:solidFill>
-                  <a:schemeClr val="tx1">
-                    <a:tint val="75000"/>
-                  </a:schemeClr>
+              <a:defRPr sz="1200">
+                <a:solidFill>
+                  <a:srgbClr val="111111"/>
                 </a:solidFill>
               </a:defRPr>
             </a:lvl1pPr>
           </a:lstStyle>
           <a:p>
-            <a:fld id="{241EB5C9-1307-BA42-ABA2-0BC069CD8E7F}" type="datetimeFigureOut">
-              <a:rPr lang="en-US" smtClean="0"/>
-              <a:t>1/2/22</a:t>
+            <a:fld id="{5BCAD085-E8A6-8845-BD4E-CB4CCA059FC4}" type="datetimeFigureOut">
+              <a:rPr lang="en-US" smtClean="0">
+                <a:solidFill>
+                  <a:srgbClr val="111111"/>
+                </a:solidFill>
+              </a:rPr>
+              <a:t>1/27/13</a:t>
             </a:fld>
             <a:endParaRPr lang="en-US"/>
           </a:p>
@@ -2739,8 +3416,8 @@
         </p:nvSpPr>
         <p:spPr>
           <a:xfrm>
-            <a:off x="3124200" y="4767263"/>
-            <a:ext cx="2895600" cy="273844"/>
+            <a:off x="3124200" y="6356350"/>
+            <a:ext cx="2895600" cy="365125"/>
           </a:xfrm>
           <a:prstGeom prst="rect">
             <a:avLst/>
@@ -2750,11 +3427,9 @@
           <a:bodyPr anchor="ctr" bIns="45720" lIns="91440" rIns="91440" rtlCol="0" tIns="45720" vert="horz"/>
           <a:lstStyle>
             <a:lvl1pPr algn="ctr">
-              <a:defRPr sz="900">
-                <a:solidFill>
-                  <a:schemeClr val="tx1">
-                    <a:tint val="75000"/>
-                  </a:schemeClr>
+              <a:defRPr sz="1200">
+                <a:solidFill>
+                  <a:srgbClr val="111111"/>
                 </a:solidFill>
               </a:defRPr>
             </a:lvl1pPr>
@@ -2776,8 +3451,8 @@
         </p:nvSpPr>
         <p:spPr>
           <a:xfrm>
-            <a:off x="6553200" y="4767263"/>
-            <a:ext cx="2133600" cy="273844"/>
+            <a:off x="6553200" y="6356350"/>
+            <a:ext cx="2133600" cy="365125"/>
           </a:xfrm>
           <a:prstGeom prst="rect">
             <a:avLst/>
@@ -2787,18 +3462,20 @@
           <a:bodyPr anchor="ctr" bIns="45720" lIns="91440" rIns="91440" rtlCol="0" tIns="45720" vert="horz"/>
           <a:lstStyle>
             <a:lvl1pPr algn="r">
-              <a:defRPr sz="900">
-                <a:solidFill>
-                  <a:schemeClr val="tx1">
-                    <a:tint val="75000"/>
-                  </a:schemeClr>
+              <a:defRPr sz="1200">
+                <a:solidFill>
+                  <a:srgbClr val="111111"/>
                 </a:solidFill>
               </a:defRPr>
             </a:lvl1pPr>
           </a:lstStyle>
           <a:p>
-            <a:fld id="{C5EF2332-01BF-834F-8236-50238282D533}" type="slidenum">
-              <a:rPr lang="en-US" smtClean="0"/>
+            <a:fld id="{C1FF6DA9-008F-8B48-92A6-B652298478BF}" type="slidenum">
+              <a:rPr lang="en-US" smtClean="0">
+                <a:solidFill>
+                  <a:srgbClr val="111111"/>
+                </a:solidFill>
+              </a:rPr>
               <a:t>‹#›</a:t>
             </a:fld>
             <a:endParaRPr lang="en-US"/>
@@ -2808,7 +3485,7 @@
     </p:spTree>
     <p:extLst>
       <p:ext uri="{BB962C8B-B14F-4D97-AF65-F5344CB8AC3E}">
-        <p14:creationId xmlns:p14="http://schemas.microsoft.com/office/powerpoint/2010/main" val="3676200875"/>
+        <p14:creationId xmlns:p14="http://schemas.microsoft.com/office/powerpoint/2010/main" val="2209977519"/>
       </p:ext>
     </p:extLst>
   </p:cSld>
@@ -2828,250 +3505,254 @@
   </p:sldLayoutIdLst>
   <p:txStyles>
     <p:titleStyle>
-      <a:lvl1pPr algn="ctr" defTabSz="342900" eaLnBrk="1" hangingPunct="1" latinLnBrk="0" rtl="0">
+      <a:lvl1pPr algn="ctr" defTabSz="457200" eaLnBrk="1" hangingPunct="1" latinLnBrk="0" rtl="0">
         <a:spcBef>
           <a:spcPct val="0"/>
         </a:spcBef>
         <a:buNone/>
-        <a:defRPr kern="1200" sz="3300">
-          <a:solidFill>
-            <a:schemeClr val="tx1"/>
-          </a:solidFill>
-          <a:latin typeface="+mj-lt"/>
+        <a:defRPr kern="1200" sz="4400">
+          <a:latin typeface="Cambria"/>
           <a:ea typeface="+mj-ea"/>
           <a:cs typeface="+mj-cs"/>
+          <a:solidFill>
+            <a:srgbClr val="111111"/>
+          </a:solidFill>
         </a:defRPr>
       </a:lvl1pPr>
     </p:titleStyle>
     <p:bodyStyle>
-      <a:lvl1pPr algn="l" defTabSz="342900" eaLnBrk="1" hangingPunct="1" indent="-342900" latinLnBrk="0" marL="342900" rtl="0">
+      <a:lvl1pPr algn="l" defTabSz="457200" eaLnBrk="1" hangingPunct="1" indent="-342900" latinLnBrk="0" marL="342900" rtl="0">
+        <a:spcBef>
+          <a:spcPct val="20000"/>
+        </a:spcBef>
+        <a:buFont typeface="Arial"/>
+        <a:buChar char="•"/>
+        <a:defRPr kern="1200" sz="3200">
+          <a:latin typeface="Cambria"/>
+          <a:ea typeface="+mn-ea"/>
+          <a:cs typeface="+mn-cs"/>
+          <a:solidFill>
+            <a:srgbClr val="111111"/>
+          </a:solidFill>
+        </a:defRPr>
+      </a:lvl1pPr>
+      <a:lvl2pPr algn="l" defTabSz="457200" eaLnBrk="1" hangingPunct="1" indent="-285750" latinLnBrk="0" marL="742950" rtl="0">
+        <a:spcBef>
+          <a:spcPct val="20000"/>
+        </a:spcBef>
+        <a:buFont typeface="Arial"/>
+        <a:buChar char="–"/>
+        <a:defRPr kern="1200" sz="2800">
+          <a:latin typeface="Cambria"/>
+          <a:ea typeface="+mn-ea"/>
+          <a:cs typeface="+mn-cs"/>
+          <a:solidFill>
+            <a:srgbClr val="111111"/>
+          </a:solidFill>
+        </a:defRPr>
+      </a:lvl2pPr>
+      <a:lvl3pPr algn="l" defTabSz="457200" eaLnBrk="1" hangingPunct="1" indent="-228600" latinLnBrk="0" marL="1143000" rtl="0">
         <a:spcBef>
           <a:spcPct val="20000"/>
         </a:spcBef>
         <a:buFont typeface="Arial"/>
         <a:buChar char="•"/>
         <a:defRPr kern="1200" sz="2400">
-          <a:solidFill>
-            <a:schemeClr val="tx1"/>
-          </a:solidFill>
-          <a:latin typeface="+mn-lt"/>
+          <a:latin typeface="Cambria"/>
           <a:ea typeface="+mn-ea"/>
           <a:cs typeface="+mn-cs"/>
+          <a:solidFill>
+            <a:srgbClr val="111111"/>
+          </a:solidFill>
         </a:defRPr>
-      </a:lvl1pPr>
-      <a:lvl2pPr algn="l" defTabSz="342900" eaLnBrk="1" hangingPunct="1" indent="-342900" latinLnBrk="0" marL="685800" rtl="0">
+      </a:lvl3pPr>
+      <a:lvl4pPr algn="l" defTabSz="457200" eaLnBrk="1" hangingPunct="1" indent="-228600" latinLnBrk="0" marL="1600200" rtl="0">
         <a:spcBef>
           <a:spcPct val="20000"/>
         </a:spcBef>
         <a:buFont typeface="Arial"/>
         <a:buChar char="–"/>
-        <a:defRPr kern="1200" sz="2100">
-          <a:solidFill>
-            <a:schemeClr val="tx1"/>
-          </a:solidFill>
-          <a:latin typeface="+mn-lt"/>
+        <a:defRPr kern="1200" sz="2000">
+          <a:latin typeface="Cambria"/>
           <a:ea typeface="+mn-ea"/>
           <a:cs typeface="+mn-cs"/>
+          <a:solidFill>
+            <a:srgbClr val="111111"/>
+          </a:solidFill>
         </a:defRPr>
-      </a:lvl2pPr>
-      <a:lvl3pPr algn="l" defTabSz="342900" eaLnBrk="1" hangingPunct="1" indent="-342900" latinLnBrk="0" marL="1028700" rtl="0">
+      </a:lvl4pPr>
+      <a:lvl5pPr algn="l" defTabSz="457200" eaLnBrk="1" hangingPunct="1" indent="-228600" latinLnBrk="0" marL="2057400" rtl="0">
+        <a:spcBef>
+          <a:spcPct val="20000"/>
+        </a:spcBef>
+        <a:buFont typeface="Arial"/>
+        <a:buChar char="»"/>
+        <a:defRPr kern="1200" sz="2000">
+          <a:latin typeface="Cambria"/>
+          <a:ea typeface="+mn-ea"/>
+          <a:cs typeface="+mn-cs"/>
+          <a:solidFill>
+            <a:srgbClr val="111111"/>
+          </a:solidFill>
+        </a:defRPr>
+      </a:lvl5pPr>
+      <a:lvl6pPr algn="l" defTabSz="457200" eaLnBrk="1" hangingPunct="1" indent="-228600" latinLnBrk="0" marL="2514600" rtl="0">
         <a:spcBef>
           <a:spcPct val="20000"/>
         </a:spcBef>
         <a:buFont typeface="Arial"/>
         <a:buChar char="•"/>
-        <a:defRPr kern="1200" sz="1800">
-          <a:solidFill>
-            <a:schemeClr val="tx1"/>
-          </a:solidFill>
-          <a:latin typeface="+mn-lt"/>
+        <a:defRPr kern="1200" sz="2000">
+          <a:latin typeface="Cambria"/>
           <a:ea typeface="+mn-ea"/>
           <a:cs typeface="+mn-cs"/>
+          <a:solidFill>
+            <a:srgbClr val="111111"/>
+          </a:solidFill>
         </a:defRPr>
-      </a:lvl3pPr>
-      <a:lvl4pPr algn="l" defTabSz="342900" eaLnBrk="1" hangingPunct="1" indent="-342900" latinLnBrk="0" marL="1371600" rtl="0">
-        <a:spcBef>
-          <a:spcPct val="20000"/>
-        </a:spcBef>
-        <a:buFont typeface="Arial"/>
-        <a:buChar char="–"/>
-        <a:defRPr kern="1200" sz="1500">
-          <a:solidFill>
-            <a:schemeClr val="tx1"/>
-          </a:solidFill>
-          <a:latin typeface="+mn-lt"/>
-          <a:ea typeface="+mn-ea"/>
-          <a:cs typeface="+mn-cs"/>
-        </a:defRPr>
-      </a:lvl4pPr>
-      <a:lvl5pPr algn="l" defTabSz="342900" eaLnBrk="1" hangingPunct="1" indent="-342900" latinLnBrk="0" marL="1714500" rtl="0">
-        <a:spcBef>
-          <a:spcPct val="20000"/>
-        </a:spcBef>
-        <a:buFont typeface="Arial"/>
-        <a:buChar char="»"/>
-        <a:defRPr kern="1200" sz="1500">
-          <a:solidFill>
-            <a:schemeClr val="tx1"/>
-          </a:solidFill>
-          <a:latin typeface="+mn-lt"/>
-          <a:ea typeface="+mn-ea"/>
-          <a:cs typeface="+mn-cs"/>
-        </a:defRPr>
-      </a:lvl5pPr>
-      <a:lvl6pPr algn="l" defTabSz="342900" eaLnBrk="1" hangingPunct="1" indent="-342900" latinLnBrk="0" marL="2057400" rtl="0">
+      </a:lvl6pPr>
+      <a:lvl7pPr algn="l" defTabSz="457200" eaLnBrk="1" hangingPunct="1" indent="-228600" latinLnBrk="0" marL="2971800" rtl="0">
         <a:spcBef>
           <a:spcPct val="20000"/>
         </a:spcBef>
         <a:buFont typeface="Arial"/>
         <a:buChar char="•"/>
-        <a:defRPr kern="1200" sz="1500">
-          <a:solidFill>
-            <a:schemeClr val="tx1"/>
-          </a:solidFill>
-          <a:latin typeface="+mn-lt"/>
+        <a:defRPr kern="1200" sz="2000">
+          <a:latin typeface="Cambria"/>
           <a:ea typeface="+mn-ea"/>
           <a:cs typeface="+mn-cs"/>
+          <a:solidFill>
+            <a:srgbClr val="111111"/>
+          </a:solidFill>
         </a:defRPr>
-      </a:lvl6pPr>
-      <a:lvl7pPr algn="l" defTabSz="342900" eaLnBrk="1" hangingPunct="1" indent="-342900" latinLnBrk="0" marL="2400300" rtl="0">
+      </a:lvl7pPr>
+      <a:lvl8pPr algn="l" defTabSz="457200" eaLnBrk="1" hangingPunct="1" indent="-228600" latinLnBrk="0" marL="3429000" rtl="0">
         <a:spcBef>
           <a:spcPct val="20000"/>
         </a:spcBef>
         <a:buFont typeface="Arial"/>
         <a:buChar char="•"/>
-        <a:defRPr kern="1200" sz="1500">
-          <a:solidFill>
-            <a:schemeClr val="tx1"/>
-          </a:solidFill>
-          <a:latin typeface="+mn-lt"/>
+        <a:defRPr kern="1200" sz="2000">
+          <a:latin typeface="Cambria"/>
           <a:ea typeface="+mn-ea"/>
           <a:cs typeface="+mn-cs"/>
+          <a:solidFill>
+            <a:srgbClr val="111111"/>
+          </a:solidFill>
         </a:defRPr>
-      </a:lvl7pPr>
-      <a:lvl8pPr algn="l" defTabSz="342900" eaLnBrk="1" hangingPunct="1" indent="-342900" latinLnBrk="0" marL="2743200" rtl="0">
+      </a:lvl8pPr>
+      <a:lvl9pPr algn="l" defTabSz="457200" eaLnBrk="1" hangingPunct="1" indent="-228600" latinLnBrk="0" marL="3886200" rtl="0">
         <a:spcBef>
           <a:spcPct val="20000"/>
         </a:spcBef>
         <a:buFont typeface="Arial"/>
         <a:buChar char="•"/>
-        <a:defRPr kern="1200" sz="1500">
-          <a:solidFill>
-            <a:schemeClr val="tx1"/>
-          </a:solidFill>
-          <a:latin typeface="+mn-lt"/>
+        <a:defRPr kern="1200" sz="2000">
+          <a:latin typeface="Cambria"/>
           <a:ea typeface="+mn-ea"/>
           <a:cs typeface="+mn-cs"/>
-        </a:defRPr>
-      </a:lvl8pPr>
-      <a:lvl9pPr algn="l" defTabSz="342900" eaLnBrk="1" hangingPunct="1" indent="-342900" latinLnBrk="0" marL="3086100" rtl="0">
-        <a:spcBef>
-          <a:spcPct val="20000"/>
-        </a:spcBef>
-        <a:buFont typeface="Arial"/>
-        <a:buChar char="•"/>
-        <a:defRPr kern="1200" sz="1500">
           <a:solidFill>
-            <a:schemeClr val="tx1"/>
+            <a:srgbClr val="111111"/>
           </a:solidFill>
-          <a:latin typeface="+mn-lt"/>
-          <a:ea typeface="+mn-ea"/>
-          <a:cs typeface="+mn-cs"/>
         </a:defRPr>
       </a:lvl9pPr>
     </p:bodyStyle>
     <p:otherStyle>
       <a:defPPr>
-        <a:defRPr lang="en-US"/>
+        <a:defRPr lang="en-US">
+          <a:solidFill>
+            <a:srgbClr val="111111"/>
+          </a:solidFill>
+        </a:defRPr>
       </a:defPPr>
-      <a:lvl1pPr algn="l" defTabSz="342900" eaLnBrk="1" hangingPunct="1" latinLnBrk="0" marL="0" rtl="0">
-        <a:defRPr kern="1200" sz="1350">
-          <a:solidFill>
-            <a:schemeClr val="tx1"/>
-          </a:solidFill>
-          <a:latin typeface="+mn-lt"/>
+      <a:lvl1pPr algn="l" defTabSz="457200" eaLnBrk="1" hangingPunct="1" latinLnBrk="0" marL="0" rtl="0">
+        <a:defRPr kern="1200" sz="1800">
+          <a:latin typeface="Cambria"/>
           <a:ea typeface="+mn-ea"/>
           <a:cs typeface="+mn-cs"/>
+          <a:solidFill>
+            <a:srgbClr val="111111"/>
+          </a:solidFill>
         </a:defRPr>
       </a:lvl1pPr>
-      <a:lvl2pPr algn="l" defTabSz="342900" eaLnBrk="1" hangingPunct="1" latinLnBrk="0" marL="342900" rtl="0">
-        <a:defRPr kern="1200" sz="1350">
-          <a:solidFill>
-            <a:schemeClr val="tx1"/>
-          </a:solidFill>
-          <a:latin typeface="+mn-lt"/>
+      <a:lvl2pPr algn="l" defTabSz="457200" eaLnBrk="1" hangingPunct="1" latinLnBrk="0" marL="457200" rtl="0">
+        <a:defRPr kern="1200" sz="1800">
+          <a:latin typeface="Cambria"/>
           <a:ea typeface="+mn-ea"/>
           <a:cs typeface="+mn-cs"/>
+          <a:solidFill>
+            <a:srgbClr val="111111"/>
+          </a:solidFill>
         </a:defRPr>
       </a:lvl2pPr>
-      <a:lvl3pPr algn="l" defTabSz="342900" eaLnBrk="1" hangingPunct="1" latinLnBrk="0" marL="685800" rtl="0">
-        <a:defRPr kern="1200" sz="1350">
-          <a:solidFill>
-            <a:schemeClr val="tx1"/>
-          </a:solidFill>
-          <a:latin typeface="+mn-lt"/>
+      <a:lvl3pPr algn="l" defTabSz="457200" eaLnBrk="1" hangingPunct="1" latinLnBrk="0" marL="914400" rtl="0">
+        <a:defRPr kern="1200" sz="1800">
+          <a:latin typeface="Cambria"/>
           <a:ea typeface="+mn-ea"/>
           <a:cs typeface="+mn-cs"/>
+          <a:solidFill>
+            <a:srgbClr val="111111"/>
+          </a:solidFill>
         </a:defRPr>
       </a:lvl3pPr>
-      <a:lvl4pPr algn="l" defTabSz="342900" eaLnBrk="1" hangingPunct="1" latinLnBrk="0" marL="1028700" rtl="0">
-        <a:defRPr kern="1200" sz="1350">
-          <a:solidFill>
-            <a:schemeClr val="tx1"/>
-          </a:solidFill>
-          <a:latin typeface="+mn-lt"/>
+      <a:lvl4pPr algn="l" defTabSz="457200" eaLnBrk="1" hangingPunct="1" latinLnBrk="0" marL="1371600" rtl="0">
+        <a:defRPr kern="1200" sz="1800">
+          <a:latin typeface="Cambria"/>
           <a:ea typeface="+mn-ea"/>
           <a:cs typeface="+mn-cs"/>
+          <a:solidFill>
+            <a:srgbClr val="111111"/>
+          </a:solidFill>
         </a:defRPr>
       </a:lvl4pPr>
-      <a:lvl5pPr algn="l" defTabSz="342900" eaLnBrk="1" hangingPunct="1" latinLnBrk="0" marL="1371600" rtl="0">
-        <a:defRPr kern="1200" sz="1350">
-          <a:solidFill>
-            <a:schemeClr val="tx1"/>
-          </a:solidFill>
-          <a:latin typeface="+mn-lt"/>
+      <a:lvl5pPr algn="l" defTabSz="457200" eaLnBrk="1" hangingPunct="1" latinLnBrk="0" marL="1828800" rtl="0">
+        <a:defRPr kern="1200" sz="1800">
+          <a:latin typeface="Cambria"/>
           <a:ea typeface="+mn-ea"/>
           <a:cs typeface="+mn-cs"/>
+          <a:solidFill>
+            <a:srgbClr val="111111"/>
+          </a:solidFill>
         </a:defRPr>
       </a:lvl5pPr>
-      <a:lvl6pPr algn="l" defTabSz="342900" eaLnBrk="1" hangingPunct="1" latinLnBrk="0" marL="1714500" rtl="0">
-        <a:defRPr kern="1200" sz="1350">
-          <a:solidFill>
-            <a:schemeClr val="tx1"/>
-          </a:solidFill>
-          <a:latin typeface="+mn-lt"/>
+      <a:lvl6pPr algn="l" defTabSz="457200" eaLnBrk="1" hangingPunct="1" latinLnBrk="0" marL="2286000" rtl="0">
+        <a:defRPr kern="1200" sz="1800">
+          <a:latin typeface="Cambria"/>
           <a:ea typeface="+mn-ea"/>
           <a:cs typeface="+mn-cs"/>
+          <a:solidFill>
+            <a:srgbClr val="111111"/>
+          </a:solidFill>
         </a:defRPr>
       </a:lvl6pPr>
-      <a:lvl7pPr algn="l" defTabSz="342900" eaLnBrk="1" hangingPunct="1" latinLnBrk="0" marL="2057400" rtl="0">
-        <a:defRPr kern="1200" sz="1350">
-          <a:solidFill>
-            <a:schemeClr val="tx1"/>
-          </a:solidFill>
-          <a:latin typeface="+mn-lt"/>
+      <a:lvl7pPr algn="l" defTabSz="457200" eaLnBrk="1" hangingPunct="1" latinLnBrk="0" marL="2743200" rtl="0">
+        <a:defRPr kern="1200" sz="1800">
+          <a:latin typeface="Cambria"/>
           <a:ea typeface="+mn-ea"/>
           <a:cs typeface="+mn-cs"/>
+          <a:solidFill>
+            <a:srgbClr val="111111"/>
+          </a:solidFill>
         </a:defRPr>
       </a:lvl7pPr>
-      <a:lvl8pPr algn="l" defTabSz="342900" eaLnBrk="1" hangingPunct="1" latinLnBrk="0" marL="2400300" rtl="0">
-        <a:defRPr kern="1200" sz="1350">
-          <a:solidFill>
-            <a:schemeClr val="tx1"/>
-          </a:solidFill>
-          <a:latin typeface="+mn-lt"/>
+      <a:lvl8pPr algn="l" defTabSz="457200" eaLnBrk="1" hangingPunct="1" latinLnBrk="0" marL="3200400" rtl="0">
+        <a:defRPr kern="1200" sz="1800">
+          <a:latin typeface="Cambria"/>
           <a:ea typeface="+mn-ea"/>
           <a:cs typeface="+mn-cs"/>
+          <a:solidFill>
+            <a:srgbClr val="111111"/>
+          </a:solidFill>
         </a:defRPr>
       </a:lvl8pPr>
-      <a:lvl9pPr algn="l" defTabSz="342900" eaLnBrk="1" hangingPunct="1" latinLnBrk="0" marL="2743200" rtl="0">
-        <a:defRPr kern="1200" sz="1350">
-          <a:solidFill>
-            <a:schemeClr val="tx1"/>
-          </a:solidFill>
-          <a:latin typeface="+mn-lt"/>
+      <a:lvl9pPr algn="l" defTabSz="457200" eaLnBrk="1" hangingPunct="1" latinLnBrk="0" marL="3657600" rtl="0">
+        <a:defRPr kern="1200" sz="1800">
+          <a:latin typeface="Cambria"/>
           <a:ea typeface="+mn-ea"/>
           <a:cs typeface="+mn-cs"/>
+          <a:solidFill>
+            <a:srgbClr val="111111"/>
+          </a:solidFill>
         </a:defRPr>
       </a:lvl9pPr>
     </p:otherStyle>
@@ -3108,8 +3789,8 @@
         </p:nvSpPr>
         <p:spPr>
           <a:xfrm>
-            <a:off x="685800" y="1597819"/>
-            <a:ext cx="7772400" cy="1102519"/>
+            <a:off x="685800" y="2130425"/>
+            <a:ext cx="7772400" cy="1470025"/>
           </a:xfrm>
         </p:spPr>
         <p:txBody>
@@ -3138,8 +3819,8 @@
         </p:nvSpPr>
         <p:spPr>
           <a:xfrm>
-            <a:off x="1371600" y="2914650"/>
-            <a:ext cx="6400800" cy="1314450"/>
+            <a:off x="1371600" y="3886200"/>
+            <a:ext cx="6400800" cy="1752600"/>
           </a:xfrm>
         </p:spPr>
         <p:txBody>

--- a/courses/research-in-finance/lectures/lecture-05-brown-bag-seminar/slides.pptx
+++ b/courses/research-in-finance/lectures/lecture-05-brown-bag-seminar/slides.pptx
@@ -4,7 +4,16 @@
   <p:sldMasterIdLst>
     <p:sldMasterId id="2147483648" r:id="rId1"/>
   </p:sldMasterIdLst>
-  <p:sldSz cx="12191695" cy="6858000" type="screen4x3"/>
+  <p:sldIdLst>
+    <p:sldId id="256" r:id="rId2"/>
+    <p:sldId id="257" r:id="rId3"/>
+    <p:sldId id="258" r:id="rId4"/>
+    <p:sldId id="259" r:id="rId5"/>
+    <p:sldId id="260" r:id="rId6"/>
+    <p:sldId id="261" r:id="rId7"/>
+    <p:sldId id="262" r:id="rId8"/>
+  </p:sldIdLst>
+  <p:sldSz cx="9144000" cy="5143500" type="screen16x9"/>
   <p:notesSz cx="6858000" cy="9144000"/>
   <p:defaultTextStyle>
     <a:defPPr>
@@ -101,6 +110,22 @@
       </a:defRPr>
     </a:lvl9pPr>
   </p:defaultTextStyle>
+  <p:extLst>
+    <p:ext uri="{EFAFB233-063F-42B5-8137-9DF3F51BA10A}">
+      <p15:sldGuideLst xmlns:p15="http://schemas.microsoft.com/office/powerpoint/2012/main">
+        <p15:guide id="1" orient="horz" pos="1620" userDrawn="1">
+          <p15:clr>
+            <a:srgbClr val="A4A3A4"/>
+          </p15:clr>
+        </p15:guide>
+        <p15:guide id="2" pos="2880" userDrawn="1">
+          <p15:clr>
+            <a:srgbClr val="A4A3A4"/>
+          </p15:clr>
+        </p15:guide>
+      </p15:sldGuideLst>
+    </p:ext>
+  </p:extLst>
 </p:presentation>
 </file>
 
@@ -133,8 +158,8 @@
         </p:nvSpPr>
         <p:spPr>
           <a:xfrm>
-            <a:off x="685800" y="2130425"/>
-            <a:ext cx="7772400" cy="1470025"/>
+            <a:off x="685800" y="1597819"/>
+            <a:ext cx="7772400" cy="1102519"/>
           </a:xfrm>
         </p:spPr>
         <p:txBody>
@@ -142,14 +167,13 @@
           <a:lstStyle/>
           <a:p>
             <a:r>
-              <a:rPr lang="en-US" smtClean="0">
+              <a:rPr lang="en-US">
                 <a:solidFill>
                   <a:srgbClr val="111111"/>
                 </a:solidFill>
               </a:rPr>
               <a:t>Click to edit Master title style</a:t>
             </a:r>
-            <a:endParaRPr lang="en-US"/>
           </a:p>
         </p:txBody>
       </p:sp>
@@ -165,8 +189,8 @@
         </p:nvSpPr>
         <p:spPr>
           <a:xfrm>
-            <a:off x="1371600" y="3886200"/>
-            <a:ext cx="6400800" cy="1752600"/>
+            <a:off x="1371600" y="2914650"/>
+            <a:ext cx="6400800" cy="1314450"/>
           </a:xfrm>
         </p:spPr>
         <p:txBody>
@@ -180,7 +204,7 @@
                 </a:solidFill>
               </a:defRPr>
             </a:lvl1pPr>
-            <a:lvl2pPr marL="457200" indent="0" algn="ctr">
+            <a:lvl2pPr marL="342900" indent="0" algn="ctr">
               <a:buNone/>
               <a:defRPr>
                 <a:solidFill>
@@ -188,7 +212,7 @@
                 </a:solidFill>
               </a:defRPr>
             </a:lvl2pPr>
-            <a:lvl3pPr marL="914400" indent="0" algn="ctr">
+            <a:lvl3pPr marL="685800" indent="0" algn="ctr">
               <a:buNone/>
               <a:defRPr>
                 <a:solidFill>
@@ -196,7 +220,7 @@
                 </a:solidFill>
               </a:defRPr>
             </a:lvl3pPr>
-            <a:lvl4pPr marL="1371600" indent="0" algn="ctr">
+            <a:lvl4pPr marL="1028700" indent="0" algn="ctr">
               <a:buNone/>
               <a:defRPr>
                 <a:solidFill>
@@ -204,7 +228,7 @@
                 </a:solidFill>
               </a:defRPr>
             </a:lvl4pPr>
-            <a:lvl5pPr marL="1828800" indent="0" algn="ctr">
+            <a:lvl5pPr marL="1371600" indent="0" algn="ctr">
               <a:buNone/>
               <a:defRPr>
                 <a:solidFill>
@@ -212,7 +236,7 @@
                 </a:solidFill>
               </a:defRPr>
             </a:lvl5pPr>
-            <a:lvl6pPr marL="2286000" indent="0" algn="ctr">
+            <a:lvl6pPr marL="1714500" indent="0" algn="ctr">
               <a:buNone/>
               <a:defRPr>
                 <a:solidFill>
@@ -220,7 +244,7 @@
                 </a:solidFill>
               </a:defRPr>
             </a:lvl6pPr>
-            <a:lvl7pPr marL="2743200" indent="0" algn="ctr">
+            <a:lvl7pPr marL="2057400" indent="0" algn="ctr">
               <a:buNone/>
               <a:defRPr>
                 <a:solidFill>
@@ -228,7 +252,7 @@
                 </a:solidFill>
               </a:defRPr>
             </a:lvl7pPr>
-            <a:lvl8pPr marL="3200400" indent="0" algn="ctr">
+            <a:lvl8pPr marL="2400300" indent="0" algn="ctr">
               <a:buNone/>
               <a:defRPr>
                 <a:solidFill>
@@ -236,7 +260,7 @@
                 </a:solidFill>
               </a:defRPr>
             </a:lvl8pPr>
-            <a:lvl9pPr marL="3657600" indent="0" algn="ctr">
+            <a:lvl9pPr marL="2743200" indent="0" algn="ctr">
               <a:buNone/>
               <a:defRPr>
                 <a:solidFill>
@@ -247,25 +271,55 @@
           </a:lstStyle>
           <a:p>
             <a:r>
+              <a:rPr lang="en-US">
+                <a:solidFill>
+                  <a:srgbClr val="111111"/>
+                </a:solidFill>
+              </a:rPr>
+              <a:t>Click to edit Master subtitle style</a:t>
+            </a:r>
+          </a:p>
+        </p:txBody>
+      </p:sp>
+      <p:sp>
+        <p:nvSpPr>
+          <p:cNvPr id="4" name="Date Placeholder 3"/>
+          <p:cNvSpPr>
+            <a:spLocks noGrp="1"/>
+          </p:cNvSpPr>
+          <p:nvPr>
+            <p:ph type="dt" sz="half" idx="10"/>
+          </p:nvPr>
+        </p:nvSpPr>
+        <p:spPr/>
+        <p:txBody>
+          <a:bodyPr/>
+          <a:lstStyle/>
+          <a:p>
+            <a:fld id="{241EB5C9-1307-BA42-ABA2-0BC069CD8E7F}" type="datetimeFigureOut">
               <a:rPr lang="en-US" smtClean="0">
                 <a:solidFill>
                   <a:srgbClr val="111111"/>
                 </a:solidFill>
               </a:rPr>
-              <a:t>Click to edit Master subtitle style</a:t>
-            </a:r>
-            <a:endParaRPr lang="en-US"/>
-          </a:p>
-        </p:txBody>
-      </p:sp>
-      <p:sp>
-        <p:nvSpPr>
-          <p:cNvPr id="4" name="Date Placeholder 3"/>
-          <p:cNvSpPr>
-            <a:spLocks noGrp="1"/>
-          </p:cNvSpPr>
-          <p:nvPr>
-            <p:ph type="dt" sz="half" idx="10"/>
+              <a:t>1/2/22</a:t>
+            </a:fld>
+            <a:endParaRPr lang="en-US">
+              <a:solidFill>
+                <a:srgbClr val="111111"/>
+              </a:solidFill>
+            </a:endParaRPr>
+          </a:p>
+        </p:txBody>
+      </p:sp>
+      <p:sp>
+        <p:nvSpPr>
+          <p:cNvPr id="5" name="Footer Placeholder 4"/>
+          <p:cNvSpPr>
+            <a:spLocks noGrp="1"/>
+          </p:cNvSpPr>
+          <p:nvPr>
+            <p:ph type="ftr" sz="quarter" idx="11"/>
           </p:nvPr>
         </p:nvSpPr>
         <p:spPr/>
@@ -273,26 +327,22 @@
           <a:bodyPr/>
           <a:lstStyle/>
           <a:p>
-            <a:fld id="{5BCAD085-E8A6-8845-BD4E-CB4CCA059FC4}" type="datetimeFigureOut">
-              <a:rPr lang="en-US" smtClean="0">
-                <a:solidFill>
-                  <a:srgbClr val="111111"/>
-                </a:solidFill>
-              </a:rPr>
-              <a:t>1/27/13</a:t>
-            </a:fld>
-            <a:endParaRPr lang="en-US"/>
-          </a:p>
-        </p:txBody>
-      </p:sp>
-      <p:sp>
-        <p:nvSpPr>
-          <p:cNvPr id="5" name="Footer Placeholder 4"/>
-          <p:cNvSpPr>
-            <a:spLocks noGrp="1"/>
-          </p:cNvSpPr>
-          <p:nvPr>
-            <p:ph type="ftr" sz="quarter" idx="11"/>
+            <a:endParaRPr lang="en-US">
+              <a:solidFill>
+                <a:srgbClr val="111111"/>
+              </a:solidFill>
+            </a:endParaRPr>
+          </a:p>
+        </p:txBody>
+      </p:sp>
+      <p:sp>
+        <p:nvSpPr>
+          <p:cNvPr id="6" name="Slide Number Placeholder 5"/>
+          <p:cNvSpPr>
+            <a:spLocks noGrp="1"/>
+          </p:cNvSpPr>
+          <p:nvPr>
+            <p:ph type="sldNum" sz="quarter" idx="12"/>
           </p:nvPr>
         </p:nvSpPr>
         <p:spPr/>
@@ -300,26 +350,7 @@
           <a:bodyPr/>
           <a:lstStyle/>
           <a:p>
-            <a:endParaRPr lang="en-US"/>
-          </a:p>
-        </p:txBody>
-      </p:sp>
-      <p:sp>
-        <p:nvSpPr>
-          <p:cNvPr id="6" name="Slide Number Placeholder 5"/>
-          <p:cNvSpPr>
-            <a:spLocks noGrp="1"/>
-          </p:cNvSpPr>
-          <p:nvPr>
-            <p:ph type="sldNum" sz="quarter" idx="12"/>
-          </p:nvPr>
-        </p:nvSpPr>
-        <p:spPr/>
-        <p:txBody>
-          <a:bodyPr/>
-          <a:lstStyle/>
-          <a:p>
-            <a:fld id="{C1FF6DA9-008F-8B48-92A6-B652298478BF}" type="slidenum">
+            <a:fld id="{C5EF2332-01BF-834F-8236-50238282D533}" type="slidenum">
               <a:rPr lang="en-US" smtClean="0">
                 <a:solidFill>
                   <a:srgbClr val="111111"/>
@@ -327,14 +358,18 @@
               </a:rPr>
               <a:t>‹#›</a:t>
             </a:fld>
-            <a:endParaRPr lang="en-US"/>
+            <a:endParaRPr lang="en-US">
+              <a:solidFill>
+                <a:srgbClr val="111111"/>
+              </a:solidFill>
+            </a:endParaRPr>
           </a:p>
         </p:txBody>
       </p:sp>
     </p:spTree>
     <p:extLst>
       <p:ext uri="{BB962C8B-B14F-4D97-AF65-F5344CB8AC3E}">
-        <p14:creationId xmlns:p14="http://schemas.microsoft.com/office/powerpoint/2010/main" val="3168075583"/>
+        <p14:creationId xmlns:p14="http://schemas.microsoft.com/office/powerpoint/2010/main" val="1444357513"/>
       </p:ext>
     </p:extLst>
   </p:cSld>
@@ -377,97 +412,149 @@
           <a:lstStyle/>
           <a:p>
             <a:r>
+              <a:rPr lang="en-US">
+                <a:solidFill>
+                  <a:srgbClr val="111111"/>
+                </a:solidFill>
+              </a:rPr>
+              <a:t>Click to edit Master title style</a:t>
+            </a:r>
+          </a:p>
+        </p:txBody>
+      </p:sp>
+      <p:sp>
+        <p:nvSpPr>
+          <p:cNvPr id="3" name="Vertical Text Placeholder 2"/>
+          <p:cNvSpPr>
+            <a:spLocks noGrp="1"/>
+          </p:cNvSpPr>
+          <p:nvPr>
+            <p:ph type="body" orient="vert" idx="1"/>
+          </p:nvPr>
+        </p:nvSpPr>
+        <p:spPr/>
+        <p:txBody>
+          <a:bodyPr vert="eaVert"/>
+          <a:lstStyle/>
+          <a:p>
+            <a:pPr lvl="0"/>
+            <a:r>
+              <a:rPr lang="en-US">
+                <a:solidFill>
+                  <a:srgbClr val="111111"/>
+                </a:solidFill>
+              </a:rPr>
+              <a:t>Click to edit Master text styles</a:t>
+            </a:r>
+          </a:p>
+          <a:p>
+            <a:pPr lvl="1"/>
+            <a:r>
+              <a:rPr lang="en-US">
+                <a:solidFill>
+                  <a:srgbClr val="111111"/>
+                </a:solidFill>
+              </a:rPr>
+              <a:t>Second level</a:t>
+            </a:r>
+          </a:p>
+          <a:p>
+            <a:pPr lvl="2"/>
+            <a:r>
+              <a:rPr lang="en-US">
+                <a:solidFill>
+                  <a:srgbClr val="111111"/>
+                </a:solidFill>
+              </a:rPr>
+              <a:t>Third level</a:t>
+            </a:r>
+          </a:p>
+          <a:p>
+            <a:pPr lvl="3"/>
+            <a:r>
+              <a:rPr lang="en-US">
+                <a:solidFill>
+                  <a:srgbClr val="111111"/>
+                </a:solidFill>
+              </a:rPr>
+              <a:t>Fourth level</a:t>
+            </a:r>
+          </a:p>
+          <a:p>
+            <a:pPr lvl="4"/>
+            <a:r>
+              <a:rPr lang="en-US">
+                <a:solidFill>
+                  <a:srgbClr val="111111"/>
+                </a:solidFill>
+              </a:rPr>
+              <a:t>Fifth level</a:t>
+            </a:r>
+          </a:p>
+        </p:txBody>
+      </p:sp>
+      <p:sp>
+        <p:nvSpPr>
+          <p:cNvPr id="4" name="Date Placeholder 3"/>
+          <p:cNvSpPr>
+            <a:spLocks noGrp="1"/>
+          </p:cNvSpPr>
+          <p:nvPr>
+            <p:ph type="dt" sz="half" idx="10"/>
+          </p:nvPr>
+        </p:nvSpPr>
+        <p:spPr/>
+        <p:txBody>
+          <a:bodyPr/>
+          <a:lstStyle/>
+          <a:p>
+            <a:fld id="{241EB5C9-1307-BA42-ABA2-0BC069CD8E7F}" type="datetimeFigureOut">
               <a:rPr lang="en-US" smtClean="0">
                 <a:solidFill>
                   <a:srgbClr val="111111"/>
                 </a:solidFill>
               </a:rPr>
-              <a:t>Click to edit Master title style</a:t>
-            </a:r>
-            <a:endParaRPr lang="en-US"/>
-          </a:p>
-        </p:txBody>
-      </p:sp>
-      <p:sp>
-        <p:nvSpPr>
-          <p:cNvPr id="3" name="Vertical Text Placeholder 2"/>
-          <p:cNvSpPr>
-            <a:spLocks noGrp="1"/>
-          </p:cNvSpPr>
-          <p:nvPr>
-            <p:ph type="body" orient="vert" idx="1"/>
+              <a:t>1/2/22</a:t>
+            </a:fld>
+            <a:endParaRPr lang="en-US">
+              <a:solidFill>
+                <a:srgbClr val="111111"/>
+              </a:solidFill>
+            </a:endParaRPr>
+          </a:p>
+        </p:txBody>
+      </p:sp>
+      <p:sp>
+        <p:nvSpPr>
+          <p:cNvPr id="5" name="Footer Placeholder 4"/>
+          <p:cNvSpPr>
+            <a:spLocks noGrp="1"/>
+          </p:cNvSpPr>
+          <p:nvPr>
+            <p:ph type="ftr" sz="quarter" idx="11"/>
           </p:nvPr>
         </p:nvSpPr>
         <p:spPr/>
         <p:txBody>
-          <a:bodyPr vert="eaVert"/>
-          <a:lstStyle/>
-          <a:p>
-            <a:pPr lvl="0"/>
-            <a:r>
-              <a:rPr lang="en-US" smtClean="0">
-                <a:solidFill>
-                  <a:srgbClr val="111111"/>
-                </a:solidFill>
-              </a:rPr>
-              <a:t>Click to edit Master text styles</a:t>
-            </a:r>
-          </a:p>
-          <a:p>
-            <a:pPr lvl="1"/>
-            <a:r>
-              <a:rPr lang="en-US" smtClean="0">
-                <a:solidFill>
-                  <a:srgbClr val="111111"/>
-                </a:solidFill>
-              </a:rPr>
-              <a:t>Second level</a:t>
-            </a:r>
-          </a:p>
-          <a:p>
-            <a:pPr lvl="2"/>
-            <a:r>
-              <a:rPr lang="en-US" smtClean="0">
-                <a:solidFill>
-                  <a:srgbClr val="111111"/>
-                </a:solidFill>
-              </a:rPr>
-              <a:t>Third level</a:t>
-            </a:r>
-          </a:p>
-          <a:p>
-            <a:pPr lvl="3"/>
-            <a:r>
-              <a:rPr lang="en-US" smtClean="0">
-                <a:solidFill>
-                  <a:srgbClr val="111111"/>
-                </a:solidFill>
-              </a:rPr>
-              <a:t>Fourth level</a:t>
-            </a:r>
-          </a:p>
-          <a:p>
-            <a:pPr lvl="4"/>
-            <a:r>
-              <a:rPr lang="en-US" smtClean="0">
-                <a:solidFill>
-                  <a:srgbClr val="111111"/>
-                </a:solidFill>
-              </a:rPr>
-              <a:t>Fifth level</a:t>
-            </a:r>
-            <a:endParaRPr lang="en-US"/>
-          </a:p>
-        </p:txBody>
-      </p:sp>
-      <p:sp>
-        <p:nvSpPr>
-          <p:cNvPr id="4" name="Date Placeholder 3"/>
-          <p:cNvSpPr>
-            <a:spLocks noGrp="1"/>
-          </p:cNvSpPr>
-          <p:nvPr>
-            <p:ph type="dt" sz="half" idx="10"/>
+          <a:bodyPr/>
+          <a:lstStyle/>
+          <a:p>
+            <a:endParaRPr lang="en-US">
+              <a:solidFill>
+                <a:srgbClr val="111111"/>
+              </a:solidFill>
+            </a:endParaRPr>
+          </a:p>
+        </p:txBody>
+      </p:sp>
+      <p:sp>
+        <p:nvSpPr>
+          <p:cNvPr id="6" name="Slide Number Placeholder 5"/>
+          <p:cNvSpPr>
+            <a:spLocks noGrp="1"/>
+          </p:cNvSpPr>
+          <p:nvPr>
+            <p:ph type="sldNum" sz="quarter" idx="12"/>
           </p:nvPr>
         </p:nvSpPr>
         <p:spPr/>
@@ -475,53 +562,7 @@
           <a:bodyPr/>
           <a:lstStyle/>
           <a:p>
-            <a:fld id="{5BCAD085-E8A6-8845-BD4E-CB4CCA059FC4}" type="datetimeFigureOut">
-              <a:rPr lang="en-US" smtClean="0">
-                <a:solidFill>
-                  <a:srgbClr val="111111"/>
-                </a:solidFill>
-              </a:rPr>
-              <a:t>1/27/13</a:t>
-            </a:fld>
-            <a:endParaRPr lang="en-US"/>
-          </a:p>
-        </p:txBody>
-      </p:sp>
-      <p:sp>
-        <p:nvSpPr>
-          <p:cNvPr id="5" name="Footer Placeholder 4"/>
-          <p:cNvSpPr>
-            <a:spLocks noGrp="1"/>
-          </p:cNvSpPr>
-          <p:nvPr>
-            <p:ph type="ftr" sz="quarter" idx="11"/>
-          </p:nvPr>
-        </p:nvSpPr>
-        <p:spPr/>
-        <p:txBody>
-          <a:bodyPr/>
-          <a:lstStyle/>
-          <a:p>
-            <a:endParaRPr lang="en-US"/>
-          </a:p>
-        </p:txBody>
-      </p:sp>
-      <p:sp>
-        <p:nvSpPr>
-          <p:cNvPr id="6" name="Slide Number Placeholder 5"/>
-          <p:cNvSpPr>
-            <a:spLocks noGrp="1"/>
-          </p:cNvSpPr>
-          <p:nvPr>
-            <p:ph type="sldNum" sz="quarter" idx="12"/>
-          </p:nvPr>
-        </p:nvSpPr>
-        <p:spPr/>
-        <p:txBody>
-          <a:bodyPr/>
-          <a:lstStyle/>
-          <a:p>
-            <a:fld id="{C1FF6DA9-008F-8B48-92A6-B652298478BF}" type="slidenum">
+            <a:fld id="{C5EF2332-01BF-834F-8236-50238282D533}" type="slidenum">
               <a:rPr lang="en-US" smtClean="0">
                 <a:solidFill>
                   <a:srgbClr val="111111"/>
@@ -529,14 +570,18 @@
               </a:rPr>
               <a:t>‹#›</a:t>
             </a:fld>
-            <a:endParaRPr lang="en-US"/>
+            <a:endParaRPr lang="en-US">
+              <a:solidFill>
+                <a:srgbClr val="111111"/>
+              </a:solidFill>
+            </a:endParaRPr>
           </a:p>
         </p:txBody>
       </p:sp>
     </p:spTree>
     <p:extLst>
       <p:ext uri="{BB962C8B-B14F-4D97-AF65-F5344CB8AC3E}">
-        <p14:creationId xmlns:p14="http://schemas.microsoft.com/office/powerpoint/2010/main" val="2910927964"/>
+        <p14:creationId xmlns:p14="http://schemas.microsoft.com/office/powerpoint/2010/main" val="313914798"/>
       </p:ext>
     </p:extLst>
   </p:cSld>
@@ -575,8 +620,8 @@
         </p:nvSpPr>
         <p:spPr>
           <a:xfrm>
-            <a:off x="6629400" y="274638"/>
-            <a:ext cx="2057400" cy="5851525"/>
+            <a:off x="6629400" y="205979"/>
+            <a:ext cx="2057400" cy="4388644"/>
           </a:xfrm>
         </p:spPr>
         <p:txBody>
@@ -584,14 +629,13 @@
           <a:lstStyle/>
           <a:p>
             <a:r>
-              <a:rPr lang="en-US" smtClean="0">
+              <a:rPr lang="en-US">
                 <a:solidFill>
                   <a:srgbClr val="111111"/>
                 </a:solidFill>
               </a:rPr>
               <a:t>Click to edit Master title style</a:t>
             </a:r>
-            <a:endParaRPr lang="en-US"/>
           </a:p>
         </p:txBody>
       </p:sp>
@@ -607,8 +651,8 @@
         </p:nvSpPr>
         <p:spPr>
           <a:xfrm>
-            <a:off x="457200" y="274638"/>
-            <a:ext cx="6019800" cy="5851525"/>
+            <a:off x="457200" y="205979"/>
+            <a:ext cx="6019800" cy="4388644"/>
           </a:xfrm>
         </p:spPr>
         <p:txBody>
@@ -617,69 +661,99 @@
           <a:p>
             <a:pPr lvl="0"/>
             <a:r>
+              <a:rPr lang="en-US">
+                <a:solidFill>
+                  <a:srgbClr val="111111"/>
+                </a:solidFill>
+              </a:rPr>
+              <a:t>Click to edit Master text styles</a:t>
+            </a:r>
+          </a:p>
+          <a:p>
+            <a:pPr lvl="1"/>
+            <a:r>
+              <a:rPr lang="en-US">
+                <a:solidFill>
+                  <a:srgbClr val="111111"/>
+                </a:solidFill>
+              </a:rPr>
+              <a:t>Second level</a:t>
+            </a:r>
+          </a:p>
+          <a:p>
+            <a:pPr lvl="2"/>
+            <a:r>
+              <a:rPr lang="en-US">
+                <a:solidFill>
+                  <a:srgbClr val="111111"/>
+                </a:solidFill>
+              </a:rPr>
+              <a:t>Third level</a:t>
+            </a:r>
+          </a:p>
+          <a:p>
+            <a:pPr lvl="3"/>
+            <a:r>
+              <a:rPr lang="en-US">
+                <a:solidFill>
+                  <a:srgbClr val="111111"/>
+                </a:solidFill>
+              </a:rPr>
+              <a:t>Fourth level</a:t>
+            </a:r>
+          </a:p>
+          <a:p>
+            <a:pPr lvl="4"/>
+            <a:r>
+              <a:rPr lang="en-US">
+                <a:solidFill>
+                  <a:srgbClr val="111111"/>
+                </a:solidFill>
+              </a:rPr>
+              <a:t>Fifth level</a:t>
+            </a:r>
+          </a:p>
+        </p:txBody>
+      </p:sp>
+      <p:sp>
+        <p:nvSpPr>
+          <p:cNvPr id="4" name="Date Placeholder 3"/>
+          <p:cNvSpPr>
+            <a:spLocks noGrp="1"/>
+          </p:cNvSpPr>
+          <p:nvPr>
+            <p:ph type="dt" sz="half" idx="10"/>
+          </p:nvPr>
+        </p:nvSpPr>
+        <p:spPr/>
+        <p:txBody>
+          <a:bodyPr/>
+          <a:lstStyle/>
+          <a:p>
+            <a:fld id="{241EB5C9-1307-BA42-ABA2-0BC069CD8E7F}" type="datetimeFigureOut">
               <a:rPr lang="en-US" smtClean="0">
                 <a:solidFill>
                   <a:srgbClr val="111111"/>
                 </a:solidFill>
               </a:rPr>
-              <a:t>Click to edit Master text styles</a:t>
-            </a:r>
-          </a:p>
-          <a:p>
-            <a:pPr lvl="1"/>
-            <a:r>
-              <a:rPr lang="en-US" smtClean="0">
-                <a:solidFill>
-                  <a:srgbClr val="111111"/>
-                </a:solidFill>
-              </a:rPr>
-              <a:t>Second level</a:t>
-            </a:r>
-          </a:p>
-          <a:p>
-            <a:pPr lvl="2"/>
-            <a:r>
-              <a:rPr lang="en-US" smtClean="0">
-                <a:solidFill>
-                  <a:srgbClr val="111111"/>
-                </a:solidFill>
-              </a:rPr>
-              <a:t>Third level</a:t>
-            </a:r>
-          </a:p>
-          <a:p>
-            <a:pPr lvl="3"/>
-            <a:r>
-              <a:rPr lang="en-US" smtClean="0">
-                <a:solidFill>
-                  <a:srgbClr val="111111"/>
-                </a:solidFill>
-              </a:rPr>
-              <a:t>Fourth level</a:t>
-            </a:r>
-          </a:p>
-          <a:p>
-            <a:pPr lvl="4"/>
-            <a:r>
-              <a:rPr lang="en-US" smtClean="0">
-                <a:solidFill>
-                  <a:srgbClr val="111111"/>
-                </a:solidFill>
-              </a:rPr>
-              <a:t>Fifth level</a:t>
-            </a:r>
-            <a:endParaRPr lang="en-US"/>
-          </a:p>
-        </p:txBody>
-      </p:sp>
-      <p:sp>
-        <p:nvSpPr>
-          <p:cNvPr id="4" name="Date Placeholder 3"/>
-          <p:cNvSpPr>
-            <a:spLocks noGrp="1"/>
-          </p:cNvSpPr>
-          <p:nvPr>
-            <p:ph type="dt" sz="half" idx="10"/>
+              <a:t>1/2/22</a:t>
+            </a:fld>
+            <a:endParaRPr lang="en-US">
+              <a:solidFill>
+                <a:srgbClr val="111111"/>
+              </a:solidFill>
+            </a:endParaRPr>
+          </a:p>
+        </p:txBody>
+      </p:sp>
+      <p:sp>
+        <p:nvSpPr>
+          <p:cNvPr id="5" name="Footer Placeholder 4"/>
+          <p:cNvSpPr>
+            <a:spLocks noGrp="1"/>
+          </p:cNvSpPr>
+          <p:nvPr>
+            <p:ph type="ftr" sz="quarter" idx="11"/>
           </p:nvPr>
         </p:nvSpPr>
         <p:spPr/>
@@ -687,26 +761,22 @@
           <a:bodyPr/>
           <a:lstStyle/>
           <a:p>
-            <a:fld id="{5BCAD085-E8A6-8845-BD4E-CB4CCA059FC4}" type="datetimeFigureOut">
-              <a:rPr lang="en-US" smtClean="0">
-                <a:solidFill>
-                  <a:srgbClr val="111111"/>
-                </a:solidFill>
-              </a:rPr>
-              <a:t>1/27/13</a:t>
-            </a:fld>
-            <a:endParaRPr lang="en-US"/>
-          </a:p>
-        </p:txBody>
-      </p:sp>
-      <p:sp>
-        <p:nvSpPr>
-          <p:cNvPr id="5" name="Footer Placeholder 4"/>
-          <p:cNvSpPr>
-            <a:spLocks noGrp="1"/>
-          </p:cNvSpPr>
-          <p:nvPr>
-            <p:ph type="ftr" sz="quarter" idx="11"/>
+            <a:endParaRPr lang="en-US">
+              <a:solidFill>
+                <a:srgbClr val="111111"/>
+              </a:solidFill>
+            </a:endParaRPr>
+          </a:p>
+        </p:txBody>
+      </p:sp>
+      <p:sp>
+        <p:nvSpPr>
+          <p:cNvPr id="6" name="Slide Number Placeholder 5"/>
+          <p:cNvSpPr>
+            <a:spLocks noGrp="1"/>
+          </p:cNvSpPr>
+          <p:nvPr>
+            <p:ph type="sldNum" sz="quarter" idx="12"/>
           </p:nvPr>
         </p:nvSpPr>
         <p:spPr/>
@@ -714,26 +784,7 @@
           <a:bodyPr/>
           <a:lstStyle/>
           <a:p>
-            <a:endParaRPr lang="en-US"/>
-          </a:p>
-        </p:txBody>
-      </p:sp>
-      <p:sp>
-        <p:nvSpPr>
-          <p:cNvPr id="6" name="Slide Number Placeholder 5"/>
-          <p:cNvSpPr>
-            <a:spLocks noGrp="1"/>
-          </p:cNvSpPr>
-          <p:nvPr>
-            <p:ph type="sldNum" sz="quarter" idx="12"/>
-          </p:nvPr>
-        </p:nvSpPr>
-        <p:spPr/>
-        <p:txBody>
-          <a:bodyPr/>
-          <a:lstStyle/>
-          <a:p>
-            <a:fld id="{C1FF6DA9-008F-8B48-92A6-B652298478BF}" type="slidenum">
+            <a:fld id="{C5EF2332-01BF-834F-8236-50238282D533}" type="slidenum">
               <a:rPr lang="en-US" smtClean="0">
                 <a:solidFill>
                   <a:srgbClr val="111111"/>
@@ -741,14 +792,18 @@
               </a:rPr>
               <a:t>‹#›</a:t>
             </a:fld>
-            <a:endParaRPr lang="en-US"/>
+            <a:endParaRPr lang="en-US">
+              <a:solidFill>
+                <a:srgbClr val="111111"/>
+              </a:solidFill>
+            </a:endParaRPr>
           </a:p>
         </p:txBody>
       </p:sp>
     </p:spTree>
     <p:extLst>
       <p:ext uri="{BB962C8B-B14F-4D97-AF65-F5344CB8AC3E}">
-        <p14:creationId xmlns:p14="http://schemas.microsoft.com/office/powerpoint/2010/main" val="3612223792"/>
+        <p14:creationId xmlns:p14="http://schemas.microsoft.com/office/powerpoint/2010/main" val="2581529045"/>
       </p:ext>
     </p:extLst>
   </p:cSld>
@@ -791,25 +846,126 @@
           <a:lstStyle/>
           <a:p>
             <a:r>
+              <a:rPr lang="en-US">
+                <a:solidFill>
+                  <a:srgbClr val="111111"/>
+                </a:solidFill>
+              </a:rPr>
+              <a:t>Click to edit Master title style</a:t>
+            </a:r>
+          </a:p>
+        </p:txBody>
+      </p:sp>
+      <p:sp>
+        <p:nvSpPr>
+          <p:cNvPr id="3" name="Content Placeholder 2"/>
+          <p:cNvSpPr>
+            <a:spLocks noGrp="1"/>
+          </p:cNvSpPr>
+          <p:nvPr>
+            <p:ph idx="1"/>
+          </p:nvPr>
+        </p:nvSpPr>
+        <p:spPr/>
+        <p:txBody>
+          <a:bodyPr/>
+          <a:lstStyle/>
+          <a:p>
+            <a:pPr lvl="0"/>
+            <a:r>
+              <a:rPr lang="en-US">
+                <a:solidFill>
+                  <a:srgbClr val="111111"/>
+                </a:solidFill>
+              </a:rPr>
+              <a:t>Click to edit Master text styles</a:t>
+            </a:r>
+          </a:p>
+          <a:p>
+            <a:pPr lvl="1"/>
+            <a:r>
+              <a:rPr lang="en-US">
+                <a:solidFill>
+                  <a:srgbClr val="111111"/>
+                </a:solidFill>
+              </a:rPr>
+              <a:t>Second level</a:t>
+            </a:r>
+          </a:p>
+          <a:p>
+            <a:pPr lvl="2"/>
+            <a:r>
+              <a:rPr lang="en-US">
+                <a:solidFill>
+                  <a:srgbClr val="111111"/>
+                </a:solidFill>
+              </a:rPr>
+              <a:t>Third level</a:t>
+            </a:r>
+          </a:p>
+          <a:p>
+            <a:pPr lvl="3"/>
+            <a:r>
+              <a:rPr lang="en-US">
+                <a:solidFill>
+                  <a:srgbClr val="111111"/>
+                </a:solidFill>
+              </a:rPr>
+              <a:t>Fourth level</a:t>
+            </a:r>
+          </a:p>
+          <a:p>
+            <a:pPr lvl="4"/>
+            <a:r>
+              <a:rPr lang="en-US">
+                <a:solidFill>
+                  <a:srgbClr val="111111"/>
+                </a:solidFill>
+              </a:rPr>
+              <a:t>Fifth level</a:t>
+            </a:r>
+          </a:p>
+        </p:txBody>
+      </p:sp>
+      <p:sp>
+        <p:nvSpPr>
+          <p:cNvPr id="4" name="Date Placeholder 3"/>
+          <p:cNvSpPr>
+            <a:spLocks noGrp="1"/>
+          </p:cNvSpPr>
+          <p:nvPr>
+            <p:ph type="dt" sz="half" idx="10"/>
+          </p:nvPr>
+        </p:nvSpPr>
+        <p:spPr/>
+        <p:txBody>
+          <a:bodyPr/>
+          <a:lstStyle/>
+          <a:p>
+            <a:fld id="{241EB5C9-1307-BA42-ABA2-0BC069CD8E7F}" type="datetimeFigureOut">
               <a:rPr lang="en-US" smtClean="0">
                 <a:solidFill>
                   <a:srgbClr val="111111"/>
                 </a:solidFill>
               </a:rPr>
-              <a:t>Click to edit Master title style</a:t>
-            </a:r>
-            <a:endParaRPr lang="en-US"/>
-          </a:p>
-        </p:txBody>
-      </p:sp>
-      <p:sp>
-        <p:nvSpPr>
-          <p:cNvPr id="3" name="Content Placeholder 2"/>
-          <p:cNvSpPr>
-            <a:spLocks noGrp="1"/>
-          </p:cNvSpPr>
-          <p:nvPr>
-            <p:ph idx="1"/>
+              <a:t>1/2/22</a:t>
+            </a:fld>
+            <a:endParaRPr lang="en-US">
+              <a:solidFill>
+                <a:srgbClr val="111111"/>
+              </a:solidFill>
+            </a:endParaRPr>
+          </a:p>
+        </p:txBody>
+      </p:sp>
+      <p:sp>
+        <p:nvSpPr>
+          <p:cNvPr id="5" name="Footer Placeholder 4"/>
+          <p:cNvSpPr>
+            <a:spLocks noGrp="1"/>
+          </p:cNvSpPr>
+          <p:nvPr>
+            <p:ph type="ftr" sz="quarter" idx="11"/>
           </p:nvPr>
         </p:nvSpPr>
         <p:spPr/>
@@ -817,71 +973,22 @@
           <a:bodyPr/>
           <a:lstStyle/>
           <a:p>
-            <a:pPr lvl="0"/>
-            <a:r>
-              <a:rPr lang="en-US" smtClean="0">
-                <a:solidFill>
-                  <a:srgbClr val="111111"/>
-                </a:solidFill>
-              </a:rPr>
-              <a:t>Click to edit Master text styles</a:t>
-            </a:r>
-          </a:p>
-          <a:p>
-            <a:pPr lvl="1"/>
-            <a:r>
-              <a:rPr lang="en-US" smtClean="0">
-                <a:solidFill>
-                  <a:srgbClr val="111111"/>
-                </a:solidFill>
-              </a:rPr>
-              <a:t>Second level</a:t>
-            </a:r>
-          </a:p>
-          <a:p>
-            <a:pPr lvl="2"/>
-            <a:r>
-              <a:rPr lang="en-US" smtClean="0">
-                <a:solidFill>
-                  <a:srgbClr val="111111"/>
-                </a:solidFill>
-              </a:rPr>
-              <a:t>Third level</a:t>
-            </a:r>
-          </a:p>
-          <a:p>
-            <a:pPr lvl="3"/>
-            <a:r>
-              <a:rPr lang="en-US" smtClean="0">
-                <a:solidFill>
-                  <a:srgbClr val="111111"/>
-                </a:solidFill>
-              </a:rPr>
-              <a:t>Fourth level</a:t>
-            </a:r>
-          </a:p>
-          <a:p>
-            <a:pPr lvl="4"/>
-            <a:r>
-              <a:rPr lang="en-US" smtClean="0">
-                <a:solidFill>
-                  <a:srgbClr val="111111"/>
-                </a:solidFill>
-              </a:rPr>
-              <a:t>Fifth level</a:t>
-            </a:r>
-            <a:endParaRPr lang="en-US"/>
-          </a:p>
-        </p:txBody>
-      </p:sp>
-      <p:sp>
-        <p:nvSpPr>
-          <p:cNvPr id="4" name="Date Placeholder 3"/>
-          <p:cNvSpPr>
-            <a:spLocks noGrp="1"/>
-          </p:cNvSpPr>
-          <p:nvPr>
-            <p:ph type="dt" sz="half" idx="10"/>
+            <a:endParaRPr lang="en-US">
+              <a:solidFill>
+                <a:srgbClr val="111111"/>
+              </a:solidFill>
+            </a:endParaRPr>
+          </a:p>
+        </p:txBody>
+      </p:sp>
+      <p:sp>
+        <p:nvSpPr>
+          <p:cNvPr id="6" name="Slide Number Placeholder 5"/>
+          <p:cNvSpPr>
+            <a:spLocks noGrp="1"/>
+          </p:cNvSpPr>
+          <p:nvPr>
+            <p:ph type="sldNum" sz="quarter" idx="12"/>
           </p:nvPr>
         </p:nvSpPr>
         <p:spPr/>
@@ -889,53 +996,7 @@
           <a:bodyPr/>
           <a:lstStyle/>
           <a:p>
-            <a:fld id="{5BCAD085-E8A6-8845-BD4E-CB4CCA059FC4}" type="datetimeFigureOut">
-              <a:rPr lang="en-US" smtClean="0">
-                <a:solidFill>
-                  <a:srgbClr val="111111"/>
-                </a:solidFill>
-              </a:rPr>
-              <a:t>1/27/13</a:t>
-            </a:fld>
-            <a:endParaRPr lang="en-US"/>
-          </a:p>
-        </p:txBody>
-      </p:sp>
-      <p:sp>
-        <p:nvSpPr>
-          <p:cNvPr id="5" name="Footer Placeholder 4"/>
-          <p:cNvSpPr>
-            <a:spLocks noGrp="1"/>
-          </p:cNvSpPr>
-          <p:nvPr>
-            <p:ph type="ftr" sz="quarter" idx="11"/>
-          </p:nvPr>
-        </p:nvSpPr>
-        <p:spPr/>
-        <p:txBody>
-          <a:bodyPr/>
-          <a:lstStyle/>
-          <a:p>
-            <a:endParaRPr lang="en-US"/>
-          </a:p>
-        </p:txBody>
-      </p:sp>
-      <p:sp>
-        <p:nvSpPr>
-          <p:cNvPr id="6" name="Slide Number Placeholder 5"/>
-          <p:cNvSpPr>
-            <a:spLocks noGrp="1"/>
-          </p:cNvSpPr>
-          <p:nvPr>
-            <p:ph type="sldNum" sz="quarter" idx="12"/>
-          </p:nvPr>
-        </p:nvSpPr>
-        <p:spPr/>
-        <p:txBody>
-          <a:bodyPr/>
-          <a:lstStyle/>
-          <a:p>
-            <a:fld id="{C1FF6DA9-008F-8B48-92A6-B652298478BF}" type="slidenum">
+            <a:fld id="{C5EF2332-01BF-834F-8236-50238282D533}" type="slidenum">
               <a:rPr lang="en-US" smtClean="0">
                 <a:solidFill>
                   <a:srgbClr val="111111"/>
@@ -943,14 +1004,18 @@
               </a:rPr>
               <a:t>‹#›</a:t>
             </a:fld>
-            <a:endParaRPr lang="en-US"/>
+            <a:endParaRPr lang="en-US">
+              <a:solidFill>
+                <a:srgbClr val="111111"/>
+              </a:solidFill>
+            </a:endParaRPr>
           </a:p>
         </p:txBody>
       </p:sp>
     </p:spTree>
     <p:extLst>
       <p:ext uri="{BB962C8B-B14F-4D97-AF65-F5344CB8AC3E}">
-        <p14:creationId xmlns:p14="http://schemas.microsoft.com/office/powerpoint/2010/main" val="2614314258"/>
+        <p14:creationId xmlns:p14="http://schemas.microsoft.com/office/powerpoint/2010/main" val="338346009"/>
       </p:ext>
     </p:extLst>
   </p:cSld>
@@ -989,15 +1054,15 @@
         </p:nvSpPr>
         <p:spPr>
           <a:xfrm>
-            <a:off x="722313" y="4406900"/>
-            <a:ext cx="7772400" cy="1362075"/>
+            <a:off x="722313" y="3305176"/>
+            <a:ext cx="7772400" cy="1021556"/>
           </a:xfrm>
         </p:spPr>
         <p:txBody>
           <a:bodyPr anchor="t"/>
           <a:lstStyle>
             <a:lvl1pPr algn="l">
-              <a:defRPr sz="4000" b="1" cap="all">
+              <a:defRPr sz="3000" b="1" cap="all">
                 <a:solidFill>
                   <a:srgbClr val="111111"/>
                 </a:solidFill>
@@ -1006,14 +1071,13 @@
           </a:lstStyle>
           <a:p>
             <a:r>
-              <a:rPr lang="en-US" smtClean="0">
+              <a:rPr lang="en-US">
                 <a:solidFill>
                   <a:srgbClr val="111111"/>
                 </a:solidFill>
               </a:rPr>
               <a:t>Click to edit Master title style</a:t>
             </a:r>
-            <a:endParaRPr lang="en-US"/>
           </a:p>
         </p:txBody>
       </p:sp>
@@ -1029,8 +1093,8 @@
         </p:nvSpPr>
         <p:spPr>
           <a:xfrm>
-            <a:off x="722313" y="2906713"/>
-            <a:ext cx="7772400" cy="1500187"/>
+            <a:off x="722313" y="2180035"/>
+            <a:ext cx="7772400" cy="1125140"/>
           </a:xfrm>
         </p:spPr>
         <p:txBody>
@@ -1038,71 +1102,71 @@
           <a:lstStyle>
             <a:lvl1pPr marL="0" indent="0">
               <a:buNone/>
-              <a:defRPr sz="2000">
+              <a:defRPr sz="1500">
                 <a:solidFill>
                   <a:srgbClr val="111111"/>
                 </a:solidFill>
               </a:defRPr>
             </a:lvl1pPr>
-            <a:lvl2pPr marL="457200" indent="0">
-              <a:buNone/>
-              <a:defRPr sz="1800">
+            <a:lvl2pPr marL="342900" indent="0">
+              <a:buNone/>
+              <a:defRPr sz="1350">
                 <a:solidFill>
                   <a:srgbClr val="111111"/>
                 </a:solidFill>
               </a:defRPr>
             </a:lvl2pPr>
-            <a:lvl3pPr marL="914400" indent="0">
-              <a:buNone/>
-              <a:defRPr sz="1600">
+            <a:lvl3pPr marL="685800" indent="0">
+              <a:buNone/>
+              <a:defRPr sz="1200">
                 <a:solidFill>
                   <a:srgbClr val="111111"/>
                 </a:solidFill>
               </a:defRPr>
             </a:lvl3pPr>
-            <a:lvl4pPr marL="1371600" indent="0">
-              <a:buNone/>
-              <a:defRPr sz="1400">
+            <a:lvl4pPr marL="1028700" indent="0">
+              <a:buNone/>
+              <a:defRPr sz="1050">
                 <a:solidFill>
                   <a:srgbClr val="111111"/>
                 </a:solidFill>
               </a:defRPr>
             </a:lvl4pPr>
-            <a:lvl5pPr marL="1828800" indent="0">
-              <a:buNone/>
-              <a:defRPr sz="1400">
+            <a:lvl5pPr marL="1371600" indent="0">
+              <a:buNone/>
+              <a:defRPr sz="1050">
                 <a:solidFill>
                   <a:srgbClr val="111111"/>
                 </a:solidFill>
               </a:defRPr>
             </a:lvl5pPr>
-            <a:lvl6pPr marL="2286000" indent="0">
-              <a:buNone/>
-              <a:defRPr sz="1400">
+            <a:lvl6pPr marL="1714500" indent="0">
+              <a:buNone/>
+              <a:defRPr sz="1050">
                 <a:solidFill>
                   <a:srgbClr val="111111"/>
                 </a:solidFill>
               </a:defRPr>
             </a:lvl6pPr>
-            <a:lvl7pPr marL="2743200" indent="0">
-              <a:buNone/>
-              <a:defRPr sz="1400">
+            <a:lvl7pPr marL="2057400" indent="0">
+              <a:buNone/>
+              <a:defRPr sz="1050">
                 <a:solidFill>
                   <a:srgbClr val="111111"/>
                 </a:solidFill>
               </a:defRPr>
             </a:lvl7pPr>
-            <a:lvl8pPr marL="3200400" indent="0">
-              <a:buNone/>
-              <a:defRPr sz="1400">
+            <a:lvl8pPr marL="2400300" indent="0">
+              <a:buNone/>
+              <a:defRPr sz="1050">
                 <a:solidFill>
                   <a:srgbClr val="111111"/>
                 </a:solidFill>
               </a:defRPr>
             </a:lvl8pPr>
-            <a:lvl9pPr marL="3657600" indent="0">
-              <a:buNone/>
-              <a:defRPr sz="1400">
+            <a:lvl9pPr marL="2743200" indent="0">
+              <a:buNone/>
+              <a:defRPr sz="1050">
                 <a:solidFill>
                   <a:srgbClr val="111111"/>
                 </a:solidFill>
@@ -1112,24 +1176,55 @@
           <a:p>
             <a:pPr lvl="0"/>
             <a:r>
+              <a:rPr lang="en-US">
+                <a:solidFill>
+                  <a:srgbClr val="111111"/>
+                </a:solidFill>
+              </a:rPr>
+              <a:t>Click to edit Master text styles</a:t>
+            </a:r>
+          </a:p>
+        </p:txBody>
+      </p:sp>
+      <p:sp>
+        <p:nvSpPr>
+          <p:cNvPr id="4" name="Date Placeholder 3"/>
+          <p:cNvSpPr>
+            <a:spLocks noGrp="1"/>
+          </p:cNvSpPr>
+          <p:nvPr>
+            <p:ph type="dt" sz="half" idx="10"/>
+          </p:nvPr>
+        </p:nvSpPr>
+        <p:spPr/>
+        <p:txBody>
+          <a:bodyPr/>
+          <a:lstStyle/>
+          <a:p>
+            <a:fld id="{241EB5C9-1307-BA42-ABA2-0BC069CD8E7F}" type="datetimeFigureOut">
               <a:rPr lang="en-US" smtClean="0">
                 <a:solidFill>
                   <a:srgbClr val="111111"/>
                 </a:solidFill>
               </a:rPr>
-              <a:t>Click to edit Master text styles</a:t>
-            </a:r>
-          </a:p>
-        </p:txBody>
-      </p:sp>
-      <p:sp>
-        <p:nvSpPr>
-          <p:cNvPr id="4" name="Date Placeholder 3"/>
-          <p:cNvSpPr>
-            <a:spLocks noGrp="1"/>
-          </p:cNvSpPr>
-          <p:nvPr>
-            <p:ph type="dt" sz="half" idx="10"/>
+              <a:t>1/2/22</a:t>
+            </a:fld>
+            <a:endParaRPr lang="en-US">
+              <a:solidFill>
+                <a:srgbClr val="111111"/>
+              </a:solidFill>
+            </a:endParaRPr>
+          </a:p>
+        </p:txBody>
+      </p:sp>
+      <p:sp>
+        <p:nvSpPr>
+          <p:cNvPr id="5" name="Footer Placeholder 4"/>
+          <p:cNvSpPr>
+            <a:spLocks noGrp="1"/>
+          </p:cNvSpPr>
+          <p:nvPr>
+            <p:ph type="ftr" sz="quarter" idx="11"/>
           </p:nvPr>
         </p:nvSpPr>
         <p:spPr/>
@@ -1137,26 +1232,22 @@
           <a:bodyPr/>
           <a:lstStyle/>
           <a:p>
-            <a:fld id="{5BCAD085-E8A6-8845-BD4E-CB4CCA059FC4}" type="datetimeFigureOut">
-              <a:rPr lang="en-US" smtClean="0">
-                <a:solidFill>
-                  <a:srgbClr val="111111"/>
-                </a:solidFill>
-              </a:rPr>
-              <a:t>1/27/13</a:t>
-            </a:fld>
-            <a:endParaRPr lang="en-US"/>
-          </a:p>
-        </p:txBody>
-      </p:sp>
-      <p:sp>
-        <p:nvSpPr>
-          <p:cNvPr id="5" name="Footer Placeholder 4"/>
-          <p:cNvSpPr>
-            <a:spLocks noGrp="1"/>
-          </p:cNvSpPr>
-          <p:nvPr>
-            <p:ph type="ftr" sz="quarter" idx="11"/>
+            <a:endParaRPr lang="en-US">
+              <a:solidFill>
+                <a:srgbClr val="111111"/>
+              </a:solidFill>
+            </a:endParaRPr>
+          </a:p>
+        </p:txBody>
+      </p:sp>
+      <p:sp>
+        <p:nvSpPr>
+          <p:cNvPr id="6" name="Slide Number Placeholder 5"/>
+          <p:cNvSpPr>
+            <a:spLocks noGrp="1"/>
+          </p:cNvSpPr>
+          <p:nvPr>
+            <p:ph type="sldNum" sz="quarter" idx="12"/>
           </p:nvPr>
         </p:nvSpPr>
         <p:spPr/>
@@ -1164,26 +1255,7 @@
           <a:bodyPr/>
           <a:lstStyle/>
           <a:p>
-            <a:endParaRPr lang="en-US"/>
-          </a:p>
-        </p:txBody>
-      </p:sp>
-      <p:sp>
-        <p:nvSpPr>
-          <p:cNvPr id="6" name="Slide Number Placeholder 5"/>
-          <p:cNvSpPr>
-            <a:spLocks noGrp="1"/>
-          </p:cNvSpPr>
-          <p:nvPr>
-            <p:ph type="sldNum" sz="quarter" idx="12"/>
-          </p:nvPr>
-        </p:nvSpPr>
-        <p:spPr/>
-        <p:txBody>
-          <a:bodyPr/>
-          <a:lstStyle/>
-          <a:p>
-            <a:fld id="{C1FF6DA9-008F-8B48-92A6-B652298478BF}" type="slidenum">
+            <a:fld id="{C5EF2332-01BF-834F-8236-50238282D533}" type="slidenum">
               <a:rPr lang="en-US" smtClean="0">
                 <a:solidFill>
                   <a:srgbClr val="111111"/>
@@ -1191,14 +1263,18 @@
               </a:rPr>
               <a:t>‹#›</a:t>
             </a:fld>
-            <a:endParaRPr lang="en-US"/>
+            <a:endParaRPr lang="en-US">
+              <a:solidFill>
+                <a:srgbClr val="111111"/>
+              </a:solidFill>
+            </a:endParaRPr>
           </a:p>
         </p:txBody>
       </p:sp>
     </p:spTree>
     <p:extLst>
       <p:ext uri="{BB962C8B-B14F-4D97-AF65-F5344CB8AC3E}">
-        <p14:creationId xmlns:p14="http://schemas.microsoft.com/office/powerpoint/2010/main" val="960648375"/>
+        <p14:creationId xmlns:p14="http://schemas.microsoft.com/office/powerpoint/2010/main" val="1073069076"/>
       </p:ext>
     </p:extLst>
   </p:cSld>
@@ -1241,14 +1317,13 @@
           <a:lstStyle/>
           <a:p>
             <a:r>
-              <a:rPr lang="en-US" smtClean="0">
+              <a:rPr lang="en-US">
                 <a:solidFill>
                   <a:srgbClr val="111111"/>
                 </a:solidFill>
               </a:rPr>
               <a:t>Click to edit Master title style</a:t>
             </a:r>
-            <a:endParaRPr lang="en-US"/>
           </a:p>
         </p:txBody>
       </p:sp>
@@ -1264,71 +1339,71 @@
         </p:nvSpPr>
         <p:spPr>
           <a:xfrm>
-            <a:off x="457200" y="1600200"/>
-            <a:ext cx="4038600" cy="4525963"/>
+            <a:off x="457200" y="1200151"/>
+            <a:ext cx="4038600" cy="3394472"/>
           </a:xfrm>
         </p:spPr>
         <p:txBody>
           <a:bodyPr/>
           <a:lstStyle>
             <a:lvl1pPr>
-              <a:defRPr sz="2800">
+              <a:defRPr sz="2100">
                 <a:solidFill>
                   <a:srgbClr val="111111"/>
                 </a:solidFill>
               </a:defRPr>
             </a:lvl1pPr>
             <a:lvl2pPr>
-              <a:defRPr sz="2400">
+              <a:defRPr sz="1800">
                 <a:solidFill>
                   <a:srgbClr val="111111"/>
                 </a:solidFill>
               </a:defRPr>
             </a:lvl2pPr>
             <a:lvl3pPr>
-              <a:defRPr sz="2000">
+              <a:defRPr sz="1500">
                 <a:solidFill>
                   <a:srgbClr val="111111"/>
                 </a:solidFill>
               </a:defRPr>
             </a:lvl3pPr>
             <a:lvl4pPr>
-              <a:defRPr sz="1800">
+              <a:defRPr sz="1350">
                 <a:solidFill>
                   <a:srgbClr val="111111"/>
                 </a:solidFill>
               </a:defRPr>
             </a:lvl4pPr>
             <a:lvl5pPr>
-              <a:defRPr sz="1800">
+              <a:defRPr sz="1350">
                 <a:solidFill>
                   <a:srgbClr val="111111"/>
                 </a:solidFill>
               </a:defRPr>
             </a:lvl5pPr>
             <a:lvl6pPr>
-              <a:defRPr sz="1800">
+              <a:defRPr sz="1350">
                 <a:solidFill>
                   <a:srgbClr val="111111"/>
                 </a:solidFill>
               </a:defRPr>
             </a:lvl6pPr>
             <a:lvl7pPr>
-              <a:defRPr sz="1800">
+              <a:defRPr sz="1350">
                 <a:solidFill>
                   <a:srgbClr val="111111"/>
                 </a:solidFill>
               </a:defRPr>
             </a:lvl7pPr>
             <a:lvl8pPr>
-              <a:defRPr sz="1800">
+              <a:defRPr sz="1350">
                 <a:solidFill>
                   <a:srgbClr val="111111"/>
                 </a:solidFill>
               </a:defRPr>
             </a:lvl8pPr>
             <a:lvl9pPr>
-              <a:defRPr sz="1800">
+              <a:defRPr sz="1350">
                 <a:solidFill>
                   <a:srgbClr val="111111"/>
                 </a:solidFill>
@@ -1338,7 +1413,7 @@
           <a:p>
             <a:pPr lvl="0"/>
             <a:r>
-              <a:rPr lang="en-US" smtClean="0">
+              <a:rPr lang="en-US">
                 <a:solidFill>
                   <a:srgbClr val="111111"/>
                 </a:solidFill>
@@ -1349,7 +1424,7 @@
           <a:p>
             <a:pPr lvl="1"/>
             <a:r>
-              <a:rPr lang="en-US" smtClean="0">
+              <a:rPr lang="en-US">
                 <a:solidFill>
                   <a:srgbClr val="111111"/>
                 </a:solidFill>
@@ -1360,7 +1435,7 @@
           <a:p>
             <a:pPr lvl="2"/>
             <a:r>
-              <a:rPr lang="en-US" smtClean="0">
+              <a:rPr lang="en-US">
                 <a:solidFill>
                   <a:srgbClr val="111111"/>
                 </a:solidFill>
@@ -1371,7 +1446,7 @@
           <a:p>
             <a:pPr lvl="3"/>
             <a:r>
-              <a:rPr lang="en-US" smtClean="0">
+              <a:rPr lang="en-US">
                 <a:solidFill>
                   <a:srgbClr val="111111"/>
                 </a:solidFill>
@@ -1382,14 +1457,13 @@
           <a:p>
             <a:pPr lvl="4"/>
             <a:r>
-              <a:rPr lang="en-US" smtClean="0">
+              <a:rPr lang="en-US">
                 <a:solidFill>
                   <a:srgbClr val="111111"/>
                 </a:solidFill>
               </a:rPr>
               <a:t>Fifth level</a:t>
             </a:r>
-            <a:endParaRPr lang="en-US"/>
           </a:p>
         </p:txBody>
       </p:sp>
@@ -1405,71 +1479,71 @@
         </p:nvSpPr>
         <p:spPr>
           <a:xfrm>
-            <a:off x="4648200" y="1600200"/>
-            <a:ext cx="4038600" cy="4525963"/>
+            <a:off x="4648200" y="1200151"/>
+            <a:ext cx="4038600" cy="3394472"/>
           </a:xfrm>
         </p:spPr>
         <p:txBody>
           <a:bodyPr/>
           <a:lstStyle>
             <a:lvl1pPr>
-              <a:defRPr sz="2800">
+              <a:defRPr sz="2100">
                 <a:solidFill>
                   <a:srgbClr val="111111"/>
                 </a:solidFill>
               </a:defRPr>
             </a:lvl1pPr>
             <a:lvl2pPr>
-              <a:defRPr sz="2400">
+              <a:defRPr sz="1800">
                 <a:solidFill>
                   <a:srgbClr val="111111"/>
                 </a:solidFill>
               </a:defRPr>
             </a:lvl2pPr>
             <a:lvl3pPr>
-              <a:defRPr sz="2000">
+              <a:defRPr sz="1500">
                 <a:solidFill>
                   <a:srgbClr val="111111"/>
                 </a:solidFill>
               </a:defRPr>
             </a:lvl3pPr>
             <a:lvl4pPr>
-              <a:defRPr sz="1800">
+              <a:defRPr sz="1350">
                 <a:solidFill>
                   <a:srgbClr val="111111"/>
                 </a:solidFill>
               </a:defRPr>
             </a:lvl4pPr>
             <a:lvl5pPr>
-              <a:defRPr sz="1800">
+              <a:defRPr sz="1350">
                 <a:solidFill>
                   <a:srgbClr val="111111"/>
                 </a:solidFill>
               </a:defRPr>
             </a:lvl5pPr>
             <a:lvl6pPr>
-              <a:defRPr sz="1800">
+              <a:defRPr sz="1350">
                 <a:solidFill>
                   <a:srgbClr val="111111"/>
                 </a:solidFill>
               </a:defRPr>
             </a:lvl6pPr>
             <a:lvl7pPr>
-              <a:defRPr sz="1800">
+              <a:defRPr sz="1350">
                 <a:solidFill>
                   <a:srgbClr val="111111"/>
                 </a:solidFill>
               </a:defRPr>
             </a:lvl7pPr>
             <a:lvl8pPr>
-              <a:defRPr sz="1800">
+              <a:defRPr sz="1350">
                 <a:solidFill>
                   <a:srgbClr val="111111"/>
                 </a:solidFill>
               </a:defRPr>
             </a:lvl8pPr>
             <a:lvl9pPr>
-              <a:defRPr sz="1800">
+              <a:defRPr sz="1350">
                 <a:solidFill>
                   <a:srgbClr val="111111"/>
                 </a:solidFill>
@@ -1479,69 +1553,99 @@
           <a:p>
             <a:pPr lvl="0"/>
             <a:r>
+              <a:rPr lang="en-US">
+                <a:solidFill>
+                  <a:srgbClr val="111111"/>
+                </a:solidFill>
+              </a:rPr>
+              <a:t>Click to edit Master text styles</a:t>
+            </a:r>
+          </a:p>
+          <a:p>
+            <a:pPr lvl="1"/>
+            <a:r>
+              <a:rPr lang="en-US">
+                <a:solidFill>
+                  <a:srgbClr val="111111"/>
+                </a:solidFill>
+              </a:rPr>
+              <a:t>Second level</a:t>
+            </a:r>
+          </a:p>
+          <a:p>
+            <a:pPr lvl="2"/>
+            <a:r>
+              <a:rPr lang="en-US">
+                <a:solidFill>
+                  <a:srgbClr val="111111"/>
+                </a:solidFill>
+              </a:rPr>
+              <a:t>Third level</a:t>
+            </a:r>
+          </a:p>
+          <a:p>
+            <a:pPr lvl="3"/>
+            <a:r>
+              <a:rPr lang="en-US">
+                <a:solidFill>
+                  <a:srgbClr val="111111"/>
+                </a:solidFill>
+              </a:rPr>
+              <a:t>Fourth level</a:t>
+            </a:r>
+          </a:p>
+          <a:p>
+            <a:pPr lvl="4"/>
+            <a:r>
+              <a:rPr lang="en-US">
+                <a:solidFill>
+                  <a:srgbClr val="111111"/>
+                </a:solidFill>
+              </a:rPr>
+              <a:t>Fifth level</a:t>
+            </a:r>
+          </a:p>
+        </p:txBody>
+      </p:sp>
+      <p:sp>
+        <p:nvSpPr>
+          <p:cNvPr id="5" name="Date Placeholder 4"/>
+          <p:cNvSpPr>
+            <a:spLocks noGrp="1"/>
+          </p:cNvSpPr>
+          <p:nvPr>
+            <p:ph type="dt" sz="half" idx="10"/>
+          </p:nvPr>
+        </p:nvSpPr>
+        <p:spPr/>
+        <p:txBody>
+          <a:bodyPr/>
+          <a:lstStyle/>
+          <a:p>
+            <a:fld id="{241EB5C9-1307-BA42-ABA2-0BC069CD8E7F}" type="datetimeFigureOut">
               <a:rPr lang="en-US" smtClean="0">
                 <a:solidFill>
                   <a:srgbClr val="111111"/>
                 </a:solidFill>
               </a:rPr>
-              <a:t>Click to edit Master text styles</a:t>
-            </a:r>
-          </a:p>
-          <a:p>
-            <a:pPr lvl="1"/>
-            <a:r>
-              <a:rPr lang="en-US" smtClean="0">
-                <a:solidFill>
-                  <a:srgbClr val="111111"/>
-                </a:solidFill>
-              </a:rPr>
-              <a:t>Second level</a:t>
-            </a:r>
-          </a:p>
-          <a:p>
-            <a:pPr lvl="2"/>
-            <a:r>
-              <a:rPr lang="en-US" smtClean="0">
-                <a:solidFill>
-                  <a:srgbClr val="111111"/>
-                </a:solidFill>
-              </a:rPr>
-              <a:t>Third level</a:t>
-            </a:r>
-          </a:p>
-          <a:p>
-            <a:pPr lvl="3"/>
-            <a:r>
-              <a:rPr lang="en-US" smtClean="0">
-                <a:solidFill>
-                  <a:srgbClr val="111111"/>
-                </a:solidFill>
-              </a:rPr>
-              <a:t>Fourth level</a:t>
-            </a:r>
-          </a:p>
-          <a:p>
-            <a:pPr lvl="4"/>
-            <a:r>
-              <a:rPr lang="en-US" smtClean="0">
-                <a:solidFill>
-                  <a:srgbClr val="111111"/>
-                </a:solidFill>
-              </a:rPr>
-              <a:t>Fifth level</a:t>
-            </a:r>
-            <a:endParaRPr lang="en-US"/>
-          </a:p>
-        </p:txBody>
-      </p:sp>
-      <p:sp>
-        <p:nvSpPr>
-          <p:cNvPr id="5" name="Date Placeholder 4"/>
-          <p:cNvSpPr>
-            <a:spLocks noGrp="1"/>
-          </p:cNvSpPr>
-          <p:nvPr>
-            <p:ph type="dt" sz="half" idx="10"/>
+              <a:t>1/2/22</a:t>
+            </a:fld>
+            <a:endParaRPr lang="en-US">
+              <a:solidFill>
+                <a:srgbClr val="111111"/>
+              </a:solidFill>
+            </a:endParaRPr>
+          </a:p>
+        </p:txBody>
+      </p:sp>
+      <p:sp>
+        <p:nvSpPr>
+          <p:cNvPr id="6" name="Footer Placeholder 5"/>
+          <p:cNvSpPr>
+            <a:spLocks noGrp="1"/>
+          </p:cNvSpPr>
+          <p:nvPr>
+            <p:ph type="ftr" sz="quarter" idx="11"/>
           </p:nvPr>
         </p:nvSpPr>
         <p:spPr/>
@@ -1549,26 +1653,22 @@
           <a:bodyPr/>
           <a:lstStyle/>
           <a:p>
-            <a:fld id="{5BCAD085-E8A6-8845-BD4E-CB4CCA059FC4}" type="datetimeFigureOut">
-              <a:rPr lang="en-US" smtClean="0">
-                <a:solidFill>
-                  <a:srgbClr val="111111"/>
-                </a:solidFill>
-              </a:rPr>
-              <a:t>1/27/13</a:t>
-            </a:fld>
-            <a:endParaRPr lang="en-US"/>
-          </a:p>
-        </p:txBody>
-      </p:sp>
-      <p:sp>
-        <p:nvSpPr>
-          <p:cNvPr id="6" name="Footer Placeholder 5"/>
-          <p:cNvSpPr>
-            <a:spLocks noGrp="1"/>
-          </p:cNvSpPr>
-          <p:nvPr>
-            <p:ph type="ftr" sz="quarter" idx="11"/>
+            <a:endParaRPr lang="en-US">
+              <a:solidFill>
+                <a:srgbClr val="111111"/>
+              </a:solidFill>
+            </a:endParaRPr>
+          </a:p>
+        </p:txBody>
+      </p:sp>
+      <p:sp>
+        <p:nvSpPr>
+          <p:cNvPr id="7" name="Slide Number Placeholder 6"/>
+          <p:cNvSpPr>
+            <a:spLocks noGrp="1"/>
+          </p:cNvSpPr>
+          <p:nvPr>
+            <p:ph type="sldNum" sz="quarter" idx="12"/>
           </p:nvPr>
         </p:nvSpPr>
         <p:spPr/>
@@ -1576,26 +1676,7 @@
           <a:bodyPr/>
           <a:lstStyle/>
           <a:p>
-            <a:endParaRPr lang="en-US"/>
-          </a:p>
-        </p:txBody>
-      </p:sp>
-      <p:sp>
-        <p:nvSpPr>
-          <p:cNvPr id="7" name="Slide Number Placeholder 6"/>
-          <p:cNvSpPr>
-            <a:spLocks noGrp="1"/>
-          </p:cNvSpPr>
-          <p:nvPr>
-            <p:ph type="sldNum" sz="quarter" idx="12"/>
-          </p:nvPr>
-        </p:nvSpPr>
-        <p:spPr/>
-        <p:txBody>
-          <a:bodyPr/>
-          <a:lstStyle/>
-          <a:p>
-            <a:fld id="{C1FF6DA9-008F-8B48-92A6-B652298478BF}" type="slidenum">
+            <a:fld id="{C5EF2332-01BF-834F-8236-50238282D533}" type="slidenum">
               <a:rPr lang="en-US" smtClean="0">
                 <a:solidFill>
                   <a:srgbClr val="111111"/>
@@ -1603,14 +1684,18 @@
               </a:rPr>
               <a:t>‹#›</a:t>
             </a:fld>
-            <a:endParaRPr lang="en-US"/>
+            <a:endParaRPr lang="en-US">
+              <a:solidFill>
+                <a:srgbClr val="111111"/>
+              </a:solidFill>
+            </a:endParaRPr>
           </a:p>
         </p:txBody>
       </p:sp>
     </p:spTree>
     <p:extLst>
       <p:ext uri="{BB962C8B-B14F-4D97-AF65-F5344CB8AC3E}">
-        <p14:creationId xmlns:p14="http://schemas.microsoft.com/office/powerpoint/2010/main" val="2782244947"/>
+        <p14:creationId xmlns:p14="http://schemas.microsoft.com/office/powerpoint/2010/main" val="2619886245"/>
       </p:ext>
     </p:extLst>
   </p:cSld>
@@ -1661,14 +1746,13 @@
           </a:lstStyle>
           <a:p>
             <a:r>
-              <a:rPr lang="en-US" smtClean="0">
+              <a:rPr lang="en-US">
                 <a:solidFill>
                   <a:srgbClr val="111111"/>
                 </a:solidFill>
               </a:rPr>
               <a:t>Click to edit Master title style</a:t>
             </a:r>
-            <a:endParaRPr lang="en-US"/>
           </a:p>
         </p:txBody>
       </p:sp>
@@ -1684,8 +1768,8 @@
         </p:nvSpPr>
         <p:spPr>
           <a:xfrm>
-            <a:off x="457200" y="1535113"/>
-            <a:ext cx="4040188" cy="639762"/>
+            <a:off x="457200" y="1151335"/>
+            <a:ext cx="4040188" cy="479822"/>
           </a:xfrm>
         </p:spPr>
         <p:txBody>
@@ -1693,71 +1777,71 @@
           <a:lstStyle>
             <a:lvl1pPr marL="0" indent="0">
               <a:buNone/>
-              <a:defRPr sz="2400" b="1">
+              <a:defRPr sz="1800" b="1">
                 <a:solidFill>
                   <a:srgbClr val="111111"/>
                 </a:solidFill>
               </a:defRPr>
             </a:lvl1pPr>
-            <a:lvl2pPr marL="457200" indent="0">
-              <a:buNone/>
-              <a:defRPr sz="2000" b="1">
+            <a:lvl2pPr marL="342900" indent="0">
+              <a:buNone/>
+              <a:defRPr sz="1500" b="1">
                 <a:solidFill>
                   <a:srgbClr val="111111"/>
                 </a:solidFill>
               </a:defRPr>
             </a:lvl2pPr>
-            <a:lvl3pPr marL="914400" indent="0">
-              <a:buNone/>
-              <a:defRPr sz="1800" b="1">
+            <a:lvl3pPr marL="685800" indent="0">
+              <a:buNone/>
+              <a:defRPr sz="1350" b="1">
                 <a:solidFill>
                   <a:srgbClr val="111111"/>
                 </a:solidFill>
               </a:defRPr>
             </a:lvl3pPr>
-            <a:lvl4pPr marL="1371600" indent="0">
-              <a:buNone/>
-              <a:defRPr sz="1600" b="1">
+            <a:lvl4pPr marL="1028700" indent="0">
+              <a:buNone/>
+              <a:defRPr sz="1200" b="1">
                 <a:solidFill>
                   <a:srgbClr val="111111"/>
                 </a:solidFill>
               </a:defRPr>
             </a:lvl4pPr>
-            <a:lvl5pPr marL="1828800" indent="0">
-              <a:buNone/>
-              <a:defRPr sz="1600" b="1">
+            <a:lvl5pPr marL="1371600" indent="0">
+              <a:buNone/>
+              <a:defRPr sz="1200" b="1">
                 <a:solidFill>
                   <a:srgbClr val="111111"/>
                 </a:solidFill>
               </a:defRPr>
             </a:lvl5pPr>
-            <a:lvl6pPr marL="2286000" indent="0">
-              <a:buNone/>
-              <a:defRPr sz="1600" b="1">
+            <a:lvl6pPr marL="1714500" indent="0">
+              <a:buNone/>
+              <a:defRPr sz="1200" b="1">
                 <a:solidFill>
                   <a:srgbClr val="111111"/>
                 </a:solidFill>
               </a:defRPr>
             </a:lvl6pPr>
-            <a:lvl7pPr marL="2743200" indent="0">
-              <a:buNone/>
-              <a:defRPr sz="1600" b="1">
+            <a:lvl7pPr marL="2057400" indent="0">
+              <a:buNone/>
+              <a:defRPr sz="1200" b="1">
                 <a:solidFill>
                   <a:srgbClr val="111111"/>
                 </a:solidFill>
               </a:defRPr>
             </a:lvl7pPr>
-            <a:lvl8pPr marL="3200400" indent="0">
-              <a:buNone/>
-              <a:defRPr sz="1600" b="1">
+            <a:lvl8pPr marL="2400300" indent="0">
+              <a:buNone/>
+              <a:defRPr sz="1200" b="1">
                 <a:solidFill>
                   <a:srgbClr val="111111"/>
                 </a:solidFill>
               </a:defRPr>
             </a:lvl8pPr>
-            <a:lvl9pPr marL="3657600" indent="0">
-              <a:buNone/>
-              <a:defRPr sz="1600" b="1">
+            <a:lvl9pPr marL="2743200" indent="0">
+              <a:buNone/>
+              <a:defRPr sz="1200" b="1">
                 <a:solidFill>
                   <a:srgbClr val="111111"/>
                 </a:solidFill>
@@ -1767,7 +1851,7 @@
           <a:p>
             <a:pPr lvl="0"/>
             <a:r>
-              <a:rPr lang="en-US" smtClean="0">
+              <a:rPr lang="en-US">
                 <a:solidFill>
                   <a:srgbClr val="111111"/>
                 </a:solidFill>
@@ -1789,71 +1873,71 @@
         </p:nvSpPr>
         <p:spPr>
           <a:xfrm>
-            <a:off x="457200" y="2174875"/>
-            <a:ext cx="4040188" cy="3951288"/>
+            <a:off x="457200" y="1631156"/>
+            <a:ext cx="4040188" cy="2963466"/>
           </a:xfrm>
         </p:spPr>
         <p:txBody>
           <a:bodyPr/>
           <a:lstStyle>
             <a:lvl1pPr>
-              <a:defRPr sz="2400">
+              <a:defRPr sz="1800">
                 <a:solidFill>
                   <a:srgbClr val="111111"/>
                 </a:solidFill>
               </a:defRPr>
             </a:lvl1pPr>
             <a:lvl2pPr>
-              <a:defRPr sz="2000">
+              <a:defRPr sz="1500">
                 <a:solidFill>
                   <a:srgbClr val="111111"/>
                 </a:solidFill>
               </a:defRPr>
             </a:lvl2pPr>
             <a:lvl3pPr>
-              <a:defRPr sz="1800">
+              <a:defRPr sz="1350">
                 <a:solidFill>
                   <a:srgbClr val="111111"/>
                 </a:solidFill>
               </a:defRPr>
             </a:lvl3pPr>
             <a:lvl4pPr>
-              <a:defRPr sz="1600">
+              <a:defRPr sz="1200">
                 <a:solidFill>
                   <a:srgbClr val="111111"/>
                 </a:solidFill>
               </a:defRPr>
             </a:lvl4pPr>
             <a:lvl5pPr>
-              <a:defRPr sz="1600">
+              <a:defRPr sz="1200">
                 <a:solidFill>
                   <a:srgbClr val="111111"/>
                 </a:solidFill>
               </a:defRPr>
             </a:lvl5pPr>
             <a:lvl6pPr>
-              <a:defRPr sz="1600">
+              <a:defRPr sz="1200">
                 <a:solidFill>
                   <a:srgbClr val="111111"/>
                 </a:solidFill>
               </a:defRPr>
             </a:lvl6pPr>
             <a:lvl7pPr>
-              <a:defRPr sz="1600">
+              <a:defRPr sz="1200">
                 <a:solidFill>
                   <a:srgbClr val="111111"/>
                 </a:solidFill>
               </a:defRPr>
             </a:lvl7pPr>
             <a:lvl8pPr>
-              <a:defRPr sz="1600">
+              <a:defRPr sz="1200">
                 <a:solidFill>
                   <a:srgbClr val="111111"/>
                 </a:solidFill>
               </a:defRPr>
             </a:lvl8pPr>
             <a:lvl9pPr>
-              <a:defRPr sz="1600">
+              <a:defRPr sz="1200">
                 <a:solidFill>
                   <a:srgbClr val="111111"/>
                 </a:solidFill>
@@ -1863,7 +1947,7 @@
           <a:p>
             <a:pPr lvl="0"/>
             <a:r>
-              <a:rPr lang="en-US" smtClean="0">
+              <a:rPr lang="en-US">
                 <a:solidFill>
                   <a:srgbClr val="111111"/>
                 </a:solidFill>
@@ -1874,7 +1958,7 @@
           <a:p>
             <a:pPr lvl="1"/>
             <a:r>
-              <a:rPr lang="en-US" smtClean="0">
+              <a:rPr lang="en-US">
                 <a:solidFill>
                   <a:srgbClr val="111111"/>
                 </a:solidFill>
@@ -1885,7 +1969,7 @@
           <a:p>
             <a:pPr lvl="2"/>
             <a:r>
-              <a:rPr lang="en-US" smtClean="0">
+              <a:rPr lang="en-US">
                 <a:solidFill>
                   <a:srgbClr val="111111"/>
                 </a:solidFill>
@@ -1896,7 +1980,7 @@
           <a:p>
             <a:pPr lvl="3"/>
             <a:r>
-              <a:rPr lang="en-US" smtClean="0">
+              <a:rPr lang="en-US">
                 <a:solidFill>
                   <a:srgbClr val="111111"/>
                 </a:solidFill>
@@ -1907,14 +1991,13 @@
           <a:p>
             <a:pPr lvl="4"/>
             <a:r>
-              <a:rPr lang="en-US" smtClean="0">
+              <a:rPr lang="en-US">
                 <a:solidFill>
                   <a:srgbClr val="111111"/>
                 </a:solidFill>
               </a:rPr>
               <a:t>Fifth level</a:t>
             </a:r>
-            <a:endParaRPr lang="en-US"/>
           </a:p>
         </p:txBody>
       </p:sp>
@@ -1930,8 +2013,8 @@
         </p:nvSpPr>
         <p:spPr>
           <a:xfrm>
-            <a:off x="4645025" y="1535113"/>
-            <a:ext cx="4041775" cy="639762"/>
+            <a:off x="4645026" y="1151335"/>
+            <a:ext cx="4041775" cy="479822"/>
           </a:xfrm>
         </p:spPr>
         <p:txBody>
@@ -1939,71 +2022,71 @@
           <a:lstStyle>
             <a:lvl1pPr marL="0" indent="0">
               <a:buNone/>
-              <a:defRPr sz="2400" b="1">
+              <a:defRPr sz="1800" b="1">
                 <a:solidFill>
                   <a:srgbClr val="111111"/>
                 </a:solidFill>
               </a:defRPr>
             </a:lvl1pPr>
-            <a:lvl2pPr marL="457200" indent="0">
-              <a:buNone/>
-              <a:defRPr sz="2000" b="1">
+            <a:lvl2pPr marL="342900" indent="0">
+              <a:buNone/>
+              <a:defRPr sz="1500" b="1">
                 <a:solidFill>
                   <a:srgbClr val="111111"/>
                 </a:solidFill>
               </a:defRPr>
             </a:lvl2pPr>
-            <a:lvl3pPr marL="914400" indent="0">
-              <a:buNone/>
-              <a:defRPr sz="1800" b="1">
+            <a:lvl3pPr marL="685800" indent="0">
+              <a:buNone/>
+              <a:defRPr sz="1350" b="1">
                 <a:solidFill>
                   <a:srgbClr val="111111"/>
                 </a:solidFill>
               </a:defRPr>
             </a:lvl3pPr>
-            <a:lvl4pPr marL="1371600" indent="0">
-              <a:buNone/>
-              <a:defRPr sz="1600" b="1">
+            <a:lvl4pPr marL="1028700" indent="0">
+              <a:buNone/>
+              <a:defRPr sz="1200" b="1">
                 <a:solidFill>
                   <a:srgbClr val="111111"/>
                 </a:solidFill>
               </a:defRPr>
             </a:lvl4pPr>
-            <a:lvl5pPr marL="1828800" indent="0">
-              <a:buNone/>
-              <a:defRPr sz="1600" b="1">
+            <a:lvl5pPr marL="1371600" indent="0">
+              <a:buNone/>
+              <a:defRPr sz="1200" b="1">
                 <a:solidFill>
                   <a:srgbClr val="111111"/>
                 </a:solidFill>
               </a:defRPr>
             </a:lvl5pPr>
-            <a:lvl6pPr marL="2286000" indent="0">
-              <a:buNone/>
-              <a:defRPr sz="1600" b="1">
+            <a:lvl6pPr marL="1714500" indent="0">
+              <a:buNone/>
+              <a:defRPr sz="1200" b="1">
                 <a:solidFill>
                   <a:srgbClr val="111111"/>
                 </a:solidFill>
               </a:defRPr>
             </a:lvl6pPr>
-            <a:lvl7pPr marL="2743200" indent="0">
-              <a:buNone/>
-              <a:defRPr sz="1600" b="1">
+            <a:lvl7pPr marL="2057400" indent="0">
+              <a:buNone/>
+              <a:defRPr sz="1200" b="1">
                 <a:solidFill>
                   <a:srgbClr val="111111"/>
                 </a:solidFill>
               </a:defRPr>
             </a:lvl7pPr>
-            <a:lvl8pPr marL="3200400" indent="0">
-              <a:buNone/>
-              <a:defRPr sz="1600" b="1">
+            <a:lvl8pPr marL="2400300" indent="0">
+              <a:buNone/>
+              <a:defRPr sz="1200" b="1">
                 <a:solidFill>
                   <a:srgbClr val="111111"/>
                 </a:solidFill>
               </a:defRPr>
             </a:lvl8pPr>
-            <a:lvl9pPr marL="3657600" indent="0">
-              <a:buNone/>
-              <a:defRPr sz="1600" b="1">
+            <a:lvl9pPr marL="2743200" indent="0">
+              <a:buNone/>
+              <a:defRPr sz="1200" b="1">
                 <a:solidFill>
                   <a:srgbClr val="111111"/>
                 </a:solidFill>
@@ -2013,7 +2096,7 @@
           <a:p>
             <a:pPr lvl="0"/>
             <a:r>
-              <a:rPr lang="en-US" smtClean="0">
+              <a:rPr lang="en-US">
                 <a:solidFill>
                   <a:srgbClr val="111111"/>
                 </a:solidFill>
@@ -2035,71 +2118,71 @@
         </p:nvSpPr>
         <p:spPr>
           <a:xfrm>
-            <a:off x="4645025" y="2174875"/>
-            <a:ext cx="4041775" cy="3951288"/>
+            <a:off x="4645026" y="1631156"/>
+            <a:ext cx="4041775" cy="2963466"/>
           </a:xfrm>
         </p:spPr>
         <p:txBody>
           <a:bodyPr/>
           <a:lstStyle>
             <a:lvl1pPr>
-              <a:defRPr sz="2400">
+              <a:defRPr sz="1800">
                 <a:solidFill>
                   <a:srgbClr val="111111"/>
                 </a:solidFill>
               </a:defRPr>
             </a:lvl1pPr>
             <a:lvl2pPr>
-              <a:defRPr sz="2000">
+              <a:defRPr sz="1500">
                 <a:solidFill>
                   <a:srgbClr val="111111"/>
                 </a:solidFill>
               </a:defRPr>
             </a:lvl2pPr>
             <a:lvl3pPr>
-              <a:defRPr sz="1800">
+              <a:defRPr sz="1350">
                 <a:solidFill>
                   <a:srgbClr val="111111"/>
                 </a:solidFill>
               </a:defRPr>
             </a:lvl3pPr>
             <a:lvl4pPr>
-              <a:defRPr sz="1600">
+              <a:defRPr sz="1200">
                 <a:solidFill>
                   <a:srgbClr val="111111"/>
                 </a:solidFill>
               </a:defRPr>
             </a:lvl4pPr>
             <a:lvl5pPr>
-              <a:defRPr sz="1600">
+              <a:defRPr sz="1200">
                 <a:solidFill>
                   <a:srgbClr val="111111"/>
                 </a:solidFill>
               </a:defRPr>
             </a:lvl5pPr>
             <a:lvl6pPr>
-              <a:defRPr sz="1600">
+              <a:defRPr sz="1200">
                 <a:solidFill>
                   <a:srgbClr val="111111"/>
                 </a:solidFill>
               </a:defRPr>
             </a:lvl6pPr>
             <a:lvl7pPr>
-              <a:defRPr sz="1600">
+              <a:defRPr sz="1200">
                 <a:solidFill>
                   <a:srgbClr val="111111"/>
                 </a:solidFill>
               </a:defRPr>
             </a:lvl7pPr>
             <a:lvl8pPr>
-              <a:defRPr sz="1600">
+              <a:defRPr sz="1200">
                 <a:solidFill>
                   <a:srgbClr val="111111"/>
                 </a:solidFill>
               </a:defRPr>
             </a:lvl8pPr>
             <a:lvl9pPr>
-              <a:defRPr sz="1600">
+              <a:defRPr sz="1200">
                 <a:solidFill>
                   <a:srgbClr val="111111"/>
                 </a:solidFill>
@@ -2109,69 +2192,99 @@
           <a:p>
             <a:pPr lvl="0"/>
             <a:r>
+              <a:rPr lang="en-US">
+                <a:solidFill>
+                  <a:srgbClr val="111111"/>
+                </a:solidFill>
+              </a:rPr>
+              <a:t>Click to edit Master text styles</a:t>
+            </a:r>
+          </a:p>
+          <a:p>
+            <a:pPr lvl="1"/>
+            <a:r>
+              <a:rPr lang="en-US">
+                <a:solidFill>
+                  <a:srgbClr val="111111"/>
+                </a:solidFill>
+              </a:rPr>
+              <a:t>Second level</a:t>
+            </a:r>
+          </a:p>
+          <a:p>
+            <a:pPr lvl="2"/>
+            <a:r>
+              <a:rPr lang="en-US">
+                <a:solidFill>
+                  <a:srgbClr val="111111"/>
+                </a:solidFill>
+              </a:rPr>
+              <a:t>Third level</a:t>
+            </a:r>
+          </a:p>
+          <a:p>
+            <a:pPr lvl="3"/>
+            <a:r>
+              <a:rPr lang="en-US">
+                <a:solidFill>
+                  <a:srgbClr val="111111"/>
+                </a:solidFill>
+              </a:rPr>
+              <a:t>Fourth level</a:t>
+            </a:r>
+          </a:p>
+          <a:p>
+            <a:pPr lvl="4"/>
+            <a:r>
+              <a:rPr lang="en-US">
+                <a:solidFill>
+                  <a:srgbClr val="111111"/>
+                </a:solidFill>
+              </a:rPr>
+              <a:t>Fifth level</a:t>
+            </a:r>
+          </a:p>
+        </p:txBody>
+      </p:sp>
+      <p:sp>
+        <p:nvSpPr>
+          <p:cNvPr id="7" name="Date Placeholder 6"/>
+          <p:cNvSpPr>
+            <a:spLocks noGrp="1"/>
+          </p:cNvSpPr>
+          <p:nvPr>
+            <p:ph type="dt" sz="half" idx="10"/>
+          </p:nvPr>
+        </p:nvSpPr>
+        <p:spPr/>
+        <p:txBody>
+          <a:bodyPr/>
+          <a:lstStyle/>
+          <a:p>
+            <a:fld id="{241EB5C9-1307-BA42-ABA2-0BC069CD8E7F}" type="datetimeFigureOut">
               <a:rPr lang="en-US" smtClean="0">
                 <a:solidFill>
                   <a:srgbClr val="111111"/>
                 </a:solidFill>
               </a:rPr>
-              <a:t>Click to edit Master text styles</a:t>
-            </a:r>
-          </a:p>
-          <a:p>
-            <a:pPr lvl="1"/>
-            <a:r>
-              <a:rPr lang="en-US" smtClean="0">
-                <a:solidFill>
-                  <a:srgbClr val="111111"/>
-                </a:solidFill>
-              </a:rPr>
-              <a:t>Second level</a:t>
-            </a:r>
-          </a:p>
-          <a:p>
-            <a:pPr lvl="2"/>
-            <a:r>
-              <a:rPr lang="en-US" smtClean="0">
-                <a:solidFill>
-                  <a:srgbClr val="111111"/>
-                </a:solidFill>
-              </a:rPr>
-              <a:t>Third level</a:t>
-            </a:r>
-          </a:p>
-          <a:p>
-            <a:pPr lvl="3"/>
-            <a:r>
-              <a:rPr lang="en-US" smtClean="0">
-                <a:solidFill>
-                  <a:srgbClr val="111111"/>
-                </a:solidFill>
-              </a:rPr>
-              <a:t>Fourth level</a:t>
-            </a:r>
-          </a:p>
-          <a:p>
-            <a:pPr lvl="4"/>
-            <a:r>
-              <a:rPr lang="en-US" smtClean="0">
-                <a:solidFill>
-                  <a:srgbClr val="111111"/>
-                </a:solidFill>
-              </a:rPr>
-              <a:t>Fifth level</a:t>
-            </a:r>
-            <a:endParaRPr lang="en-US"/>
-          </a:p>
-        </p:txBody>
-      </p:sp>
-      <p:sp>
-        <p:nvSpPr>
-          <p:cNvPr id="7" name="Date Placeholder 6"/>
-          <p:cNvSpPr>
-            <a:spLocks noGrp="1"/>
-          </p:cNvSpPr>
-          <p:nvPr>
-            <p:ph type="dt" sz="half" idx="10"/>
+              <a:t>1/2/22</a:t>
+            </a:fld>
+            <a:endParaRPr lang="en-US">
+              <a:solidFill>
+                <a:srgbClr val="111111"/>
+              </a:solidFill>
+            </a:endParaRPr>
+          </a:p>
+        </p:txBody>
+      </p:sp>
+      <p:sp>
+        <p:nvSpPr>
+          <p:cNvPr id="8" name="Footer Placeholder 7"/>
+          <p:cNvSpPr>
+            <a:spLocks noGrp="1"/>
+          </p:cNvSpPr>
+          <p:nvPr>
+            <p:ph type="ftr" sz="quarter" idx="11"/>
           </p:nvPr>
         </p:nvSpPr>
         <p:spPr/>
@@ -2179,26 +2292,22 @@
           <a:bodyPr/>
           <a:lstStyle/>
           <a:p>
-            <a:fld id="{5BCAD085-E8A6-8845-BD4E-CB4CCA059FC4}" type="datetimeFigureOut">
-              <a:rPr lang="en-US" smtClean="0">
-                <a:solidFill>
-                  <a:srgbClr val="111111"/>
-                </a:solidFill>
-              </a:rPr>
-              <a:t>1/27/13</a:t>
-            </a:fld>
-            <a:endParaRPr lang="en-US"/>
-          </a:p>
-        </p:txBody>
-      </p:sp>
-      <p:sp>
-        <p:nvSpPr>
-          <p:cNvPr id="8" name="Footer Placeholder 7"/>
-          <p:cNvSpPr>
-            <a:spLocks noGrp="1"/>
-          </p:cNvSpPr>
-          <p:nvPr>
-            <p:ph type="ftr" sz="quarter" idx="11"/>
+            <a:endParaRPr lang="en-US">
+              <a:solidFill>
+                <a:srgbClr val="111111"/>
+              </a:solidFill>
+            </a:endParaRPr>
+          </a:p>
+        </p:txBody>
+      </p:sp>
+      <p:sp>
+        <p:nvSpPr>
+          <p:cNvPr id="9" name="Slide Number Placeholder 8"/>
+          <p:cNvSpPr>
+            <a:spLocks noGrp="1"/>
+          </p:cNvSpPr>
+          <p:nvPr>
+            <p:ph type="sldNum" sz="quarter" idx="12"/>
           </p:nvPr>
         </p:nvSpPr>
         <p:spPr/>
@@ -2206,26 +2315,7 @@
           <a:bodyPr/>
           <a:lstStyle/>
           <a:p>
-            <a:endParaRPr lang="en-US"/>
-          </a:p>
-        </p:txBody>
-      </p:sp>
-      <p:sp>
-        <p:nvSpPr>
-          <p:cNvPr id="9" name="Slide Number Placeholder 8"/>
-          <p:cNvSpPr>
-            <a:spLocks noGrp="1"/>
-          </p:cNvSpPr>
-          <p:nvPr>
-            <p:ph type="sldNum" sz="quarter" idx="12"/>
-          </p:nvPr>
-        </p:nvSpPr>
-        <p:spPr/>
-        <p:txBody>
-          <a:bodyPr/>
-          <a:lstStyle/>
-          <a:p>
-            <a:fld id="{C1FF6DA9-008F-8B48-92A6-B652298478BF}" type="slidenum">
+            <a:fld id="{C5EF2332-01BF-834F-8236-50238282D533}" type="slidenum">
               <a:rPr lang="en-US" smtClean="0">
                 <a:solidFill>
                   <a:srgbClr val="111111"/>
@@ -2233,14 +2323,18 @@
               </a:rPr>
               <a:t>‹#›</a:t>
             </a:fld>
-            <a:endParaRPr lang="en-US"/>
+            <a:endParaRPr lang="en-US">
+              <a:solidFill>
+                <a:srgbClr val="111111"/>
+              </a:solidFill>
+            </a:endParaRPr>
           </a:p>
         </p:txBody>
       </p:sp>
     </p:spTree>
     <p:extLst>
       <p:ext uri="{BB962C8B-B14F-4D97-AF65-F5344CB8AC3E}">
-        <p14:creationId xmlns:p14="http://schemas.microsoft.com/office/powerpoint/2010/main" val="990158736"/>
+        <p14:creationId xmlns:p14="http://schemas.microsoft.com/office/powerpoint/2010/main" val="2535793967"/>
       </p:ext>
     </p:extLst>
   </p:cSld>
@@ -2283,25 +2377,55 @@
           <a:lstStyle/>
           <a:p>
             <a:r>
+              <a:rPr lang="en-US">
+                <a:solidFill>
+                  <a:srgbClr val="111111"/>
+                </a:solidFill>
+              </a:rPr>
+              <a:t>Click to edit Master title style</a:t>
+            </a:r>
+          </a:p>
+        </p:txBody>
+      </p:sp>
+      <p:sp>
+        <p:nvSpPr>
+          <p:cNvPr id="3" name="Date Placeholder 2"/>
+          <p:cNvSpPr>
+            <a:spLocks noGrp="1"/>
+          </p:cNvSpPr>
+          <p:nvPr>
+            <p:ph type="dt" sz="half" idx="10"/>
+          </p:nvPr>
+        </p:nvSpPr>
+        <p:spPr/>
+        <p:txBody>
+          <a:bodyPr/>
+          <a:lstStyle/>
+          <a:p>
+            <a:fld id="{241EB5C9-1307-BA42-ABA2-0BC069CD8E7F}" type="datetimeFigureOut">
               <a:rPr lang="en-US" smtClean="0">
                 <a:solidFill>
                   <a:srgbClr val="111111"/>
                 </a:solidFill>
               </a:rPr>
-              <a:t>Click to edit Master title style</a:t>
-            </a:r>
-            <a:endParaRPr lang="en-US"/>
-          </a:p>
-        </p:txBody>
-      </p:sp>
-      <p:sp>
-        <p:nvSpPr>
-          <p:cNvPr id="3" name="Date Placeholder 2"/>
-          <p:cNvSpPr>
-            <a:spLocks noGrp="1"/>
-          </p:cNvSpPr>
-          <p:nvPr>
-            <p:ph type="dt" sz="half" idx="10"/>
+              <a:t>1/2/22</a:t>
+            </a:fld>
+            <a:endParaRPr lang="en-US">
+              <a:solidFill>
+                <a:srgbClr val="111111"/>
+              </a:solidFill>
+            </a:endParaRPr>
+          </a:p>
+        </p:txBody>
+      </p:sp>
+      <p:sp>
+        <p:nvSpPr>
+          <p:cNvPr id="4" name="Footer Placeholder 3"/>
+          <p:cNvSpPr>
+            <a:spLocks noGrp="1"/>
+          </p:cNvSpPr>
+          <p:nvPr>
+            <p:ph type="ftr" sz="quarter" idx="11"/>
           </p:nvPr>
         </p:nvSpPr>
         <p:spPr/>
@@ -2309,26 +2433,22 @@
           <a:bodyPr/>
           <a:lstStyle/>
           <a:p>
-            <a:fld id="{5BCAD085-E8A6-8845-BD4E-CB4CCA059FC4}" type="datetimeFigureOut">
-              <a:rPr lang="en-US" smtClean="0">
-                <a:solidFill>
-                  <a:srgbClr val="111111"/>
-                </a:solidFill>
-              </a:rPr>
-              <a:t>1/27/13</a:t>
-            </a:fld>
-            <a:endParaRPr lang="en-US"/>
-          </a:p>
-        </p:txBody>
-      </p:sp>
-      <p:sp>
-        <p:nvSpPr>
-          <p:cNvPr id="4" name="Footer Placeholder 3"/>
-          <p:cNvSpPr>
-            <a:spLocks noGrp="1"/>
-          </p:cNvSpPr>
-          <p:nvPr>
-            <p:ph type="ftr" sz="quarter" idx="11"/>
+            <a:endParaRPr lang="en-US">
+              <a:solidFill>
+                <a:srgbClr val="111111"/>
+              </a:solidFill>
+            </a:endParaRPr>
+          </a:p>
+        </p:txBody>
+      </p:sp>
+      <p:sp>
+        <p:nvSpPr>
+          <p:cNvPr id="5" name="Slide Number Placeholder 4"/>
+          <p:cNvSpPr>
+            <a:spLocks noGrp="1"/>
+          </p:cNvSpPr>
+          <p:nvPr>
+            <p:ph type="sldNum" sz="quarter" idx="12"/>
           </p:nvPr>
         </p:nvSpPr>
         <p:spPr/>
@@ -2336,26 +2456,7 @@
           <a:bodyPr/>
           <a:lstStyle/>
           <a:p>
-            <a:endParaRPr lang="en-US"/>
-          </a:p>
-        </p:txBody>
-      </p:sp>
-      <p:sp>
-        <p:nvSpPr>
-          <p:cNvPr id="5" name="Slide Number Placeholder 4"/>
-          <p:cNvSpPr>
-            <a:spLocks noGrp="1"/>
-          </p:cNvSpPr>
-          <p:nvPr>
-            <p:ph type="sldNum" sz="quarter" idx="12"/>
-          </p:nvPr>
-        </p:nvSpPr>
-        <p:spPr/>
-        <p:txBody>
-          <a:bodyPr/>
-          <a:lstStyle/>
-          <a:p>
-            <a:fld id="{C1FF6DA9-008F-8B48-92A6-B652298478BF}" type="slidenum">
+            <a:fld id="{C5EF2332-01BF-834F-8236-50238282D533}" type="slidenum">
               <a:rPr lang="en-US" smtClean="0">
                 <a:solidFill>
                   <a:srgbClr val="111111"/>
@@ -2363,14 +2464,18 @@
               </a:rPr>
               <a:t>‹#›</a:t>
             </a:fld>
-            <a:endParaRPr lang="en-US"/>
+            <a:endParaRPr lang="en-US">
+              <a:solidFill>
+                <a:srgbClr val="111111"/>
+              </a:solidFill>
+            </a:endParaRPr>
           </a:p>
         </p:txBody>
       </p:sp>
     </p:spTree>
     <p:extLst>
       <p:ext uri="{BB962C8B-B14F-4D97-AF65-F5344CB8AC3E}">
-        <p14:creationId xmlns:p14="http://schemas.microsoft.com/office/powerpoint/2010/main" val="727027711"/>
+        <p14:creationId xmlns:p14="http://schemas.microsoft.com/office/powerpoint/2010/main" val="3472721253"/>
       </p:ext>
     </p:extLst>
   </p:cSld>
@@ -2412,15 +2517,19 @@
           <a:bodyPr/>
           <a:lstStyle/>
           <a:p>
-            <a:fld id="{5BCAD085-E8A6-8845-BD4E-CB4CCA059FC4}" type="datetimeFigureOut">
+            <a:fld id="{241EB5C9-1307-BA42-ABA2-0BC069CD8E7F}" type="datetimeFigureOut">
               <a:rPr lang="en-US" smtClean="0">
                 <a:solidFill>
                   <a:srgbClr val="111111"/>
                 </a:solidFill>
               </a:rPr>
-              <a:t>1/27/13</a:t>
+              <a:t>1/2/22</a:t>
             </a:fld>
-            <a:endParaRPr lang="en-US"/>
+            <a:endParaRPr lang="en-US">
+              <a:solidFill>
+                <a:srgbClr val="111111"/>
+              </a:solidFill>
+            </a:endParaRPr>
           </a:p>
         </p:txBody>
       </p:sp>
@@ -2439,7 +2548,11 @@
           <a:bodyPr/>
           <a:lstStyle/>
           <a:p>
-            <a:endParaRPr lang="en-US"/>
+            <a:endParaRPr lang="en-US">
+              <a:solidFill>
+                <a:srgbClr val="111111"/>
+              </a:solidFill>
+            </a:endParaRPr>
           </a:p>
         </p:txBody>
       </p:sp>
@@ -2458,7 +2571,7 @@
           <a:bodyPr/>
           <a:lstStyle/>
           <a:p>
-            <a:fld id="{C1FF6DA9-008F-8B48-92A6-B652298478BF}" type="slidenum">
+            <a:fld id="{C5EF2332-01BF-834F-8236-50238282D533}" type="slidenum">
               <a:rPr lang="en-US" smtClean="0">
                 <a:solidFill>
                   <a:srgbClr val="111111"/>
@@ -2466,14 +2579,18 @@
               </a:rPr>
               <a:t>‹#›</a:t>
             </a:fld>
-            <a:endParaRPr lang="en-US"/>
+            <a:endParaRPr lang="en-US">
+              <a:solidFill>
+                <a:srgbClr val="111111"/>
+              </a:solidFill>
+            </a:endParaRPr>
           </a:p>
         </p:txBody>
       </p:sp>
     </p:spTree>
     <p:extLst>
       <p:ext uri="{BB962C8B-B14F-4D97-AF65-F5344CB8AC3E}">
-        <p14:creationId xmlns:p14="http://schemas.microsoft.com/office/powerpoint/2010/main" val="1212999818"/>
+        <p14:creationId xmlns:p14="http://schemas.microsoft.com/office/powerpoint/2010/main" val="2130901097"/>
       </p:ext>
     </p:extLst>
   </p:cSld>
@@ -2512,15 +2629,15 @@
         </p:nvSpPr>
         <p:spPr>
           <a:xfrm>
-            <a:off x="457200" y="273050"/>
-            <a:ext cx="3008313" cy="1162050"/>
+            <a:off x="457201" y="204787"/>
+            <a:ext cx="3008313" cy="871538"/>
           </a:xfrm>
         </p:spPr>
         <p:txBody>
           <a:bodyPr anchor="b"/>
           <a:lstStyle>
             <a:lvl1pPr algn="l">
-              <a:defRPr sz="2000" b="1">
+              <a:defRPr sz="1500" b="1">
                 <a:solidFill>
                   <a:srgbClr val="111111"/>
                 </a:solidFill>
@@ -2529,14 +2646,13 @@
           </a:lstStyle>
           <a:p>
             <a:r>
-              <a:rPr lang="en-US" smtClean="0">
+              <a:rPr lang="en-US">
                 <a:solidFill>
                   <a:srgbClr val="111111"/>
                 </a:solidFill>
               </a:rPr>
               <a:t>Click to edit Master title style</a:t>
             </a:r>
-            <a:endParaRPr lang="en-US"/>
           </a:p>
         </p:txBody>
       </p:sp>
@@ -2552,71 +2668,71 @@
         </p:nvSpPr>
         <p:spPr>
           <a:xfrm>
-            <a:off x="3575050" y="273050"/>
-            <a:ext cx="5111750" cy="5853113"/>
+            <a:off x="3575050" y="204788"/>
+            <a:ext cx="5111750" cy="4389835"/>
           </a:xfrm>
         </p:spPr>
         <p:txBody>
           <a:bodyPr/>
           <a:lstStyle>
             <a:lvl1pPr>
-              <a:defRPr sz="3200">
+              <a:defRPr sz="2400">
                 <a:solidFill>
                   <a:srgbClr val="111111"/>
                 </a:solidFill>
               </a:defRPr>
             </a:lvl1pPr>
             <a:lvl2pPr>
-              <a:defRPr sz="2800">
+              <a:defRPr sz="2100">
                 <a:solidFill>
                   <a:srgbClr val="111111"/>
                 </a:solidFill>
               </a:defRPr>
             </a:lvl2pPr>
             <a:lvl3pPr>
-              <a:defRPr sz="2400">
+              <a:defRPr sz="1800">
                 <a:solidFill>
                   <a:srgbClr val="111111"/>
                 </a:solidFill>
               </a:defRPr>
             </a:lvl3pPr>
             <a:lvl4pPr>
-              <a:defRPr sz="2000">
+              <a:defRPr sz="1500">
                 <a:solidFill>
                   <a:srgbClr val="111111"/>
                 </a:solidFill>
               </a:defRPr>
             </a:lvl4pPr>
             <a:lvl5pPr>
-              <a:defRPr sz="2000">
+              <a:defRPr sz="1500">
                 <a:solidFill>
                   <a:srgbClr val="111111"/>
                 </a:solidFill>
               </a:defRPr>
             </a:lvl5pPr>
             <a:lvl6pPr>
-              <a:defRPr sz="2000">
+              <a:defRPr sz="1500">
                 <a:solidFill>
                   <a:srgbClr val="111111"/>
                 </a:solidFill>
               </a:defRPr>
             </a:lvl6pPr>
             <a:lvl7pPr>
-              <a:defRPr sz="2000">
+              <a:defRPr sz="1500">
                 <a:solidFill>
                   <a:srgbClr val="111111"/>
                 </a:solidFill>
               </a:defRPr>
             </a:lvl7pPr>
             <a:lvl8pPr>
-              <a:defRPr sz="2000">
+              <a:defRPr sz="1500">
                 <a:solidFill>
                   <a:srgbClr val="111111"/>
                 </a:solidFill>
               </a:defRPr>
             </a:lvl8pPr>
             <a:lvl9pPr>
-              <a:defRPr sz="2000">
+              <a:defRPr sz="1500">
                 <a:solidFill>
                   <a:srgbClr val="111111"/>
                 </a:solidFill>
@@ -2626,7 +2742,7 @@
           <a:p>
             <a:pPr lvl="0"/>
             <a:r>
-              <a:rPr lang="en-US" smtClean="0">
+              <a:rPr lang="en-US">
                 <a:solidFill>
                   <a:srgbClr val="111111"/>
                 </a:solidFill>
@@ -2637,7 +2753,7 @@
           <a:p>
             <a:pPr lvl="1"/>
             <a:r>
-              <a:rPr lang="en-US" smtClean="0">
+              <a:rPr lang="en-US">
                 <a:solidFill>
                   <a:srgbClr val="111111"/>
                 </a:solidFill>
@@ -2648,7 +2764,7 @@
           <a:p>
             <a:pPr lvl="2"/>
             <a:r>
-              <a:rPr lang="en-US" smtClean="0">
+              <a:rPr lang="en-US">
                 <a:solidFill>
                   <a:srgbClr val="111111"/>
                 </a:solidFill>
@@ -2659,7 +2775,7 @@
           <a:p>
             <a:pPr lvl="3"/>
             <a:r>
-              <a:rPr lang="en-US" smtClean="0">
+              <a:rPr lang="en-US">
                 <a:solidFill>
                   <a:srgbClr val="111111"/>
                 </a:solidFill>
@@ -2670,14 +2786,13 @@
           <a:p>
             <a:pPr lvl="4"/>
             <a:r>
-              <a:rPr lang="en-US" smtClean="0">
+              <a:rPr lang="en-US">
                 <a:solidFill>
                   <a:srgbClr val="111111"/>
                 </a:solidFill>
               </a:rPr>
               <a:t>Fifth level</a:t>
             </a:r>
-            <a:endParaRPr lang="en-US"/>
           </a:p>
         </p:txBody>
       </p:sp>
@@ -2693,8 +2808,8 @@
         </p:nvSpPr>
         <p:spPr>
           <a:xfrm>
-            <a:off x="457200" y="1435100"/>
-            <a:ext cx="3008313" cy="4691063"/>
+            <a:off x="457201" y="1076326"/>
+            <a:ext cx="3008313" cy="3518297"/>
           </a:xfrm>
         </p:spPr>
         <p:txBody>
@@ -2702,71 +2817,71 @@
           <a:lstStyle>
             <a:lvl1pPr marL="0" indent="0">
               <a:buNone/>
-              <a:defRPr sz="1400">
+              <a:defRPr sz="1050">
                 <a:solidFill>
                   <a:srgbClr val="111111"/>
                 </a:solidFill>
               </a:defRPr>
             </a:lvl1pPr>
-            <a:lvl2pPr marL="457200" indent="0">
-              <a:buNone/>
-              <a:defRPr sz="1200">
+            <a:lvl2pPr marL="342900" indent="0">
+              <a:buNone/>
+              <a:defRPr sz="900">
                 <a:solidFill>
                   <a:srgbClr val="111111"/>
                 </a:solidFill>
               </a:defRPr>
             </a:lvl2pPr>
-            <a:lvl3pPr marL="914400" indent="0">
-              <a:buNone/>
-              <a:defRPr sz="1000">
+            <a:lvl3pPr marL="685800" indent="0">
+              <a:buNone/>
+              <a:defRPr sz="750">
                 <a:solidFill>
                   <a:srgbClr val="111111"/>
                 </a:solidFill>
               </a:defRPr>
             </a:lvl3pPr>
-            <a:lvl4pPr marL="1371600" indent="0">
-              <a:buNone/>
-              <a:defRPr sz="900">
+            <a:lvl4pPr marL="1028700" indent="0">
+              <a:buNone/>
+              <a:defRPr sz="675">
                 <a:solidFill>
                   <a:srgbClr val="111111"/>
                 </a:solidFill>
               </a:defRPr>
             </a:lvl4pPr>
-            <a:lvl5pPr marL="1828800" indent="0">
-              <a:buNone/>
-              <a:defRPr sz="900">
+            <a:lvl5pPr marL="1371600" indent="0">
+              <a:buNone/>
+              <a:defRPr sz="675">
                 <a:solidFill>
                   <a:srgbClr val="111111"/>
                 </a:solidFill>
               </a:defRPr>
             </a:lvl5pPr>
-            <a:lvl6pPr marL="2286000" indent="0">
-              <a:buNone/>
-              <a:defRPr sz="900">
+            <a:lvl6pPr marL="1714500" indent="0">
+              <a:buNone/>
+              <a:defRPr sz="675">
                 <a:solidFill>
                   <a:srgbClr val="111111"/>
                 </a:solidFill>
               </a:defRPr>
             </a:lvl6pPr>
-            <a:lvl7pPr marL="2743200" indent="0">
-              <a:buNone/>
-              <a:defRPr sz="900">
+            <a:lvl7pPr marL="2057400" indent="0">
+              <a:buNone/>
+              <a:defRPr sz="675">
                 <a:solidFill>
                   <a:srgbClr val="111111"/>
                 </a:solidFill>
               </a:defRPr>
             </a:lvl7pPr>
-            <a:lvl8pPr marL="3200400" indent="0">
-              <a:buNone/>
-              <a:defRPr sz="900">
+            <a:lvl8pPr marL="2400300" indent="0">
+              <a:buNone/>
+              <a:defRPr sz="675">
                 <a:solidFill>
                   <a:srgbClr val="111111"/>
                 </a:solidFill>
               </a:defRPr>
             </a:lvl8pPr>
-            <a:lvl9pPr marL="3657600" indent="0">
-              <a:buNone/>
-              <a:defRPr sz="900">
+            <a:lvl9pPr marL="2743200" indent="0">
+              <a:buNone/>
+              <a:defRPr sz="675">
                 <a:solidFill>
                   <a:srgbClr val="111111"/>
                 </a:solidFill>
@@ -2776,24 +2891,55 @@
           <a:p>
             <a:pPr lvl="0"/>
             <a:r>
+              <a:rPr lang="en-US">
+                <a:solidFill>
+                  <a:srgbClr val="111111"/>
+                </a:solidFill>
+              </a:rPr>
+              <a:t>Click to edit Master text styles</a:t>
+            </a:r>
+          </a:p>
+        </p:txBody>
+      </p:sp>
+      <p:sp>
+        <p:nvSpPr>
+          <p:cNvPr id="5" name="Date Placeholder 4"/>
+          <p:cNvSpPr>
+            <a:spLocks noGrp="1"/>
+          </p:cNvSpPr>
+          <p:nvPr>
+            <p:ph type="dt" sz="half" idx="10"/>
+          </p:nvPr>
+        </p:nvSpPr>
+        <p:spPr/>
+        <p:txBody>
+          <a:bodyPr/>
+          <a:lstStyle/>
+          <a:p>
+            <a:fld id="{241EB5C9-1307-BA42-ABA2-0BC069CD8E7F}" type="datetimeFigureOut">
               <a:rPr lang="en-US" smtClean="0">
                 <a:solidFill>
                   <a:srgbClr val="111111"/>
                 </a:solidFill>
               </a:rPr>
-              <a:t>Click to edit Master text styles</a:t>
-            </a:r>
-          </a:p>
-        </p:txBody>
-      </p:sp>
-      <p:sp>
-        <p:nvSpPr>
-          <p:cNvPr id="5" name="Date Placeholder 4"/>
-          <p:cNvSpPr>
-            <a:spLocks noGrp="1"/>
-          </p:cNvSpPr>
-          <p:nvPr>
-            <p:ph type="dt" sz="half" idx="10"/>
+              <a:t>1/2/22</a:t>
+            </a:fld>
+            <a:endParaRPr lang="en-US">
+              <a:solidFill>
+                <a:srgbClr val="111111"/>
+              </a:solidFill>
+            </a:endParaRPr>
+          </a:p>
+        </p:txBody>
+      </p:sp>
+      <p:sp>
+        <p:nvSpPr>
+          <p:cNvPr id="6" name="Footer Placeholder 5"/>
+          <p:cNvSpPr>
+            <a:spLocks noGrp="1"/>
+          </p:cNvSpPr>
+          <p:nvPr>
+            <p:ph type="ftr" sz="quarter" idx="11"/>
           </p:nvPr>
         </p:nvSpPr>
         <p:spPr/>
@@ -2801,26 +2947,22 @@
           <a:bodyPr/>
           <a:lstStyle/>
           <a:p>
-            <a:fld id="{5BCAD085-E8A6-8845-BD4E-CB4CCA059FC4}" type="datetimeFigureOut">
-              <a:rPr lang="en-US" smtClean="0">
-                <a:solidFill>
-                  <a:srgbClr val="111111"/>
-                </a:solidFill>
-              </a:rPr>
-              <a:t>1/27/13</a:t>
-            </a:fld>
-            <a:endParaRPr lang="en-US"/>
-          </a:p>
-        </p:txBody>
-      </p:sp>
-      <p:sp>
-        <p:nvSpPr>
-          <p:cNvPr id="6" name="Footer Placeholder 5"/>
-          <p:cNvSpPr>
-            <a:spLocks noGrp="1"/>
-          </p:cNvSpPr>
-          <p:nvPr>
-            <p:ph type="ftr" sz="quarter" idx="11"/>
+            <a:endParaRPr lang="en-US">
+              <a:solidFill>
+                <a:srgbClr val="111111"/>
+              </a:solidFill>
+            </a:endParaRPr>
+          </a:p>
+        </p:txBody>
+      </p:sp>
+      <p:sp>
+        <p:nvSpPr>
+          <p:cNvPr id="7" name="Slide Number Placeholder 6"/>
+          <p:cNvSpPr>
+            <a:spLocks noGrp="1"/>
+          </p:cNvSpPr>
+          <p:nvPr>
+            <p:ph type="sldNum" sz="quarter" idx="12"/>
           </p:nvPr>
         </p:nvSpPr>
         <p:spPr/>
@@ -2828,26 +2970,7 @@
           <a:bodyPr/>
           <a:lstStyle/>
           <a:p>
-            <a:endParaRPr lang="en-US"/>
-          </a:p>
-        </p:txBody>
-      </p:sp>
-      <p:sp>
-        <p:nvSpPr>
-          <p:cNvPr id="7" name="Slide Number Placeholder 6"/>
-          <p:cNvSpPr>
-            <a:spLocks noGrp="1"/>
-          </p:cNvSpPr>
-          <p:nvPr>
-            <p:ph type="sldNum" sz="quarter" idx="12"/>
-          </p:nvPr>
-        </p:nvSpPr>
-        <p:spPr/>
-        <p:txBody>
-          <a:bodyPr/>
-          <a:lstStyle/>
-          <a:p>
-            <a:fld id="{C1FF6DA9-008F-8B48-92A6-B652298478BF}" type="slidenum">
+            <a:fld id="{C5EF2332-01BF-834F-8236-50238282D533}" type="slidenum">
               <a:rPr lang="en-US" smtClean="0">
                 <a:solidFill>
                   <a:srgbClr val="111111"/>
@@ -2855,14 +2978,18 @@
               </a:rPr>
               <a:t>‹#›</a:t>
             </a:fld>
-            <a:endParaRPr lang="en-US"/>
+            <a:endParaRPr lang="en-US">
+              <a:solidFill>
+                <a:srgbClr val="111111"/>
+              </a:solidFill>
+            </a:endParaRPr>
           </a:p>
         </p:txBody>
       </p:sp>
     </p:spTree>
     <p:extLst>
       <p:ext uri="{BB962C8B-B14F-4D97-AF65-F5344CB8AC3E}">
-        <p14:creationId xmlns:p14="http://schemas.microsoft.com/office/powerpoint/2010/main" val="1840726560"/>
+        <p14:creationId xmlns:p14="http://schemas.microsoft.com/office/powerpoint/2010/main" val="3540895647"/>
       </p:ext>
     </p:extLst>
   </p:cSld>
@@ -2901,15 +3028,15 @@
         </p:nvSpPr>
         <p:spPr>
           <a:xfrm>
-            <a:off x="1792288" y="4800600"/>
-            <a:ext cx="5486400" cy="566738"/>
+            <a:off x="1792288" y="3600450"/>
+            <a:ext cx="5486400" cy="425054"/>
           </a:xfrm>
         </p:spPr>
         <p:txBody>
           <a:bodyPr anchor="b"/>
           <a:lstStyle>
             <a:lvl1pPr algn="l">
-              <a:defRPr sz="2000" b="1">
+              <a:defRPr sz="1500" b="1">
                 <a:solidFill>
                   <a:srgbClr val="111111"/>
                 </a:solidFill>
@@ -2918,14 +3045,13 @@
           </a:lstStyle>
           <a:p>
             <a:r>
-              <a:rPr lang="en-US" smtClean="0">
+              <a:rPr lang="en-US">
                 <a:solidFill>
                   <a:srgbClr val="111111"/>
                 </a:solidFill>
               </a:rPr>
               <a:t>Click to edit Master title style</a:t>
             </a:r>
-            <a:endParaRPr lang="en-US"/>
           </a:p>
         </p:txBody>
       </p:sp>
@@ -2941,8 +3067,8 @@
         </p:nvSpPr>
         <p:spPr>
           <a:xfrm>
-            <a:off x="1792288" y="612775"/>
-            <a:ext cx="5486400" cy="4114800"/>
+            <a:off x="1792288" y="459581"/>
+            <a:ext cx="5486400" cy="3086100"/>
           </a:xfrm>
         </p:spPr>
         <p:txBody>
@@ -2950,71 +3076,71 @@
           <a:lstStyle>
             <a:lvl1pPr marL="0" indent="0">
               <a:buNone/>
-              <a:defRPr sz="3200">
+              <a:defRPr sz="2400">
                 <a:solidFill>
                   <a:srgbClr val="111111"/>
                 </a:solidFill>
               </a:defRPr>
             </a:lvl1pPr>
-            <a:lvl2pPr marL="457200" indent="0">
-              <a:buNone/>
-              <a:defRPr sz="2800">
+            <a:lvl2pPr marL="342900" indent="0">
+              <a:buNone/>
+              <a:defRPr sz="2100">
                 <a:solidFill>
                   <a:srgbClr val="111111"/>
                 </a:solidFill>
               </a:defRPr>
             </a:lvl2pPr>
-            <a:lvl3pPr marL="914400" indent="0">
-              <a:buNone/>
-              <a:defRPr sz="2400">
+            <a:lvl3pPr marL="685800" indent="0">
+              <a:buNone/>
+              <a:defRPr sz="1800">
                 <a:solidFill>
                   <a:srgbClr val="111111"/>
                 </a:solidFill>
               </a:defRPr>
             </a:lvl3pPr>
-            <a:lvl4pPr marL="1371600" indent="0">
-              <a:buNone/>
-              <a:defRPr sz="2000">
+            <a:lvl4pPr marL="1028700" indent="0">
+              <a:buNone/>
+              <a:defRPr sz="1500">
                 <a:solidFill>
                   <a:srgbClr val="111111"/>
                 </a:solidFill>
               </a:defRPr>
             </a:lvl4pPr>
-            <a:lvl5pPr marL="1828800" indent="0">
-              <a:buNone/>
-              <a:defRPr sz="2000">
+            <a:lvl5pPr marL="1371600" indent="0">
+              <a:buNone/>
+              <a:defRPr sz="1500">
                 <a:solidFill>
                   <a:srgbClr val="111111"/>
                 </a:solidFill>
               </a:defRPr>
             </a:lvl5pPr>
-            <a:lvl6pPr marL="2286000" indent="0">
-              <a:buNone/>
-              <a:defRPr sz="2000">
+            <a:lvl6pPr marL="1714500" indent="0">
+              <a:buNone/>
+              <a:defRPr sz="1500">
                 <a:solidFill>
                   <a:srgbClr val="111111"/>
                 </a:solidFill>
               </a:defRPr>
             </a:lvl6pPr>
-            <a:lvl7pPr marL="2743200" indent="0">
-              <a:buNone/>
-              <a:defRPr sz="2000">
+            <a:lvl7pPr marL="2057400" indent="0">
+              <a:buNone/>
+              <a:defRPr sz="1500">
                 <a:solidFill>
                   <a:srgbClr val="111111"/>
                 </a:solidFill>
               </a:defRPr>
             </a:lvl7pPr>
-            <a:lvl8pPr marL="3200400" indent="0">
-              <a:buNone/>
-              <a:defRPr sz="2000">
+            <a:lvl8pPr marL="2400300" indent="0">
+              <a:buNone/>
+              <a:defRPr sz="1500">
                 <a:solidFill>
                   <a:srgbClr val="111111"/>
                 </a:solidFill>
               </a:defRPr>
             </a:lvl8pPr>
-            <a:lvl9pPr marL="3657600" indent="0">
-              <a:buNone/>
-              <a:defRPr sz="2000">
+            <a:lvl9pPr marL="2743200" indent="0">
+              <a:buNone/>
+              <a:defRPr sz="1500">
                 <a:solidFill>
                   <a:srgbClr val="111111"/>
                 </a:solidFill>
@@ -3022,7 +3148,11 @@
             </a:lvl9pPr>
           </a:lstStyle>
           <a:p>
-            <a:endParaRPr lang="en-US"/>
+            <a:endParaRPr lang="en-US">
+              <a:solidFill>
+                <a:srgbClr val="111111"/>
+              </a:solidFill>
+            </a:endParaRPr>
           </a:p>
         </p:txBody>
       </p:sp>
@@ -3038,8 +3168,8 @@
         </p:nvSpPr>
         <p:spPr>
           <a:xfrm>
-            <a:off x="1792288" y="5367338"/>
-            <a:ext cx="5486400" cy="804862"/>
+            <a:off x="1792288" y="4025503"/>
+            <a:ext cx="5486400" cy="603647"/>
           </a:xfrm>
         </p:spPr>
         <p:txBody>
@@ -3047,71 +3177,71 @@
           <a:lstStyle>
             <a:lvl1pPr marL="0" indent="0">
               <a:buNone/>
-              <a:defRPr sz="1400">
+              <a:defRPr sz="1050">
                 <a:solidFill>
                   <a:srgbClr val="111111"/>
                 </a:solidFill>
               </a:defRPr>
             </a:lvl1pPr>
-            <a:lvl2pPr marL="457200" indent="0">
-              <a:buNone/>
-              <a:defRPr sz="1200">
+            <a:lvl2pPr marL="342900" indent="0">
+              <a:buNone/>
+              <a:defRPr sz="900">
                 <a:solidFill>
                   <a:srgbClr val="111111"/>
                 </a:solidFill>
               </a:defRPr>
             </a:lvl2pPr>
-            <a:lvl3pPr marL="914400" indent="0">
-              <a:buNone/>
-              <a:defRPr sz="1000">
+            <a:lvl3pPr marL="685800" indent="0">
+              <a:buNone/>
+              <a:defRPr sz="750">
                 <a:solidFill>
                   <a:srgbClr val="111111"/>
                 </a:solidFill>
               </a:defRPr>
             </a:lvl3pPr>
-            <a:lvl4pPr marL="1371600" indent="0">
-              <a:buNone/>
-              <a:defRPr sz="900">
+            <a:lvl4pPr marL="1028700" indent="0">
+              <a:buNone/>
+              <a:defRPr sz="675">
                 <a:solidFill>
                   <a:srgbClr val="111111"/>
                 </a:solidFill>
               </a:defRPr>
             </a:lvl4pPr>
-            <a:lvl5pPr marL="1828800" indent="0">
-              <a:buNone/>
-              <a:defRPr sz="900">
+            <a:lvl5pPr marL="1371600" indent="0">
+              <a:buNone/>
+              <a:defRPr sz="675">
                 <a:solidFill>
                   <a:srgbClr val="111111"/>
                 </a:solidFill>
               </a:defRPr>
             </a:lvl5pPr>
-            <a:lvl6pPr marL="2286000" indent="0">
-              <a:buNone/>
-              <a:defRPr sz="900">
+            <a:lvl6pPr marL="1714500" indent="0">
+              <a:buNone/>
+              <a:defRPr sz="675">
                 <a:solidFill>
                   <a:srgbClr val="111111"/>
                 </a:solidFill>
               </a:defRPr>
             </a:lvl6pPr>
-            <a:lvl7pPr marL="2743200" indent="0">
-              <a:buNone/>
-              <a:defRPr sz="900">
+            <a:lvl7pPr marL="2057400" indent="0">
+              <a:buNone/>
+              <a:defRPr sz="675">
                 <a:solidFill>
                   <a:srgbClr val="111111"/>
                 </a:solidFill>
               </a:defRPr>
             </a:lvl7pPr>
-            <a:lvl8pPr marL="3200400" indent="0">
-              <a:buNone/>
-              <a:defRPr sz="900">
+            <a:lvl8pPr marL="2400300" indent="0">
+              <a:buNone/>
+              <a:defRPr sz="675">
                 <a:solidFill>
                   <a:srgbClr val="111111"/>
                 </a:solidFill>
               </a:defRPr>
             </a:lvl8pPr>
-            <a:lvl9pPr marL="3657600" indent="0">
-              <a:buNone/>
-              <a:defRPr sz="900">
+            <a:lvl9pPr marL="2743200" indent="0">
+              <a:buNone/>
+              <a:defRPr sz="675">
                 <a:solidFill>
                   <a:srgbClr val="111111"/>
                 </a:solidFill>
@@ -3121,24 +3251,55 @@
           <a:p>
             <a:pPr lvl="0"/>
             <a:r>
+              <a:rPr lang="en-US">
+                <a:solidFill>
+                  <a:srgbClr val="111111"/>
+                </a:solidFill>
+              </a:rPr>
+              <a:t>Click to edit Master text styles</a:t>
+            </a:r>
+          </a:p>
+        </p:txBody>
+      </p:sp>
+      <p:sp>
+        <p:nvSpPr>
+          <p:cNvPr id="5" name="Date Placeholder 4"/>
+          <p:cNvSpPr>
+            <a:spLocks noGrp="1"/>
+          </p:cNvSpPr>
+          <p:nvPr>
+            <p:ph type="dt" sz="half" idx="10"/>
+          </p:nvPr>
+        </p:nvSpPr>
+        <p:spPr/>
+        <p:txBody>
+          <a:bodyPr/>
+          <a:lstStyle/>
+          <a:p>
+            <a:fld id="{241EB5C9-1307-BA42-ABA2-0BC069CD8E7F}" type="datetimeFigureOut">
               <a:rPr lang="en-US" smtClean="0">
                 <a:solidFill>
                   <a:srgbClr val="111111"/>
                 </a:solidFill>
               </a:rPr>
-              <a:t>Click to edit Master text styles</a:t>
-            </a:r>
-          </a:p>
-        </p:txBody>
-      </p:sp>
-      <p:sp>
-        <p:nvSpPr>
-          <p:cNvPr id="5" name="Date Placeholder 4"/>
-          <p:cNvSpPr>
-            <a:spLocks noGrp="1"/>
-          </p:cNvSpPr>
-          <p:nvPr>
-            <p:ph type="dt" sz="half" idx="10"/>
+              <a:t>1/2/22</a:t>
+            </a:fld>
+            <a:endParaRPr lang="en-US">
+              <a:solidFill>
+                <a:srgbClr val="111111"/>
+              </a:solidFill>
+            </a:endParaRPr>
+          </a:p>
+        </p:txBody>
+      </p:sp>
+      <p:sp>
+        <p:nvSpPr>
+          <p:cNvPr id="6" name="Footer Placeholder 5"/>
+          <p:cNvSpPr>
+            <a:spLocks noGrp="1"/>
+          </p:cNvSpPr>
+          <p:nvPr>
+            <p:ph type="ftr" sz="quarter" idx="11"/>
           </p:nvPr>
         </p:nvSpPr>
         <p:spPr/>
@@ -3146,26 +3307,22 @@
           <a:bodyPr/>
           <a:lstStyle/>
           <a:p>
-            <a:fld id="{5BCAD085-E8A6-8845-BD4E-CB4CCA059FC4}" type="datetimeFigureOut">
-              <a:rPr lang="en-US" smtClean="0">
-                <a:solidFill>
-                  <a:srgbClr val="111111"/>
-                </a:solidFill>
-              </a:rPr>
-              <a:t>1/27/13</a:t>
-            </a:fld>
-            <a:endParaRPr lang="en-US"/>
-          </a:p>
-        </p:txBody>
-      </p:sp>
-      <p:sp>
-        <p:nvSpPr>
-          <p:cNvPr id="6" name="Footer Placeholder 5"/>
-          <p:cNvSpPr>
-            <a:spLocks noGrp="1"/>
-          </p:cNvSpPr>
-          <p:nvPr>
-            <p:ph type="ftr" sz="quarter" idx="11"/>
+            <a:endParaRPr lang="en-US">
+              <a:solidFill>
+                <a:srgbClr val="111111"/>
+              </a:solidFill>
+            </a:endParaRPr>
+          </a:p>
+        </p:txBody>
+      </p:sp>
+      <p:sp>
+        <p:nvSpPr>
+          <p:cNvPr id="7" name="Slide Number Placeholder 6"/>
+          <p:cNvSpPr>
+            <a:spLocks noGrp="1"/>
+          </p:cNvSpPr>
+          <p:nvPr>
+            <p:ph type="sldNum" sz="quarter" idx="12"/>
           </p:nvPr>
         </p:nvSpPr>
         <p:spPr/>
@@ -3173,26 +3330,7 @@
           <a:bodyPr/>
           <a:lstStyle/>
           <a:p>
-            <a:endParaRPr lang="en-US"/>
-          </a:p>
-        </p:txBody>
-      </p:sp>
-      <p:sp>
-        <p:nvSpPr>
-          <p:cNvPr id="7" name="Slide Number Placeholder 6"/>
-          <p:cNvSpPr>
-            <a:spLocks noGrp="1"/>
-          </p:cNvSpPr>
-          <p:nvPr>
-            <p:ph type="sldNum" sz="quarter" idx="12"/>
-          </p:nvPr>
-        </p:nvSpPr>
-        <p:spPr/>
-        <p:txBody>
-          <a:bodyPr/>
-          <a:lstStyle/>
-          <a:p>
-            <a:fld id="{C1FF6DA9-008F-8B48-92A6-B652298478BF}" type="slidenum">
+            <a:fld id="{C5EF2332-01BF-834F-8236-50238282D533}" type="slidenum">
               <a:rPr lang="en-US" smtClean="0">
                 <a:solidFill>
                   <a:srgbClr val="111111"/>
@@ -3200,14 +3338,18 @@
               </a:rPr>
               <a:t>‹#›</a:t>
             </a:fld>
-            <a:endParaRPr lang="en-US"/>
+            <a:endParaRPr lang="en-US">
+              <a:solidFill>
+                <a:srgbClr val="111111"/>
+              </a:solidFill>
+            </a:endParaRPr>
           </a:p>
         </p:txBody>
       </p:sp>
     </p:spTree>
     <p:extLst>
       <p:ext uri="{BB962C8B-B14F-4D97-AF65-F5344CB8AC3E}">
-        <p14:creationId xmlns:p14="http://schemas.microsoft.com/office/powerpoint/2010/main" val="3889236939"/>
+        <p14:creationId xmlns:p14="http://schemas.microsoft.com/office/powerpoint/2010/main" val="3566899855"/>
       </p:ext>
     </p:extLst>
   </p:cSld>
@@ -3221,12 +3363,9 @@
 <p:sldMaster xmlns:a="http://schemas.openxmlformats.org/drawingml/2006/main" xmlns:p="http://schemas.openxmlformats.org/presentationml/2006/main" xmlns:r="http://schemas.openxmlformats.org/officeDocument/2006/relationships">
   <p:cSld>
     <p:bg>
-      <p:bgPr>
-        <a:solidFill>
-          <a:srgbClr val="FFFFFF"/>
-        </a:solidFill>
-        <a:effectLst/>
-      </p:bgPr>
+      <p:bgRef idx="1001">
+        <a:schemeClr val="bg1"/>
+      </p:bgRef>
     </p:bg>
     <p:spTree>
       <p:nvGrpSpPr>
@@ -3254,8 +3393,8 @@
         </p:nvSpPr>
         <p:spPr>
           <a:xfrm>
-            <a:off x="457200" y="274638"/>
-            <a:ext cx="8229600" cy="1143000"/>
+            <a:off x="457200" y="205979"/>
+            <a:ext cx="8229600" cy="857250"/>
           </a:xfrm>
           <a:prstGeom prst="rect">
             <a:avLst/>
@@ -3268,14 +3407,13 @@
           <a:lstStyle/>
           <a:p>
             <a:r>
-              <a:rPr lang="en-US" smtClean="0">
+              <a:rPr lang="en-US">
                 <a:solidFill>
                   <a:srgbClr val="111111"/>
                 </a:solidFill>
               </a:rPr>
               <a:t>Click to edit Master title style</a:t>
             </a:r>
-            <a:endParaRPr lang="en-US"/>
           </a:p>
         </p:txBody>
       </p:sp>
@@ -3291,8 +3429,8 @@
         </p:nvSpPr>
         <p:spPr>
           <a:xfrm>
-            <a:off x="457200" y="1600200"/>
-            <a:ext cx="8229600" cy="4525963"/>
+            <a:off x="457200" y="1200151"/>
+            <a:ext cx="8229600" cy="3394472"/>
           </a:xfrm>
           <a:prstGeom prst="rect">
             <a:avLst/>
@@ -3306,7 +3444,7 @@
           <a:p>
             <a:pPr lvl="0"/>
             <a:r>
-              <a:rPr lang="en-US" smtClean="0">
+              <a:rPr lang="en-US">
                 <a:solidFill>
                   <a:srgbClr val="111111"/>
                 </a:solidFill>
@@ -3317,7 +3455,7 @@
           <a:p>
             <a:pPr lvl="1"/>
             <a:r>
-              <a:rPr lang="en-US" smtClean="0">
+              <a:rPr lang="en-US">
                 <a:solidFill>
                   <a:srgbClr val="111111"/>
                 </a:solidFill>
@@ -3328,7 +3466,7 @@
           <a:p>
             <a:pPr lvl="2"/>
             <a:r>
-              <a:rPr lang="en-US" smtClean="0">
+              <a:rPr lang="en-US">
                 <a:solidFill>
                   <a:srgbClr val="111111"/>
                 </a:solidFill>
@@ -3339,7 +3477,7 @@
           <a:p>
             <a:pPr lvl="3"/>
             <a:r>
-              <a:rPr lang="en-US" smtClean="0">
+              <a:rPr lang="en-US">
                 <a:solidFill>
                   <a:srgbClr val="111111"/>
                 </a:solidFill>
@@ -3350,14 +3488,13 @@
           <a:p>
             <a:pPr lvl="4"/>
             <a:r>
-              <a:rPr lang="en-US" smtClean="0">
+              <a:rPr lang="en-US">
                 <a:solidFill>
                   <a:srgbClr val="111111"/>
                 </a:solidFill>
               </a:rPr>
               <a:t>Fifth level</a:t>
             </a:r>
-            <a:endParaRPr lang="en-US"/>
           </a:p>
         </p:txBody>
       </p:sp>
@@ -3373,8 +3510,8 @@
         </p:nvSpPr>
         <p:spPr>
           <a:xfrm>
-            <a:off x="457200" y="6356350"/>
-            <a:ext cx="2133600" cy="365125"/>
+            <a:off x="457200" y="4767263"/>
+            <a:ext cx="2133600" cy="273844"/>
           </a:xfrm>
           <a:prstGeom prst="rect">
             <a:avLst/>
@@ -3384,7 +3521,7 @@
           <a:bodyPr anchor="ctr" bIns="45720" lIns="91440" rIns="91440" rtlCol="0" tIns="45720" vert="horz"/>
           <a:lstStyle>
             <a:lvl1pPr algn="l">
-              <a:defRPr sz="1200">
+              <a:defRPr sz="900">
                 <a:solidFill>
                   <a:srgbClr val="111111"/>
                 </a:solidFill>
@@ -3392,15 +3529,19 @@
             </a:lvl1pPr>
           </a:lstStyle>
           <a:p>
-            <a:fld id="{5BCAD085-E8A6-8845-BD4E-CB4CCA059FC4}" type="datetimeFigureOut">
+            <a:fld id="{241EB5C9-1307-BA42-ABA2-0BC069CD8E7F}" type="datetimeFigureOut">
               <a:rPr lang="en-US" smtClean="0">
                 <a:solidFill>
                   <a:srgbClr val="111111"/>
                 </a:solidFill>
               </a:rPr>
-              <a:t>1/27/13</a:t>
+              <a:t>1/2/22</a:t>
             </a:fld>
-            <a:endParaRPr lang="en-US"/>
+            <a:endParaRPr lang="en-US">
+              <a:solidFill>
+                <a:srgbClr val="111111"/>
+              </a:solidFill>
+            </a:endParaRPr>
           </a:p>
         </p:txBody>
       </p:sp>
@@ -3416,8 +3557,8 @@
         </p:nvSpPr>
         <p:spPr>
           <a:xfrm>
-            <a:off x="3124200" y="6356350"/>
-            <a:ext cx="2895600" cy="365125"/>
+            <a:off x="3124200" y="4767263"/>
+            <a:ext cx="2895600" cy="273844"/>
           </a:xfrm>
           <a:prstGeom prst="rect">
             <a:avLst/>
@@ -3427,7 +3568,7 @@
           <a:bodyPr anchor="ctr" bIns="45720" lIns="91440" rIns="91440" rtlCol="0" tIns="45720" vert="horz"/>
           <a:lstStyle>
             <a:lvl1pPr algn="ctr">
-              <a:defRPr sz="1200">
+              <a:defRPr sz="900">
                 <a:solidFill>
                   <a:srgbClr val="111111"/>
                 </a:solidFill>
@@ -3435,7 +3576,11 @@
             </a:lvl1pPr>
           </a:lstStyle>
           <a:p>
-            <a:endParaRPr lang="en-US"/>
+            <a:endParaRPr lang="en-US">
+              <a:solidFill>
+                <a:srgbClr val="111111"/>
+              </a:solidFill>
+            </a:endParaRPr>
           </a:p>
         </p:txBody>
       </p:sp>
@@ -3451,8 +3596,8 @@
         </p:nvSpPr>
         <p:spPr>
           <a:xfrm>
-            <a:off x="6553200" y="6356350"/>
-            <a:ext cx="2133600" cy="365125"/>
+            <a:off x="6553200" y="4767263"/>
+            <a:ext cx="2133600" cy="273844"/>
           </a:xfrm>
           <a:prstGeom prst="rect">
             <a:avLst/>
@@ -3462,7 +3607,7 @@
           <a:bodyPr anchor="ctr" bIns="45720" lIns="91440" rIns="91440" rtlCol="0" tIns="45720" vert="horz"/>
           <a:lstStyle>
             <a:lvl1pPr algn="r">
-              <a:defRPr sz="1200">
+              <a:defRPr sz="900">
                 <a:solidFill>
                   <a:srgbClr val="111111"/>
                 </a:solidFill>
@@ -3470,7 +3615,7 @@
             </a:lvl1pPr>
           </a:lstStyle>
           <a:p>
-            <a:fld id="{C1FF6DA9-008F-8B48-92A6-B652298478BF}" type="slidenum">
+            <a:fld id="{C5EF2332-01BF-834F-8236-50238282D533}" type="slidenum">
               <a:rPr lang="en-US" smtClean="0">
                 <a:solidFill>
                   <a:srgbClr val="111111"/>
@@ -3478,14 +3623,18 @@
               </a:rPr>
               <a:t>‹#›</a:t>
             </a:fld>
-            <a:endParaRPr lang="en-US"/>
+            <a:endParaRPr lang="en-US">
+              <a:solidFill>
+                <a:srgbClr val="111111"/>
+              </a:solidFill>
+            </a:endParaRPr>
           </a:p>
         </p:txBody>
       </p:sp>
     </p:spTree>
     <p:extLst>
       <p:ext uri="{BB962C8B-B14F-4D97-AF65-F5344CB8AC3E}">
-        <p14:creationId xmlns:p14="http://schemas.microsoft.com/office/powerpoint/2010/main" val="2209977519"/>
+        <p14:creationId xmlns:p14="http://schemas.microsoft.com/office/powerpoint/2010/main" val="3676200875"/>
       </p:ext>
     </p:extLst>
   </p:cSld>
@@ -3505,12 +3654,12 @@
   </p:sldLayoutIdLst>
   <p:txStyles>
     <p:titleStyle>
-      <a:lvl1pPr algn="ctr" defTabSz="457200" eaLnBrk="1" hangingPunct="1" latinLnBrk="0" rtl="0">
+      <a:lvl1pPr algn="ctr" defTabSz="342900" eaLnBrk="1" hangingPunct="1" latinLnBrk="0" rtl="0">
         <a:spcBef>
           <a:spcPct val="0"/>
         </a:spcBef>
         <a:buNone/>
-        <a:defRPr kern="1200" sz="4400">
+        <a:defRPr kern="1200" sz="3300">
           <a:latin typeface="Cambria"/>
           <a:ea typeface="+mj-ea"/>
           <a:cs typeface="+mj-cs"/>
@@ -3521,37 +3670,7 @@
       </a:lvl1pPr>
     </p:titleStyle>
     <p:bodyStyle>
-      <a:lvl1pPr algn="l" defTabSz="457200" eaLnBrk="1" hangingPunct="1" indent="-342900" latinLnBrk="0" marL="342900" rtl="0">
-        <a:spcBef>
-          <a:spcPct val="20000"/>
-        </a:spcBef>
-        <a:buFont typeface="Arial"/>
-        <a:buChar char="•"/>
-        <a:defRPr kern="1200" sz="3200">
-          <a:latin typeface="Cambria"/>
-          <a:ea typeface="+mn-ea"/>
-          <a:cs typeface="+mn-cs"/>
-          <a:solidFill>
-            <a:srgbClr val="111111"/>
-          </a:solidFill>
-        </a:defRPr>
-      </a:lvl1pPr>
-      <a:lvl2pPr algn="l" defTabSz="457200" eaLnBrk="1" hangingPunct="1" indent="-285750" latinLnBrk="0" marL="742950" rtl="0">
-        <a:spcBef>
-          <a:spcPct val="20000"/>
-        </a:spcBef>
-        <a:buFont typeface="Arial"/>
-        <a:buChar char="–"/>
-        <a:defRPr kern="1200" sz="2800">
-          <a:latin typeface="Cambria"/>
-          <a:ea typeface="+mn-ea"/>
-          <a:cs typeface="+mn-cs"/>
-          <a:solidFill>
-            <a:srgbClr val="111111"/>
-          </a:solidFill>
-        </a:defRPr>
-      </a:lvl2pPr>
-      <a:lvl3pPr algn="l" defTabSz="457200" eaLnBrk="1" hangingPunct="1" indent="-228600" latinLnBrk="0" marL="1143000" rtl="0">
+      <a:lvl1pPr algn="l" defTabSz="342900" eaLnBrk="1" hangingPunct="1" indent="-342900" latinLnBrk="0" marL="342900" rtl="0">
         <a:spcBef>
           <a:spcPct val="20000"/>
         </a:spcBef>
@@ -3565,14 +3684,44 @@
             <a:srgbClr val="111111"/>
           </a:solidFill>
         </a:defRPr>
-      </a:lvl3pPr>
-      <a:lvl4pPr algn="l" defTabSz="457200" eaLnBrk="1" hangingPunct="1" indent="-228600" latinLnBrk="0" marL="1600200" rtl="0">
+      </a:lvl1pPr>
+      <a:lvl2pPr algn="l" defTabSz="342900" eaLnBrk="1" hangingPunct="1" indent="-342900" latinLnBrk="0" marL="685800" rtl="0">
         <a:spcBef>
           <a:spcPct val="20000"/>
         </a:spcBef>
         <a:buFont typeface="Arial"/>
         <a:buChar char="–"/>
-        <a:defRPr kern="1200" sz="2000">
+        <a:defRPr kern="1200" sz="2100">
+          <a:latin typeface="Cambria"/>
+          <a:ea typeface="+mn-ea"/>
+          <a:cs typeface="+mn-cs"/>
+          <a:solidFill>
+            <a:srgbClr val="111111"/>
+          </a:solidFill>
+        </a:defRPr>
+      </a:lvl2pPr>
+      <a:lvl3pPr algn="l" defTabSz="342900" eaLnBrk="1" hangingPunct="1" indent="-342900" latinLnBrk="0" marL="1028700" rtl="0">
+        <a:spcBef>
+          <a:spcPct val="20000"/>
+        </a:spcBef>
+        <a:buFont typeface="Arial"/>
+        <a:buChar char="•"/>
+        <a:defRPr kern="1200" sz="1800">
+          <a:latin typeface="Cambria"/>
+          <a:ea typeface="+mn-ea"/>
+          <a:cs typeface="+mn-cs"/>
+          <a:solidFill>
+            <a:srgbClr val="111111"/>
+          </a:solidFill>
+        </a:defRPr>
+      </a:lvl3pPr>
+      <a:lvl4pPr algn="l" defTabSz="342900" eaLnBrk="1" hangingPunct="1" indent="-342900" latinLnBrk="0" marL="1371600" rtl="0">
+        <a:spcBef>
+          <a:spcPct val="20000"/>
+        </a:spcBef>
+        <a:buFont typeface="Arial"/>
+        <a:buChar char="–"/>
+        <a:defRPr kern="1200" sz="1500">
           <a:latin typeface="Cambria"/>
           <a:ea typeface="+mn-ea"/>
           <a:cs typeface="+mn-cs"/>
@@ -3581,13 +3730,13 @@
           </a:solidFill>
         </a:defRPr>
       </a:lvl4pPr>
-      <a:lvl5pPr algn="l" defTabSz="457200" eaLnBrk="1" hangingPunct="1" indent="-228600" latinLnBrk="0" marL="2057400" rtl="0">
+      <a:lvl5pPr algn="l" defTabSz="342900" eaLnBrk="1" hangingPunct="1" indent="-342900" latinLnBrk="0" marL="1714500" rtl="0">
         <a:spcBef>
           <a:spcPct val="20000"/>
         </a:spcBef>
         <a:buFont typeface="Arial"/>
         <a:buChar char="»"/>
-        <a:defRPr kern="1200" sz="2000">
+        <a:defRPr kern="1200" sz="1500">
           <a:latin typeface="Cambria"/>
           <a:ea typeface="+mn-ea"/>
           <a:cs typeface="+mn-cs"/>
@@ -3596,13 +3745,13 @@
           </a:solidFill>
         </a:defRPr>
       </a:lvl5pPr>
-      <a:lvl6pPr algn="l" defTabSz="457200" eaLnBrk="1" hangingPunct="1" indent="-228600" latinLnBrk="0" marL="2514600" rtl="0">
+      <a:lvl6pPr algn="l" defTabSz="342900" eaLnBrk="1" hangingPunct="1" indent="-342900" latinLnBrk="0" marL="2057400" rtl="0">
         <a:spcBef>
           <a:spcPct val="20000"/>
         </a:spcBef>
         <a:buFont typeface="Arial"/>
         <a:buChar char="•"/>
-        <a:defRPr kern="1200" sz="2000">
+        <a:defRPr kern="1200" sz="1500">
           <a:latin typeface="Cambria"/>
           <a:ea typeface="+mn-ea"/>
           <a:cs typeface="+mn-cs"/>
@@ -3611,13 +3760,13 @@
           </a:solidFill>
         </a:defRPr>
       </a:lvl6pPr>
-      <a:lvl7pPr algn="l" defTabSz="457200" eaLnBrk="1" hangingPunct="1" indent="-228600" latinLnBrk="0" marL="2971800" rtl="0">
+      <a:lvl7pPr algn="l" defTabSz="342900" eaLnBrk="1" hangingPunct="1" indent="-342900" latinLnBrk="0" marL="2400300" rtl="0">
         <a:spcBef>
           <a:spcPct val="20000"/>
         </a:spcBef>
         <a:buFont typeface="Arial"/>
         <a:buChar char="•"/>
-        <a:defRPr kern="1200" sz="2000">
+        <a:defRPr kern="1200" sz="1500">
           <a:latin typeface="Cambria"/>
           <a:ea typeface="+mn-ea"/>
           <a:cs typeface="+mn-cs"/>
@@ -3626,13 +3775,13 @@
           </a:solidFill>
         </a:defRPr>
       </a:lvl7pPr>
-      <a:lvl8pPr algn="l" defTabSz="457200" eaLnBrk="1" hangingPunct="1" indent="-228600" latinLnBrk="0" marL="3429000" rtl="0">
+      <a:lvl8pPr algn="l" defTabSz="342900" eaLnBrk="1" hangingPunct="1" indent="-342900" latinLnBrk="0" marL="2743200" rtl="0">
         <a:spcBef>
           <a:spcPct val="20000"/>
         </a:spcBef>
         <a:buFont typeface="Arial"/>
         <a:buChar char="•"/>
-        <a:defRPr kern="1200" sz="2000">
+        <a:defRPr kern="1200" sz="1500">
           <a:latin typeface="Cambria"/>
           <a:ea typeface="+mn-ea"/>
           <a:cs typeface="+mn-cs"/>
@@ -3641,13 +3790,13 @@
           </a:solidFill>
         </a:defRPr>
       </a:lvl8pPr>
-      <a:lvl9pPr algn="l" defTabSz="457200" eaLnBrk="1" hangingPunct="1" indent="-228600" latinLnBrk="0" marL="3886200" rtl="0">
+      <a:lvl9pPr algn="l" defTabSz="342900" eaLnBrk="1" hangingPunct="1" indent="-342900" latinLnBrk="0" marL="3086100" rtl="0">
         <a:spcBef>
           <a:spcPct val="20000"/>
         </a:spcBef>
         <a:buFont typeface="Arial"/>
         <a:buChar char="•"/>
-        <a:defRPr kern="1200" sz="2000">
+        <a:defRPr kern="1200" sz="1500">
           <a:latin typeface="Cambria"/>
           <a:ea typeface="+mn-ea"/>
           <a:cs typeface="+mn-cs"/>
@@ -3665,8 +3814,8 @@
           </a:solidFill>
         </a:defRPr>
       </a:defPPr>
-      <a:lvl1pPr algn="l" defTabSz="457200" eaLnBrk="1" hangingPunct="1" latinLnBrk="0" marL="0" rtl="0">
-        <a:defRPr kern="1200" sz="1800">
+      <a:lvl1pPr algn="l" defTabSz="342900" eaLnBrk="1" hangingPunct="1" latinLnBrk="0" marL="0" rtl="0">
+        <a:defRPr kern="1200" sz="1350">
           <a:latin typeface="Cambria"/>
           <a:ea typeface="+mn-ea"/>
           <a:cs typeface="+mn-cs"/>
@@ -3675,8 +3824,8 @@
           </a:solidFill>
         </a:defRPr>
       </a:lvl1pPr>
-      <a:lvl2pPr algn="l" defTabSz="457200" eaLnBrk="1" hangingPunct="1" latinLnBrk="0" marL="457200" rtl="0">
-        <a:defRPr kern="1200" sz="1800">
+      <a:lvl2pPr algn="l" defTabSz="342900" eaLnBrk="1" hangingPunct="1" latinLnBrk="0" marL="342900" rtl="0">
+        <a:defRPr kern="1200" sz="1350">
           <a:latin typeface="Cambria"/>
           <a:ea typeface="+mn-ea"/>
           <a:cs typeface="+mn-cs"/>
@@ -3685,8 +3834,8 @@
           </a:solidFill>
         </a:defRPr>
       </a:lvl2pPr>
-      <a:lvl3pPr algn="l" defTabSz="457200" eaLnBrk="1" hangingPunct="1" latinLnBrk="0" marL="914400" rtl="0">
-        <a:defRPr kern="1200" sz="1800">
+      <a:lvl3pPr algn="l" defTabSz="342900" eaLnBrk="1" hangingPunct="1" latinLnBrk="0" marL="685800" rtl="0">
+        <a:defRPr kern="1200" sz="1350">
           <a:latin typeface="Cambria"/>
           <a:ea typeface="+mn-ea"/>
           <a:cs typeface="+mn-cs"/>
@@ -3695,8 +3844,8 @@
           </a:solidFill>
         </a:defRPr>
       </a:lvl3pPr>
-      <a:lvl4pPr algn="l" defTabSz="457200" eaLnBrk="1" hangingPunct="1" latinLnBrk="0" marL="1371600" rtl="0">
-        <a:defRPr kern="1200" sz="1800">
+      <a:lvl4pPr algn="l" defTabSz="342900" eaLnBrk="1" hangingPunct="1" latinLnBrk="0" marL="1028700" rtl="0">
+        <a:defRPr kern="1200" sz="1350">
           <a:latin typeface="Cambria"/>
           <a:ea typeface="+mn-ea"/>
           <a:cs typeface="+mn-cs"/>
@@ -3705,8 +3854,8 @@
           </a:solidFill>
         </a:defRPr>
       </a:lvl4pPr>
-      <a:lvl5pPr algn="l" defTabSz="457200" eaLnBrk="1" hangingPunct="1" latinLnBrk="0" marL="1828800" rtl="0">
-        <a:defRPr kern="1200" sz="1800">
+      <a:lvl5pPr algn="l" defTabSz="342900" eaLnBrk="1" hangingPunct="1" latinLnBrk="0" marL="1371600" rtl="0">
+        <a:defRPr kern="1200" sz="1350">
           <a:latin typeface="Cambria"/>
           <a:ea typeface="+mn-ea"/>
           <a:cs typeface="+mn-cs"/>
@@ -3715,8 +3864,8 @@
           </a:solidFill>
         </a:defRPr>
       </a:lvl5pPr>
-      <a:lvl6pPr algn="l" defTabSz="457200" eaLnBrk="1" hangingPunct="1" latinLnBrk="0" marL="2286000" rtl="0">
-        <a:defRPr kern="1200" sz="1800">
+      <a:lvl6pPr algn="l" defTabSz="342900" eaLnBrk="1" hangingPunct="1" latinLnBrk="0" marL="1714500" rtl="0">
+        <a:defRPr kern="1200" sz="1350">
           <a:latin typeface="Cambria"/>
           <a:ea typeface="+mn-ea"/>
           <a:cs typeface="+mn-cs"/>
@@ -3725,8 +3874,8 @@
           </a:solidFill>
         </a:defRPr>
       </a:lvl6pPr>
-      <a:lvl7pPr algn="l" defTabSz="457200" eaLnBrk="1" hangingPunct="1" latinLnBrk="0" marL="2743200" rtl="0">
-        <a:defRPr kern="1200" sz="1800">
+      <a:lvl7pPr algn="l" defTabSz="342900" eaLnBrk="1" hangingPunct="1" latinLnBrk="0" marL="2057400" rtl="0">
+        <a:defRPr kern="1200" sz="1350">
           <a:latin typeface="Cambria"/>
           <a:ea typeface="+mn-ea"/>
           <a:cs typeface="+mn-cs"/>
@@ -3735,8 +3884,8 @@
           </a:solidFill>
         </a:defRPr>
       </a:lvl7pPr>
-      <a:lvl8pPr algn="l" defTabSz="457200" eaLnBrk="1" hangingPunct="1" latinLnBrk="0" marL="3200400" rtl="0">
-        <a:defRPr kern="1200" sz="1800">
+      <a:lvl8pPr algn="l" defTabSz="342900" eaLnBrk="1" hangingPunct="1" latinLnBrk="0" marL="2400300" rtl="0">
+        <a:defRPr kern="1200" sz="1350">
           <a:latin typeface="Cambria"/>
           <a:ea typeface="+mn-ea"/>
           <a:cs typeface="+mn-cs"/>
@@ -3745,8 +3894,8 @@
           </a:solidFill>
         </a:defRPr>
       </a:lvl8pPr>
-      <a:lvl9pPr algn="l" defTabSz="457200" eaLnBrk="1" hangingPunct="1" latinLnBrk="0" marL="3657600" rtl="0">
-        <a:defRPr kern="1200" sz="1800">
+      <a:lvl9pPr algn="l" defTabSz="342900" eaLnBrk="1" hangingPunct="1" latinLnBrk="0" marL="2743200" rtl="0">
+        <a:defRPr kern="1200" sz="1350">
           <a:latin typeface="Cambria"/>
           <a:ea typeface="+mn-ea"/>
           <a:cs typeface="+mn-cs"/>
@@ -3789,8 +3938,8 @@
         </p:nvSpPr>
         <p:spPr>
           <a:xfrm>
-            <a:off x="685800" y="2130425"/>
-            <a:ext cx="7772400" cy="1470025"/>
+            <a:off x="685800" y="1597819"/>
+            <a:ext cx="7772400" cy="1102519"/>
           </a:xfrm>
         </p:spPr>
         <p:txBody>
@@ -3819,8 +3968,8 @@
         </p:nvSpPr>
         <p:spPr>
           <a:xfrm>
-            <a:off x="1371600" y="3886200"/>
-            <a:ext cx="6400800" cy="1752600"/>
+            <a:off x="1371600" y="2914650"/>
+            <a:ext cx="6400800" cy="1314450"/>
           </a:xfrm>
         </p:spPr>
         <p:txBody>
